--- a/output/wordlabs-go-3day.pptx
+++ b/output/wordlabs-go-3day.pptx
@@ -4240,7 +4240,7 @@
                 <a:ea typeface="Calibri" pitchFamily="34" charset="-122"/>
                 <a:cs typeface="Calibri" pitchFamily="34" charset="-120"/>
               </a:rPr>
-              <a:t>"to move or travel"</a:t>
+              <a:t>"to move from one place to another"</a:t>
             </a:r>
             <a:endParaRPr lang="en-US" sz="2200" dirty="0"/>
           </a:p>
@@ -4279,7 +4279,7 @@
                 <a:ea typeface="Calibri" pitchFamily="34" charset="-122"/>
                 <a:cs typeface="Calibri" pitchFamily="34" charset="-120"/>
               </a:rPr>
-              <a:t>Origin: Latin: ire</a:t>
+              <a:t>Origin: Anglo-Saxon (Old English) root</a:t>
             </a:r>
             <a:endParaRPr lang="en-US" sz="1300" dirty="0"/>
           </a:p>
@@ -5288,7 +5288,7 @@
                 <a:ea typeface="Calibri" pitchFamily="34" charset="-122"/>
                 <a:cs typeface="Calibri" pitchFamily="34" charset="-120"/>
               </a:rPr>
-              <a:t>Word Labs  •  wordlabs.app  •  Root: 'go' = to move or travel</a:t>
+              <a:t>Word Labs  •  wordlabs.app  •  Root: 'go' = to move from one place to another</a:t>
             </a:r>
             <a:endParaRPr lang="en-US" sz="800" dirty="0"/>
           </a:p>
@@ -5928,7 +5928,7 @@
                 <a:ea typeface="Calibri" pitchFamily="34" charset="-122"/>
                 <a:cs typeface="Calibri" pitchFamily="34" charset="-120"/>
               </a:rPr>
-              <a:t>Word Labs  •  wordlabs.app  •  Root: 'go' = to move or travel</a:t>
+              <a:t>Word Labs  •  wordlabs.app  •  Root: 'go' = to move from one place to another</a:t>
             </a:r>
             <a:endParaRPr lang="en-US" sz="800" dirty="0"/>
           </a:p>
@@ -6040,7 +6040,7 @@
                 <a:ea typeface="Calibri" pitchFamily="34" charset="-122"/>
                 <a:cs typeface="Calibri" pitchFamily="34" charset="-120"/>
               </a:rPr>
-              <a:t>She had to </a:t>
+              <a:t>Our team scored three </a:t>
             </a:r>
             <a:pPr algn="l" indent="0" marL="0">
               <a:buNone/>
@@ -6057,7 +6057,7 @@
                 <a:ea typeface="Calibri" pitchFamily="34" charset="-122"/>
                 <a:cs typeface="Calibri" pitchFamily="34" charset="-120"/>
               </a:rPr>
-              <a:t>forego</a:t>
+              <a:t>goals</a:t>
             </a:r>
             <a:pPr algn="l" indent="0" marL="0">
               <a:buNone/>
@@ -6071,7 +6071,7 @@
                 <a:ea typeface="Calibri" pitchFamily="34" charset="-122"/>
                 <a:cs typeface="Calibri" pitchFamily="34" charset="-120"/>
               </a:rPr>
-              <a:t> her lunch break to </a:t>
+              <a:t> in the match. The patient will </a:t>
             </a:r>
             <a:pPr algn="l" indent="0" marL="0">
               <a:buNone/>
@@ -6102,7 +6102,7 @@
                 <a:ea typeface="Calibri" pitchFamily="34" charset="-122"/>
                 <a:cs typeface="Calibri" pitchFamily="34" charset="-120"/>
               </a:rPr>
-              <a:t> the important safety drill.</a:t>
+              <a:t> an operation next week.</a:t>
             </a:r>
             <a:endParaRPr lang="en-US" sz="1800" dirty="0"/>
           </a:p>
@@ -6257,7 +6257,7 @@
                 <a:ea typeface="Trebuchet MS" pitchFamily="34" charset="-122"/>
                 <a:cs typeface="Trebuchet MS" pitchFamily="34" charset="-120"/>
               </a:rPr>
-              <a:t>forego</a:t>
+              <a:t>goals</a:t>
             </a:r>
             <a:endParaRPr lang="en-US" sz="1400" dirty="0"/>
           </a:p>
@@ -6716,7 +6716,7 @@
                 <a:ea typeface="Calibri" pitchFamily="34" charset="-122"/>
                 <a:cs typeface="Calibri" pitchFamily="34" charset="-120"/>
               </a:rPr>
-              <a:t>Word Labs  •  wordlabs.app  •  Root: 'go' = to move or travel</a:t>
+              <a:t>Word Labs  •  wordlabs.app  •  Root: 'go' = to move from one place to another</a:t>
             </a:r>
             <a:endParaRPr lang="en-US" sz="800" dirty="0"/>
           </a:p>
@@ -6855,7 +6855,7 @@
                 <a:ea typeface="Trebuchet MS" pitchFamily="34" charset="-122"/>
                 <a:cs typeface="Trebuchet MS" pitchFamily="34" charset="-120"/>
               </a:rPr>
-              <a:t>forego</a:t>
+              <a:t>goals</a:t>
             </a:r>
             <a:endParaRPr lang="en-US" sz="2800" dirty="0"/>
           </a:p>
@@ -7543,7 +7543,7 @@
                 <a:ea typeface="Calibri" pitchFamily="34" charset="-122"/>
                 <a:cs typeface="Calibri" pitchFamily="34" charset="-120"/>
               </a:rPr>
-              <a:t>Word Labs  •  wordlabs.app  •  Root: 'go' = to move or travel</a:t>
+              <a:t>Word Labs  •  wordlabs.app  •  Root: 'go' = to move from one place to another</a:t>
             </a:r>
             <a:endParaRPr lang="en-US" sz="800" dirty="0"/>
           </a:p>
@@ -7682,7 +7682,7 @@
                 <a:ea typeface="Trebuchet MS" pitchFamily="34" charset="-122"/>
                 <a:cs typeface="Trebuchet MS" pitchFamily="34" charset="-120"/>
               </a:rPr>
-              <a:t>forego</a:t>
+              <a:t>goals</a:t>
             </a:r>
             <a:endParaRPr lang="en-US" sz="2800" dirty="0"/>
           </a:p>
@@ -7762,7 +7762,7 @@
         </p:nvSpPr>
         <p:spPr>
           <a:xfrm>
-            <a:off x="2938272" y="2258568"/>
+            <a:off x="2221992" y="2258568"/>
             <a:ext cx="1828800" cy="292608"/>
           </a:xfrm>
           <a:prstGeom prst="rect">
@@ -7771,11 +7771,11 @@
             </a:avLst>
           </a:prstGeom>
           <a:solidFill>
-            <a:srgbClr val="DDD6FE"/>
+            <a:srgbClr val="CCFBF1"/>
           </a:solidFill>
           <a:ln w="19050">
             <a:solidFill>
-              <a:srgbClr val="7C3AED"/>
+              <a:srgbClr val="0D9488"/>
             </a:solidFill>
             <a:prstDash val="solid"/>
           </a:ln>
@@ -7796,7 +7796,7 @@
         </p:nvSpPr>
         <p:spPr>
           <a:xfrm>
-            <a:off x="2938272" y="2258568"/>
+            <a:off x="2221992" y="2258568"/>
             <a:ext cx="1828800" cy="292608"/>
           </a:xfrm>
           <a:prstGeom prst="rect">
@@ -7815,13 +7815,13 @@
             <a:r>
               <a:rPr lang="en-US" sz="1300" b="1" dirty="0">
                 <a:solidFill>
-                  <a:srgbClr val="4C1D95"/>
+                  <a:srgbClr val="0F766E"/>
                 </a:solidFill>
                 <a:latin typeface="Trebuchet MS" pitchFamily="34" charset="0"/>
                 <a:ea typeface="Trebuchet MS" pitchFamily="34" charset="-122"/>
                 <a:cs typeface="Trebuchet MS" pitchFamily="34" charset="-120"/>
               </a:rPr>
-              <a:t>fore</a:t>
+              <a:t>go</a:t>
             </a:r>
             <a:endParaRPr lang="en-US" sz="1300" dirty="0"/>
           </a:p>
@@ -7835,7 +7835,7 @@
         </p:nvSpPr>
         <p:spPr>
           <a:xfrm>
-            <a:off x="2938272" y="2569464"/>
+            <a:off x="2221992" y="2569464"/>
             <a:ext cx="1828800" cy="201168"/>
           </a:xfrm>
           <a:prstGeom prst="rect">
@@ -7860,7 +7860,7 @@
                 <a:ea typeface="Calibri" pitchFamily="34" charset="-122"/>
                 <a:cs typeface="Calibri" pitchFamily="34" charset="-120"/>
               </a:rPr>
-              <a:t>before, in front</a:t>
+              <a:t>to move from one place to another</a:t>
             </a:r>
             <a:endParaRPr lang="en-US" sz="850" dirty="0"/>
           </a:p>
@@ -7874,7 +7874,7 @@
         </p:nvSpPr>
         <p:spPr>
           <a:xfrm>
-            <a:off x="5803392" y="2258568"/>
+            <a:off x="4370832" y="2258568"/>
             <a:ext cx="1828800" cy="292608"/>
           </a:xfrm>
           <a:prstGeom prst="rect">
@@ -7883,11 +7883,11 @@
             </a:avLst>
           </a:prstGeom>
           <a:solidFill>
-            <a:srgbClr val="CCFBF1"/>
+            <a:srgbClr val="FCE7F3"/>
           </a:solidFill>
           <a:ln w="19050">
             <a:solidFill>
-              <a:srgbClr val="0D9488"/>
+              <a:srgbClr val="DB2777"/>
             </a:solidFill>
             <a:prstDash val="solid"/>
           </a:ln>
@@ -7908,7 +7908,7 @@
         </p:nvSpPr>
         <p:spPr>
           <a:xfrm>
-            <a:off x="5803392" y="2258568"/>
+            <a:off x="4370832" y="2258568"/>
             <a:ext cx="1828800" cy="292608"/>
           </a:xfrm>
           <a:prstGeom prst="rect">
@@ -7927,13 +7927,13 @@
             <a:r>
               <a:rPr lang="en-US" sz="1300" b="1" dirty="0">
                 <a:solidFill>
-                  <a:srgbClr val="0F766E"/>
+                  <a:srgbClr val="9D174D"/>
                 </a:solidFill>
                 <a:latin typeface="Trebuchet MS" pitchFamily="34" charset="0"/>
                 <a:ea typeface="Trebuchet MS" pitchFamily="34" charset="-122"/>
                 <a:cs typeface="Trebuchet MS" pitchFamily="34" charset="-120"/>
               </a:rPr>
-              <a:t>go</a:t>
+              <a:t>al</a:t>
             </a:r>
             <a:endParaRPr lang="en-US" sz="1300" dirty="0"/>
           </a:p>
@@ -7947,7 +7947,7 @@
         </p:nvSpPr>
         <p:spPr>
           <a:xfrm>
-            <a:off x="5803392" y="2569464"/>
+            <a:off x="4370832" y="2569464"/>
             <a:ext cx="1828800" cy="201168"/>
           </a:xfrm>
           <a:prstGeom prst="rect">
@@ -7972,7 +7972,7 @@
                 <a:ea typeface="Calibri" pitchFamily="34" charset="-122"/>
                 <a:cs typeface="Calibri" pitchFamily="34" charset="-120"/>
               </a:rPr>
-              <a:t>to move or travel</a:t>
+              <a:t>related to</a:t>
             </a:r>
             <a:endParaRPr lang="en-US" sz="850" dirty="0"/>
           </a:p>
@@ -7981,6 +7981,118 @@
       <p:sp>
         <p:nvSpPr>
           <p:cNvPr id="22" name="Shape 20"/>
+          <p:cNvSpPr/>
+          <p:nvPr/>
+        </p:nvSpPr>
+        <p:spPr>
+          <a:xfrm>
+            <a:off x="6519672" y="2258568"/>
+            <a:ext cx="1828800" cy="292608"/>
+          </a:xfrm>
+          <a:prstGeom prst="rect">
+            <a:avLst>
+              <a:gd name="adj" fmla="val 25000"/>
+            </a:avLst>
+          </a:prstGeom>
+          <a:solidFill>
+            <a:srgbClr val="FCE7F3"/>
+          </a:solidFill>
+          <a:ln w="19050">
+            <a:solidFill>
+              <a:srgbClr val="DB2777"/>
+            </a:solidFill>
+            <a:prstDash val="solid"/>
+          </a:ln>
+          <a:effectLst>
+            <a:outerShdw sx="100000" sy="100000" kx="0" ky="0" algn="bl" rotWithShape="0" blurRad="101600" dist="38100" dir="8100000">
+              <a:srgbClr val="000000">
+                <a:alpha val="12000"/>
+              </a:srgbClr>
+            </a:outerShdw>
+          </a:effectLst>
+        </p:spPr>
+      </p:sp>
+      <p:sp>
+        <p:nvSpPr>
+          <p:cNvPr id="23" name="Text 21"/>
+          <p:cNvSpPr/>
+          <p:nvPr/>
+        </p:nvSpPr>
+        <p:spPr>
+          <a:xfrm>
+            <a:off x="6519672" y="2258568"/>
+            <a:ext cx="1828800" cy="292608"/>
+          </a:xfrm>
+          <a:prstGeom prst="rect">
+            <a:avLst/>
+          </a:prstGeom>
+          <a:noFill/>
+          <a:ln/>
+        </p:spPr>
+        <p:txBody>
+          <a:bodyPr wrap="square" lIns="0" tIns="0" rIns="0" bIns="0" rtlCol="0" anchor="ctr"/>
+          <a:lstStyle/>
+          <a:p>
+            <a:pPr algn="ctr" indent="0" marL="0">
+              <a:buNone/>
+            </a:pPr>
+            <a:r>
+              <a:rPr lang="en-US" sz="1300" b="1" dirty="0">
+                <a:solidFill>
+                  <a:srgbClr val="9D174D"/>
+                </a:solidFill>
+                <a:latin typeface="Trebuchet MS" pitchFamily="34" charset="0"/>
+                <a:ea typeface="Trebuchet MS" pitchFamily="34" charset="-122"/>
+                <a:cs typeface="Trebuchet MS" pitchFamily="34" charset="-120"/>
+              </a:rPr>
+              <a:t>s</a:t>
+            </a:r>
+            <a:endParaRPr lang="en-US" sz="1300" dirty="0"/>
+          </a:p>
+        </p:txBody>
+      </p:sp>
+      <p:sp>
+        <p:nvSpPr>
+          <p:cNvPr id="24" name="Text 22"/>
+          <p:cNvSpPr/>
+          <p:nvPr/>
+        </p:nvSpPr>
+        <p:spPr>
+          <a:xfrm>
+            <a:off x="6519672" y="2569464"/>
+            <a:ext cx="1828800" cy="201168"/>
+          </a:xfrm>
+          <a:prstGeom prst="rect">
+            <a:avLst/>
+          </a:prstGeom>
+          <a:noFill/>
+          <a:ln/>
+        </p:spPr>
+        <p:txBody>
+          <a:bodyPr wrap="square" lIns="0" tIns="0" rIns="0" bIns="0" rtlCol="0" anchor="t"/>
+          <a:lstStyle/>
+          <a:p>
+            <a:pPr algn="ctr" indent="0" marL="0">
+              <a:buNone/>
+            </a:pPr>
+            <a:r>
+              <a:rPr lang="en-US" sz="850" dirty="0">
+                <a:solidFill>
+                  <a:srgbClr val="475569"/>
+                </a:solidFill>
+                <a:latin typeface="Calibri" pitchFamily="34" charset="0"/>
+                <a:ea typeface="Calibri" pitchFamily="34" charset="-122"/>
+                <a:cs typeface="Calibri" pitchFamily="34" charset="-120"/>
+              </a:rPr>
+              <a:t>plural or present tense</a:t>
+            </a:r>
+            <a:endParaRPr lang="en-US" sz="850" dirty="0"/>
+          </a:p>
+        </p:txBody>
+      </p:sp>
+      <p:sp>
+        <p:nvSpPr>
+          <p:cNvPr id="25" name="Shape 23"/>
           <p:cNvSpPr/>
           <p:nvPr/>
         </p:nvSpPr>
@@ -8007,7 +8119,7 @@
       </p:sp>
       <p:sp>
         <p:nvSpPr>
-          <p:cNvPr id="23" name="Text 21"/>
+          <p:cNvPr id="26" name="Text 24"/>
           <p:cNvSpPr/>
           <p:nvPr/>
         </p:nvSpPr>
@@ -8046,7 +8158,7 @@
       </p:sp>
       <p:sp>
         <p:nvSpPr>
-          <p:cNvPr id="24" name="Shape 22"/>
+          <p:cNvPr id="27" name="Shape 25"/>
           <p:cNvSpPr/>
           <p:nvPr/>
         </p:nvSpPr>
@@ -8073,7 +8185,7 @@
       </p:sp>
       <p:sp>
         <p:nvSpPr>
-          <p:cNvPr id="25" name="Text 23"/>
+          <p:cNvPr id="28" name="Text 26"/>
           <p:cNvSpPr/>
           <p:nvPr/>
         </p:nvSpPr>
@@ -8112,7 +8224,7 @@
       </p:sp>
       <p:sp>
         <p:nvSpPr>
-          <p:cNvPr id="26" name="Shape 24"/>
+          <p:cNvPr id="29" name="Shape 27"/>
           <p:cNvSpPr/>
           <p:nvPr/>
         </p:nvSpPr>
@@ -8139,7 +8251,7 @@
       </p:sp>
       <p:sp>
         <p:nvSpPr>
-          <p:cNvPr id="27" name="Text 25"/>
+          <p:cNvPr id="30" name="Text 28"/>
           <p:cNvSpPr/>
           <p:nvPr/>
         </p:nvSpPr>
@@ -8178,7 +8290,7 @@
       </p:sp>
       <p:sp>
         <p:nvSpPr>
-          <p:cNvPr id="28" name="Shape 26"/>
+          <p:cNvPr id="31" name="Shape 29"/>
           <p:cNvSpPr/>
           <p:nvPr/>
         </p:nvSpPr>
@@ -8205,7 +8317,7 @@
       </p:sp>
       <p:sp>
         <p:nvSpPr>
-          <p:cNvPr id="29" name="Text 27"/>
+          <p:cNvPr id="32" name="Text 30"/>
           <p:cNvSpPr/>
           <p:nvPr/>
         </p:nvSpPr>
@@ -8528,7 +8640,7 @@
                 <a:ea typeface="Calibri" pitchFamily="34" charset="-122"/>
                 <a:cs typeface="Calibri" pitchFamily="34" charset="-120"/>
               </a:rPr>
-              <a:t>Word Labs  •  wordlabs.app  •  Root: 'go' = to move or travel</a:t>
+              <a:t>Word Labs  •  wordlabs.app  •  Root: 'go' = to move from one place to another</a:t>
             </a:r>
             <a:endParaRPr lang="en-US" sz="800" dirty="0"/>
           </a:p>
@@ -8667,7 +8779,7 @@
                 <a:ea typeface="Trebuchet MS" pitchFamily="34" charset="-122"/>
                 <a:cs typeface="Trebuchet MS" pitchFamily="34" charset="-120"/>
               </a:rPr>
-              <a:t>forego</a:t>
+              <a:t>goals</a:t>
             </a:r>
             <a:endParaRPr lang="en-US" sz="2800" dirty="0"/>
           </a:p>
@@ -8747,7 +8859,7 @@
         </p:nvSpPr>
         <p:spPr>
           <a:xfrm>
-            <a:off x="2938272" y="2258568"/>
+            <a:off x="2221992" y="2258568"/>
             <a:ext cx="1828800" cy="292608"/>
           </a:xfrm>
           <a:prstGeom prst="rect">
@@ -8756,11 +8868,11 @@
             </a:avLst>
           </a:prstGeom>
           <a:solidFill>
-            <a:srgbClr val="DDD6FE"/>
+            <a:srgbClr val="CCFBF1"/>
           </a:solidFill>
           <a:ln w="19050">
             <a:solidFill>
-              <a:srgbClr val="7C3AED"/>
+              <a:srgbClr val="0D9488"/>
             </a:solidFill>
             <a:prstDash val="solid"/>
           </a:ln>
@@ -8781,7 +8893,7 @@
         </p:nvSpPr>
         <p:spPr>
           <a:xfrm>
-            <a:off x="2938272" y="2258568"/>
+            <a:off x="2221992" y="2258568"/>
             <a:ext cx="1828800" cy="292608"/>
           </a:xfrm>
           <a:prstGeom prst="rect">
@@ -8800,13 +8912,13 @@
             <a:r>
               <a:rPr lang="en-US" sz="1300" b="1" dirty="0">
                 <a:solidFill>
-                  <a:srgbClr val="4C1D95"/>
+                  <a:srgbClr val="0F766E"/>
                 </a:solidFill>
                 <a:latin typeface="Trebuchet MS" pitchFamily="34" charset="0"/>
                 <a:ea typeface="Trebuchet MS" pitchFamily="34" charset="-122"/>
                 <a:cs typeface="Trebuchet MS" pitchFamily="34" charset="-120"/>
               </a:rPr>
-              <a:t>fore</a:t>
+              <a:t>go</a:t>
             </a:r>
             <a:endParaRPr lang="en-US" sz="1300" dirty="0"/>
           </a:p>
@@ -8820,7 +8932,7 @@
         </p:nvSpPr>
         <p:spPr>
           <a:xfrm>
-            <a:off x="2938272" y="2569464"/>
+            <a:off x="2221992" y="2569464"/>
             <a:ext cx="1828800" cy="201168"/>
           </a:xfrm>
           <a:prstGeom prst="rect">
@@ -8845,7 +8957,7 @@
                 <a:ea typeface="Calibri" pitchFamily="34" charset="-122"/>
                 <a:cs typeface="Calibri" pitchFamily="34" charset="-120"/>
               </a:rPr>
-              <a:t>before, in front</a:t>
+              <a:t>to move from one place to another</a:t>
             </a:r>
             <a:endParaRPr lang="en-US" sz="850" dirty="0"/>
           </a:p>
@@ -8859,7 +8971,7 @@
         </p:nvSpPr>
         <p:spPr>
           <a:xfrm>
-            <a:off x="5803392" y="2258568"/>
+            <a:off x="4370832" y="2258568"/>
             <a:ext cx="1828800" cy="292608"/>
           </a:xfrm>
           <a:prstGeom prst="rect">
@@ -8868,11 +8980,11 @@
             </a:avLst>
           </a:prstGeom>
           <a:solidFill>
-            <a:srgbClr val="CCFBF1"/>
+            <a:srgbClr val="FCE7F3"/>
           </a:solidFill>
           <a:ln w="19050">
             <a:solidFill>
-              <a:srgbClr val="0D9488"/>
+              <a:srgbClr val="DB2777"/>
             </a:solidFill>
             <a:prstDash val="solid"/>
           </a:ln>
@@ -8893,7 +9005,7 @@
         </p:nvSpPr>
         <p:spPr>
           <a:xfrm>
-            <a:off x="5803392" y="2258568"/>
+            <a:off x="4370832" y="2258568"/>
             <a:ext cx="1828800" cy="292608"/>
           </a:xfrm>
           <a:prstGeom prst="rect">
@@ -8912,13 +9024,13 @@
             <a:r>
               <a:rPr lang="en-US" sz="1300" b="1" dirty="0">
                 <a:solidFill>
-                  <a:srgbClr val="0F766E"/>
+                  <a:srgbClr val="9D174D"/>
                 </a:solidFill>
                 <a:latin typeface="Trebuchet MS" pitchFamily="34" charset="0"/>
                 <a:ea typeface="Trebuchet MS" pitchFamily="34" charset="-122"/>
                 <a:cs typeface="Trebuchet MS" pitchFamily="34" charset="-120"/>
               </a:rPr>
-              <a:t>go</a:t>
+              <a:t>al</a:t>
             </a:r>
             <a:endParaRPr lang="en-US" sz="1300" dirty="0"/>
           </a:p>
@@ -8932,7 +9044,7 @@
         </p:nvSpPr>
         <p:spPr>
           <a:xfrm>
-            <a:off x="5803392" y="2569464"/>
+            <a:off x="4370832" y="2569464"/>
             <a:ext cx="1828800" cy="201168"/>
           </a:xfrm>
           <a:prstGeom prst="rect">
@@ -8957,7 +9069,7 @@
                 <a:ea typeface="Calibri" pitchFamily="34" charset="-122"/>
                 <a:cs typeface="Calibri" pitchFamily="34" charset="-120"/>
               </a:rPr>
-              <a:t>to move or travel</a:t>
+              <a:t>related to</a:t>
             </a:r>
             <a:endParaRPr lang="en-US" sz="850" dirty="0"/>
           </a:p>
@@ -8966,6 +9078,118 @@
       <p:sp>
         <p:nvSpPr>
           <p:cNvPr id="22" name="Shape 20"/>
+          <p:cNvSpPr/>
+          <p:nvPr/>
+        </p:nvSpPr>
+        <p:spPr>
+          <a:xfrm>
+            <a:off x="6519672" y="2258568"/>
+            <a:ext cx="1828800" cy="292608"/>
+          </a:xfrm>
+          <a:prstGeom prst="rect">
+            <a:avLst>
+              <a:gd name="adj" fmla="val 25000"/>
+            </a:avLst>
+          </a:prstGeom>
+          <a:solidFill>
+            <a:srgbClr val="FCE7F3"/>
+          </a:solidFill>
+          <a:ln w="19050">
+            <a:solidFill>
+              <a:srgbClr val="DB2777"/>
+            </a:solidFill>
+            <a:prstDash val="solid"/>
+          </a:ln>
+          <a:effectLst>
+            <a:outerShdw sx="100000" sy="100000" kx="0" ky="0" algn="bl" rotWithShape="0" blurRad="101600" dist="38100" dir="8100000">
+              <a:srgbClr val="000000">
+                <a:alpha val="12000"/>
+              </a:srgbClr>
+            </a:outerShdw>
+          </a:effectLst>
+        </p:spPr>
+      </p:sp>
+      <p:sp>
+        <p:nvSpPr>
+          <p:cNvPr id="23" name="Text 21"/>
+          <p:cNvSpPr/>
+          <p:nvPr/>
+        </p:nvSpPr>
+        <p:spPr>
+          <a:xfrm>
+            <a:off x="6519672" y="2258568"/>
+            <a:ext cx="1828800" cy="292608"/>
+          </a:xfrm>
+          <a:prstGeom prst="rect">
+            <a:avLst/>
+          </a:prstGeom>
+          <a:noFill/>
+          <a:ln/>
+        </p:spPr>
+        <p:txBody>
+          <a:bodyPr wrap="square" lIns="0" tIns="0" rIns="0" bIns="0" rtlCol="0" anchor="ctr"/>
+          <a:lstStyle/>
+          <a:p>
+            <a:pPr algn="ctr" indent="0" marL="0">
+              <a:buNone/>
+            </a:pPr>
+            <a:r>
+              <a:rPr lang="en-US" sz="1300" b="1" dirty="0">
+                <a:solidFill>
+                  <a:srgbClr val="9D174D"/>
+                </a:solidFill>
+                <a:latin typeface="Trebuchet MS" pitchFamily="34" charset="0"/>
+                <a:ea typeface="Trebuchet MS" pitchFamily="34" charset="-122"/>
+                <a:cs typeface="Trebuchet MS" pitchFamily="34" charset="-120"/>
+              </a:rPr>
+              <a:t>s</a:t>
+            </a:r>
+            <a:endParaRPr lang="en-US" sz="1300" dirty="0"/>
+          </a:p>
+        </p:txBody>
+      </p:sp>
+      <p:sp>
+        <p:nvSpPr>
+          <p:cNvPr id="24" name="Text 22"/>
+          <p:cNvSpPr/>
+          <p:nvPr/>
+        </p:nvSpPr>
+        <p:spPr>
+          <a:xfrm>
+            <a:off x="6519672" y="2569464"/>
+            <a:ext cx="1828800" cy="201168"/>
+          </a:xfrm>
+          <a:prstGeom prst="rect">
+            <a:avLst/>
+          </a:prstGeom>
+          <a:noFill/>
+          <a:ln/>
+        </p:spPr>
+        <p:txBody>
+          <a:bodyPr wrap="square" lIns="0" tIns="0" rIns="0" bIns="0" rtlCol="0" anchor="t"/>
+          <a:lstStyle/>
+          <a:p>
+            <a:pPr algn="ctr" indent="0" marL="0">
+              <a:buNone/>
+            </a:pPr>
+            <a:r>
+              <a:rPr lang="en-US" sz="850" dirty="0">
+                <a:solidFill>
+                  <a:srgbClr val="475569"/>
+                </a:solidFill>
+                <a:latin typeface="Calibri" pitchFamily="34" charset="0"/>
+                <a:ea typeface="Calibri" pitchFamily="34" charset="-122"/>
+                <a:cs typeface="Calibri" pitchFamily="34" charset="-120"/>
+              </a:rPr>
+              <a:t>plural or present tense</a:t>
+            </a:r>
+            <a:endParaRPr lang="en-US" sz="850" dirty="0"/>
+          </a:p>
+        </p:txBody>
+      </p:sp>
+      <p:sp>
+        <p:nvSpPr>
+          <p:cNvPr id="25" name="Shape 23"/>
           <p:cNvSpPr/>
           <p:nvPr/>
         </p:nvSpPr>
@@ -8992,7 +9216,7 @@
       </p:sp>
       <p:sp>
         <p:nvSpPr>
-          <p:cNvPr id="23" name="Text 21"/>
+          <p:cNvPr id="26" name="Text 24"/>
           <p:cNvSpPr/>
           <p:nvPr/>
         </p:nvSpPr>
@@ -9031,7 +9255,7 @@
       </p:sp>
       <p:sp>
         <p:nvSpPr>
-          <p:cNvPr id="24" name="Shape 22"/>
+          <p:cNvPr id="27" name="Shape 25"/>
           <p:cNvSpPr/>
           <p:nvPr/>
         </p:nvSpPr>
@@ -9058,13 +9282,13 @@
       </p:sp>
       <p:sp>
         <p:nvSpPr>
-          <p:cNvPr id="25" name="Shape 23"/>
-          <p:cNvSpPr/>
-          <p:nvPr/>
-        </p:nvSpPr>
-        <p:spPr>
-          <a:xfrm>
-            <a:off x="2999232" y="3364992"/>
+          <p:cNvPr id="28" name="Shape 26"/>
+          <p:cNvSpPr/>
+          <p:nvPr/>
+        </p:nvSpPr>
+        <p:spPr>
+          <a:xfrm>
+            <a:off x="4370832" y="3364992"/>
             <a:ext cx="1645920" cy="475488"/>
           </a:xfrm>
           <a:prstGeom prst="rect">
@@ -9085,13 +9309,13 @@
       </p:sp>
       <p:sp>
         <p:nvSpPr>
-          <p:cNvPr id="26" name="Text 24"/>
-          <p:cNvSpPr/>
-          <p:nvPr/>
-        </p:nvSpPr>
-        <p:spPr>
-          <a:xfrm>
-            <a:off x="2999232" y="3364992"/>
+          <p:cNvPr id="29" name="Text 27"/>
+          <p:cNvSpPr/>
+          <p:nvPr/>
+        </p:nvSpPr>
+        <p:spPr>
+          <a:xfrm>
+            <a:off x="4370832" y="3364992"/>
             <a:ext cx="1645920" cy="475488"/>
           </a:xfrm>
           <a:prstGeom prst="rect">
@@ -9116,112 +9340,7 @@
                 <a:ea typeface="Trebuchet MS" pitchFamily="34" charset="-122"/>
                 <a:cs typeface="Trebuchet MS" pitchFamily="34" charset="-120"/>
               </a:rPr>
-              <a:t>fore</a:t>
-            </a:r>
-            <a:endParaRPr lang="en-US" sz="1400" dirty="0"/>
-          </a:p>
-        </p:txBody>
-      </p:sp>
-      <p:sp>
-        <p:nvSpPr>
-          <p:cNvPr id="27" name="Text 25"/>
-          <p:cNvSpPr/>
-          <p:nvPr/>
-        </p:nvSpPr>
-        <p:spPr>
-          <a:xfrm>
-            <a:off x="4645152" y="3364992"/>
-            <a:ext cx="1097280" cy="475488"/>
-          </a:xfrm>
-          <a:prstGeom prst="rect">
-            <a:avLst/>
-          </a:prstGeom>
-          <a:noFill/>
-          <a:ln/>
-        </p:spPr>
-        <p:txBody>
-          <a:bodyPr wrap="square" lIns="0" tIns="0" rIns="0" bIns="0" rtlCol="0" anchor="ctr"/>
-          <a:lstStyle/>
-          <a:p>
-            <a:pPr algn="ctr" indent="0" marL="0">
-              <a:buNone/>
-            </a:pPr>
-            <a:r>
-              <a:rPr lang="en-US" sz="1600" b="1" dirty="0">
-                <a:solidFill>
-                  <a:srgbClr val="0D9488"/>
-                </a:solidFill>
-                <a:latin typeface="Trebuchet MS" pitchFamily="34" charset="0"/>
-                <a:ea typeface="Trebuchet MS" pitchFamily="34" charset="-122"/>
-                <a:cs typeface="Trebuchet MS" pitchFamily="34" charset="-120"/>
-              </a:rPr>
-              <a:t>·</a:t>
-            </a:r>
-            <a:endParaRPr lang="en-US" sz="1600" dirty="0"/>
-          </a:p>
-        </p:txBody>
-      </p:sp>
-      <p:sp>
-        <p:nvSpPr>
-          <p:cNvPr id="28" name="Shape 26"/>
-          <p:cNvSpPr/>
-          <p:nvPr/>
-        </p:nvSpPr>
-        <p:spPr>
-          <a:xfrm>
-            <a:off x="5742432" y="3364992"/>
-            <a:ext cx="1645920" cy="475488"/>
-          </a:xfrm>
-          <a:prstGeom prst="rect">
-            <a:avLst>
-              <a:gd name="adj" fmla="val 9615"/>
-            </a:avLst>
-          </a:prstGeom>
-          <a:solidFill>
-            <a:srgbClr val="FFFFFF"/>
-          </a:solidFill>
-          <a:ln w="12700">
-            <a:solidFill>
-              <a:srgbClr val="0D9488"/>
-            </a:solidFill>
-            <a:prstDash val="solid"/>
-          </a:ln>
-        </p:spPr>
-      </p:sp>
-      <p:sp>
-        <p:nvSpPr>
-          <p:cNvPr id="29" name="Text 27"/>
-          <p:cNvSpPr/>
-          <p:nvPr/>
-        </p:nvSpPr>
-        <p:spPr>
-          <a:xfrm>
-            <a:off x="5742432" y="3364992"/>
-            <a:ext cx="1645920" cy="475488"/>
-          </a:xfrm>
-          <a:prstGeom prst="rect">
-            <a:avLst/>
-          </a:prstGeom>
-          <a:noFill/>
-          <a:ln/>
-        </p:spPr>
-        <p:txBody>
-          <a:bodyPr wrap="square" lIns="0" tIns="0" rIns="0" bIns="0" rtlCol="0" anchor="ctr"/>
-          <a:lstStyle/>
-          <a:p>
-            <a:pPr algn="ctr" indent="0" marL="0">
-              <a:buNone/>
-            </a:pPr>
-            <a:r>
-              <a:rPr lang="en-US" sz="1400" b="1" dirty="0">
-                <a:solidFill>
-                  <a:srgbClr val="0D9488"/>
-                </a:solidFill>
-                <a:latin typeface="Trebuchet MS" pitchFamily="34" charset="0"/>
-                <a:ea typeface="Trebuchet MS" pitchFamily="34" charset="-122"/>
-                <a:cs typeface="Trebuchet MS" pitchFamily="34" charset="-120"/>
-              </a:rPr>
-              <a:t>go</a:t>
+              <a:t>goals</a:t>
             </a:r>
             <a:endParaRPr lang="en-US" sz="1400" dirty="0"/>
           </a:p>
@@ -9645,7 +9764,7 @@
                 <a:ea typeface="Calibri" pitchFamily="34" charset="-122"/>
                 <a:cs typeface="Calibri" pitchFamily="34" charset="-120"/>
               </a:rPr>
-              <a:t>Word Labs  •  wordlabs.app  •  Root: 'go' = to move or travel</a:t>
+              <a:t>Word Labs  •  wordlabs.app  •  Root: 'go' = to move from one place to another</a:t>
             </a:r>
             <a:endParaRPr lang="en-US" sz="800" dirty="0"/>
           </a:p>
@@ -9784,7 +9903,7 @@
                 <a:ea typeface="Trebuchet MS" pitchFamily="34" charset="-122"/>
                 <a:cs typeface="Trebuchet MS" pitchFamily="34" charset="-120"/>
               </a:rPr>
-              <a:t>forego</a:t>
+              <a:t>goals</a:t>
             </a:r>
             <a:endParaRPr lang="en-US" sz="2800" dirty="0"/>
           </a:p>
@@ -9864,7 +9983,7 @@
         </p:nvSpPr>
         <p:spPr>
           <a:xfrm>
-            <a:off x="2938272" y="2258568"/>
+            <a:off x="2221992" y="2258568"/>
             <a:ext cx="1828800" cy="292608"/>
           </a:xfrm>
           <a:prstGeom prst="rect">
@@ -9873,11 +9992,11 @@
             </a:avLst>
           </a:prstGeom>
           <a:solidFill>
-            <a:srgbClr val="DDD6FE"/>
+            <a:srgbClr val="CCFBF1"/>
           </a:solidFill>
           <a:ln w="19050">
             <a:solidFill>
-              <a:srgbClr val="7C3AED"/>
+              <a:srgbClr val="0D9488"/>
             </a:solidFill>
             <a:prstDash val="solid"/>
           </a:ln>
@@ -9898,7 +10017,7 @@
         </p:nvSpPr>
         <p:spPr>
           <a:xfrm>
-            <a:off x="2938272" y="2258568"/>
+            <a:off x="2221992" y="2258568"/>
             <a:ext cx="1828800" cy="292608"/>
           </a:xfrm>
           <a:prstGeom prst="rect">
@@ -9917,13 +10036,13 @@
             <a:r>
               <a:rPr lang="en-US" sz="1300" b="1" dirty="0">
                 <a:solidFill>
-                  <a:srgbClr val="4C1D95"/>
+                  <a:srgbClr val="0F766E"/>
                 </a:solidFill>
                 <a:latin typeface="Trebuchet MS" pitchFamily="34" charset="0"/>
                 <a:ea typeface="Trebuchet MS" pitchFamily="34" charset="-122"/>
                 <a:cs typeface="Trebuchet MS" pitchFamily="34" charset="-120"/>
               </a:rPr>
-              <a:t>fore</a:t>
+              <a:t>go</a:t>
             </a:r>
             <a:endParaRPr lang="en-US" sz="1300" dirty="0"/>
           </a:p>
@@ -9937,7 +10056,7 @@
         </p:nvSpPr>
         <p:spPr>
           <a:xfrm>
-            <a:off x="2938272" y="2569464"/>
+            <a:off x="2221992" y="2569464"/>
             <a:ext cx="1828800" cy="201168"/>
           </a:xfrm>
           <a:prstGeom prst="rect">
@@ -9962,7 +10081,7 @@
                 <a:ea typeface="Calibri" pitchFamily="34" charset="-122"/>
                 <a:cs typeface="Calibri" pitchFamily="34" charset="-120"/>
               </a:rPr>
-              <a:t>before, in front</a:t>
+              <a:t>to move from one place to another</a:t>
             </a:r>
             <a:endParaRPr lang="en-US" sz="850" dirty="0"/>
           </a:p>
@@ -9976,7 +10095,7 @@
         </p:nvSpPr>
         <p:spPr>
           <a:xfrm>
-            <a:off x="5803392" y="2258568"/>
+            <a:off x="4370832" y="2258568"/>
             <a:ext cx="1828800" cy="292608"/>
           </a:xfrm>
           <a:prstGeom prst="rect">
@@ -9985,11 +10104,11 @@
             </a:avLst>
           </a:prstGeom>
           <a:solidFill>
-            <a:srgbClr val="CCFBF1"/>
+            <a:srgbClr val="FCE7F3"/>
           </a:solidFill>
           <a:ln w="19050">
             <a:solidFill>
-              <a:srgbClr val="0D9488"/>
+              <a:srgbClr val="DB2777"/>
             </a:solidFill>
             <a:prstDash val="solid"/>
           </a:ln>
@@ -10010,7 +10129,7 @@
         </p:nvSpPr>
         <p:spPr>
           <a:xfrm>
-            <a:off x="5803392" y="2258568"/>
+            <a:off x="4370832" y="2258568"/>
             <a:ext cx="1828800" cy="292608"/>
           </a:xfrm>
           <a:prstGeom prst="rect">
@@ -10029,13 +10148,13 @@
             <a:r>
               <a:rPr lang="en-US" sz="1300" b="1" dirty="0">
                 <a:solidFill>
-                  <a:srgbClr val="0F766E"/>
+                  <a:srgbClr val="9D174D"/>
                 </a:solidFill>
                 <a:latin typeface="Trebuchet MS" pitchFamily="34" charset="0"/>
                 <a:ea typeface="Trebuchet MS" pitchFamily="34" charset="-122"/>
                 <a:cs typeface="Trebuchet MS" pitchFamily="34" charset="-120"/>
               </a:rPr>
-              <a:t>go</a:t>
+              <a:t>al</a:t>
             </a:r>
             <a:endParaRPr lang="en-US" sz="1300" dirty="0"/>
           </a:p>
@@ -10049,7 +10168,7 @@
         </p:nvSpPr>
         <p:spPr>
           <a:xfrm>
-            <a:off x="5803392" y="2569464"/>
+            <a:off x="4370832" y="2569464"/>
             <a:ext cx="1828800" cy="201168"/>
           </a:xfrm>
           <a:prstGeom prst="rect">
@@ -10074,7 +10193,7 @@
                 <a:ea typeface="Calibri" pitchFamily="34" charset="-122"/>
                 <a:cs typeface="Calibri" pitchFamily="34" charset="-120"/>
               </a:rPr>
-              <a:t>to move or travel</a:t>
+              <a:t>related to</a:t>
             </a:r>
             <a:endParaRPr lang="en-US" sz="850" dirty="0"/>
           </a:p>
@@ -10083,6 +10202,118 @@
       <p:sp>
         <p:nvSpPr>
           <p:cNvPr id="22" name="Shape 20"/>
+          <p:cNvSpPr/>
+          <p:nvPr/>
+        </p:nvSpPr>
+        <p:spPr>
+          <a:xfrm>
+            <a:off x="6519672" y="2258568"/>
+            <a:ext cx="1828800" cy="292608"/>
+          </a:xfrm>
+          <a:prstGeom prst="rect">
+            <a:avLst>
+              <a:gd name="adj" fmla="val 25000"/>
+            </a:avLst>
+          </a:prstGeom>
+          <a:solidFill>
+            <a:srgbClr val="FCE7F3"/>
+          </a:solidFill>
+          <a:ln w="19050">
+            <a:solidFill>
+              <a:srgbClr val="DB2777"/>
+            </a:solidFill>
+            <a:prstDash val="solid"/>
+          </a:ln>
+          <a:effectLst>
+            <a:outerShdw sx="100000" sy="100000" kx="0" ky="0" algn="bl" rotWithShape="0" blurRad="101600" dist="38100" dir="8100000">
+              <a:srgbClr val="000000">
+                <a:alpha val="12000"/>
+              </a:srgbClr>
+            </a:outerShdw>
+          </a:effectLst>
+        </p:spPr>
+      </p:sp>
+      <p:sp>
+        <p:nvSpPr>
+          <p:cNvPr id="23" name="Text 21"/>
+          <p:cNvSpPr/>
+          <p:nvPr/>
+        </p:nvSpPr>
+        <p:spPr>
+          <a:xfrm>
+            <a:off x="6519672" y="2258568"/>
+            <a:ext cx="1828800" cy="292608"/>
+          </a:xfrm>
+          <a:prstGeom prst="rect">
+            <a:avLst/>
+          </a:prstGeom>
+          <a:noFill/>
+          <a:ln/>
+        </p:spPr>
+        <p:txBody>
+          <a:bodyPr wrap="square" lIns="0" tIns="0" rIns="0" bIns="0" rtlCol="0" anchor="ctr"/>
+          <a:lstStyle/>
+          <a:p>
+            <a:pPr algn="ctr" indent="0" marL="0">
+              <a:buNone/>
+            </a:pPr>
+            <a:r>
+              <a:rPr lang="en-US" sz="1300" b="1" dirty="0">
+                <a:solidFill>
+                  <a:srgbClr val="9D174D"/>
+                </a:solidFill>
+                <a:latin typeface="Trebuchet MS" pitchFamily="34" charset="0"/>
+                <a:ea typeface="Trebuchet MS" pitchFamily="34" charset="-122"/>
+                <a:cs typeface="Trebuchet MS" pitchFamily="34" charset="-120"/>
+              </a:rPr>
+              <a:t>s</a:t>
+            </a:r>
+            <a:endParaRPr lang="en-US" sz="1300" dirty="0"/>
+          </a:p>
+        </p:txBody>
+      </p:sp>
+      <p:sp>
+        <p:nvSpPr>
+          <p:cNvPr id="24" name="Text 22"/>
+          <p:cNvSpPr/>
+          <p:nvPr/>
+        </p:nvSpPr>
+        <p:spPr>
+          <a:xfrm>
+            <a:off x="6519672" y="2569464"/>
+            <a:ext cx="1828800" cy="201168"/>
+          </a:xfrm>
+          <a:prstGeom prst="rect">
+            <a:avLst/>
+          </a:prstGeom>
+          <a:noFill/>
+          <a:ln/>
+        </p:spPr>
+        <p:txBody>
+          <a:bodyPr wrap="square" lIns="0" tIns="0" rIns="0" bIns="0" rtlCol="0" anchor="t"/>
+          <a:lstStyle/>
+          <a:p>
+            <a:pPr algn="ctr" indent="0" marL="0">
+              <a:buNone/>
+            </a:pPr>
+            <a:r>
+              <a:rPr lang="en-US" sz="850" dirty="0">
+                <a:solidFill>
+                  <a:srgbClr val="475569"/>
+                </a:solidFill>
+                <a:latin typeface="Calibri" pitchFamily="34" charset="0"/>
+                <a:ea typeface="Calibri" pitchFamily="34" charset="-122"/>
+                <a:cs typeface="Calibri" pitchFamily="34" charset="-120"/>
+              </a:rPr>
+              <a:t>plural or present tense</a:t>
+            </a:r>
+            <a:endParaRPr lang="en-US" sz="850" dirty="0"/>
+          </a:p>
+        </p:txBody>
+      </p:sp>
+      <p:sp>
+        <p:nvSpPr>
+          <p:cNvPr id="25" name="Shape 23"/>
           <p:cNvSpPr/>
           <p:nvPr/>
         </p:nvSpPr>
@@ -10109,7 +10340,7 @@
       </p:sp>
       <p:sp>
         <p:nvSpPr>
-          <p:cNvPr id="23" name="Text 21"/>
+          <p:cNvPr id="26" name="Text 24"/>
           <p:cNvSpPr/>
           <p:nvPr/>
         </p:nvSpPr>
@@ -10148,7 +10379,7 @@
       </p:sp>
       <p:sp>
         <p:nvSpPr>
-          <p:cNvPr id="24" name="Shape 22"/>
+          <p:cNvPr id="27" name="Shape 25"/>
           <p:cNvSpPr/>
           <p:nvPr/>
         </p:nvSpPr>
@@ -10175,13 +10406,13 @@
       </p:sp>
       <p:sp>
         <p:nvSpPr>
-          <p:cNvPr id="25" name="Shape 23"/>
-          <p:cNvSpPr/>
-          <p:nvPr/>
-        </p:nvSpPr>
-        <p:spPr>
-          <a:xfrm>
-            <a:off x="2999232" y="3364992"/>
+          <p:cNvPr id="28" name="Shape 26"/>
+          <p:cNvSpPr/>
+          <p:nvPr/>
+        </p:nvSpPr>
+        <p:spPr>
+          <a:xfrm>
+            <a:off x="4370832" y="3364992"/>
             <a:ext cx="1645920" cy="475488"/>
           </a:xfrm>
           <a:prstGeom prst="rect">
@@ -10202,13 +10433,13 @@
       </p:sp>
       <p:sp>
         <p:nvSpPr>
-          <p:cNvPr id="26" name="Text 24"/>
-          <p:cNvSpPr/>
-          <p:nvPr/>
-        </p:nvSpPr>
-        <p:spPr>
-          <a:xfrm>
-            <a:off x="2999232" y="3364992"/>
+          <p:cNvPr id="29" name="Text 27"/>
+          <p:cNvSpPr/>
+          <p:nvPr/>
+        </p:nvSpPr>
+        <p:spPr>
+          <a:xfrm>
+            <a:off x="4370832" y="3364992"/>
             <a:ext cx="1645920" cy="475488"/>
           </a:xfrm>
           <a:prstGeom prst="rect">
@@ -10233,7 +10464,7 @@
                 <a:ea typeface="Trebuchet MS" pitchFamily="34" charset="-122"/>
                 <a:cs typeface="Trebuchet MS" pitchFamily="34" charset="-120"/>
               </a:rPr>
-              <a:t>fore</a:t>
+              <a:t>goals</a:t>
             </a:r>
             <a:endParaRPr lang="en-US" sz="1400" dirty="0"/>
           </a:p>
@@ -10241,14 +10472,41 @@
       </p:sp>
       <p:sp>
         <p:nvSpPr>
-          <p:cNvPr id="27" name="Text 25"/>
-          <p:cNvSpPr/>
-          <p:nvPr/>
-        </p:nvSpPr>
-        <p:spPr>
-          <a:xfrm>
-            <a:off x="4645152" y="3364992"/>
-            <a:ext cx="1097280" cy="475488"/>
+          <p:cNvPr id="30" name="Shape 28"/>
+          <p:cNvSpPr/>
+          <p:nvPr/>
+        </p:nvSpPr>
+        <p:spPr>
+          <a:xfrm>
+            <a:off x="365760" y="4096512"/>
+            <a:ext cx="1371600" cy="804672"/>
+          </a:xfrm>
+          <a:prstGeom prst="rect">
+            <a:avLst>
+              <a:gd name="adj" fmla="val 6818"/>
+            </a:avLst>
+          </a:prstGeom>
+          <a:solidFill>
+            <a:srgbClr val="E2E8F0"/>
+          </a:solidFill>
+          <a:ln w="12700">
+            <a:solidFill>
+              <a:srgbClr val="E2E8F0"/>
+            </a:solidFill>
+            <a:prstDash val="solid"/>
+          </a:ln>
+        </p:spPr>
+      </p:sp>
+      <p:sp>
+        <p:nvSpPr>
+          <p:cNvPr id="31" name="Text 29"/>
+          <p:cNvSpPr/>
+          <p:nvPr/>
+        </p:nvSpPr>
+        <p:spPr>
+          <a:xfrm>
+            <a:off x="365760" y="4096512"/>
+            <a:ext cx="1371600" cy="804672"/>
           </a:xfrm>
           <a:prstGeom prst="rect">
             <a:avLst/>
@@ -10264,57 +10522,84 @@
               <a:buNone/>
             </a:pPr>
             <a:r>
-              <a:rPr lang="en-US" sz="1600" b="1" dirty="0">
-                <a:solidFill>
-                  <a:srgbClr val="0D9488"/>
+              <a:rPr lang="en-US" sz="1100" b="1" dirty="0">
+                <a:solidFill>
+                  <a:srgbClr val="475569"/>
                 </a:solidFill>
                 <a:latin typeface="Trebuchet MS" pitchFamily="34" charset="0"/>
                 <a:ea typeface="Trebuchet MS" pitchFamily="34" charset="-122"/>
                 <a:cs typeface="Trebuchet MS" pitchFamily="34" charset="-120"/>
               </a:rPr>
-              <a:t>·</a:t>
-            </a:r>
-            <a:endParaRPr lang="en-US" sz="1600" dirty="0"/>
-          </a:p>
-        </p:txBody>
-      </p:sp>
-      <p:sp>
-        <p:nvSpPr>
-          <p:cNvPr id="28" name="Shape 26"/>
-          <p:cNvSpPr/>
-          <p:nvPr/>
-        </p:nvSpPr>
-        <p:spPr>
-          <a:xfrm>
-            <a:off x="5742432" y="3364992"/>
-            <a:ext cx="1645920" cy="475488"/>
+              <a:t>Phonemes</a:t>
+            </a:r>
+            <a:endParaRPr lang="en-US" sz="1100" dirty="0"/>
+          </a:p>
+        </p:txBody>
+      </p:sp>
+      <p:sp>
+        <p:nvSpPr>
+          <p:cNvPr id="32" name="Shape 30"/>
+          <p:cNvSpPr/>
+          <p:nvPr/>
+        </p:nvSpPr>
+        <p:spPr>
+          <a:xfrm>
+            <a:off x="1874520" y="4096512"/>
+            <a:ext cx="6903720" cy="658368"/>
           </a:xfrm>
           <a:prstGeom prst="rect">
             <a:avLst>
-              <a:gd name="adj" fmla="val 9615"/>
+              <a:gd name="adj" fmla="val 8333"/>
             </a:avLst>
           </a:prstGeom>
           <a:solidFill>
+            <a:srgbClr val="FCE7F3"/>
+          </a:solidFill>
+          <a:ln w="12700">
+            <a:solidFill>
+              <a:srgbClr val="DB2777"/>
+            </a:solidFill>
+            <a:prstDash val="solid"/>
+          </a:ln>
+        </p:spPr>
+      </p:sp>
+      <p:sp>
+        <p:nvSpPr>
+          <p:cNvPr id="33" name="Shape 31"/>
+          <p:cNvSpPr/>
+          <p:nvPr/>
+        </p:nvSpPr>
+        <p:spPr>
+          <a:xfrm>
+            <a:off x="2670048" y="4169664"/>
+            <a:ext cx="685800" cy="475488"/>
+          </a:xfrm>
+          <a:prstGeom prst="rect">
+            <a:avLst>
+              <a:gd name="adj" fmla="val 7692"/>
+            </a:avLst>
+          </a:prstGeom>
+          <a:solidFill>
             <a:srgbClr val="FFFFFF"/>
           </a:solidFill>
           <a:ln w="12700">
             <a:solidFill>
-              <a:srgbClr val="0D9488"/>
-            </a:solidFill>
-            <a:prstDash val="solid"/>
-          </a:ln>
-        </p:spPr>
-      </p:sp>
-      <p:sp>
-        <p:nvSpPr>
-          <p:cNvPr id="29" name="Text 27"/>
-          <p:cNvSpPr/>
-          <p:nvPr/>
-        </p:nvSpPr>
-        <p:spPr>
-          <a:xfrm>
-            <a:off x="5742432" y="3364992"/>
-            <a:ext cx="1645920" cy="475488"/>
+              <a:srgbClr val="DB2777"/>
+            </a:solidFill>
+            <a:prstDash val="solid"/>
+          </a:ln>
+        </p:spPr>
+      </p:sp>
+      <p:sp>
+        <p:nvSpPr>
+          <p:cNvPr id="34" name="Text 32"/>
+          <p:cNvSpPr/>
+          <p:nvPr/>
+        </p:nvSpPr>
+        <p:spPr>
+          <a:xfrm>
+            <a:off x="2670048" y="4169664"/>
+            <a:ext cx="685800" cy="475488"/>
           </a:xfrm>
           <a:prstGeom prst="rect">
             <a:avLst/>
@@ -10330,57 +10615,57 @@
               <a:buNone/>
             </a:pPr>
             <a:r>
-              <a:rPr lang="en-US" sz="1400" b="1" dirty="0">
-                <a:solidFill>
-                  <a:srgbClr val="0D9488"/>
+              <a:rPr lang="en-US" sz="900" b="1" dirty="0">
+                <a:solidFill>
+                  <a:srgbClr val="9D174D"/>
                 </a:solidFill>
                 <a:latin typeface="Trebuchet MS" pitchFamily="34" charset="0"/>
                 <a:ea typeface="Trebuchet MS" pitchFamily="34" charset="-122"/>
                 <a:cs typeface="Trebuchet MS" pitchFamily="34" charset="-120"/>
               </a:rPr>
-              <a:t>go</a:t>
-            </a:r>
-            <a:endParaRPr lang="en-US" sz="1400" dirty="0"/>
-          </a:p>
-        </p:txBody>
-      </p:sp>
-      <p:sp>
-        <p:nvSpPr>
-          <p:cNvPr id="30" name="Shape 28"/>
-          <p:cNvSpPr/>
-          <p:nvPr/>
-        </p:nvSpPr>
-        <p:spPr>
-          <a:xfrm>
-            <a:off x="365760" y="4096512"/>
-            <a:ext cx="1371600" cy="804672"/>
+              <a:t>g</a:t>
+            </a:r>
+            <a:endParaRPr lang="en-US" sz="900" dirty="0"/>
+          </a:p>
+        </p:txBody>
+      </p:sp>
+      <p:sp>
+        <p:nvSpPr>
+          <p:cNvPr id="35" name="Shape 33"/>
+          <p:cNvSpPr/>
+          <p:nvPr/>
+        </p:nvSpPr>
+        <p:spPr>
+          <a:xfrm>
+            <a:off x="4123944" y="4169664"/>
+            <a:ext cx="685800" cy="475488"/>
           </a:xfrm>
           <a:prstGeom prst="rect">
             <a:avLst>
-              <a:gd name="adj" fmla="val 6818"/>
+              <a:gd name="adj" fmla="val 7692"/>
             </a:avLst>
           </a:prstGeom>
           <a:solidFill>
-            <a:srgbClr val="E2E8F0"/>
-          </a:solidFill>
-          <a:ln w="12700">
-            <a:solidFill>
-              <a:srgbClr val="E2E8F0"/>
-            </a:solidFill>
-            <a:prstDash val="solid"/>
-          </a:ln>
-        </p:spPr>
-      </p:sp>
-      <p:sp>
-        <p:nvSpPr>
-          <p:cNvPr id="31" name="Text 29"/>
-          <p:cNvSpPr/>
-          <p:nvPr/>
-        </p:nvSpPr>
-        <p:spPr>
-          <a:xfrm>
-            <a:off x="365760" y="4096512"/>
-            <a:ext cx="1371600" cy="804672"/>
+            <a:srgbClr val="FFFFFF"/>
+          </a:solidFill>
+          <a:ln w="12700">
+            <a:solidFill>
+              <a:srgbClr val="DB2777"/>
+            </a:solidFill>
+            <a:prstDash val="solid"/>
+          </a:ln>
+        </p:spPr>
+      </p:sp>
+      <p:sp>
+        <p:nvSpPr>
+          <p:cNvPr id="36" name="Text 34"/>
+          <p:cNvSpPr/>
+          <p:nvPr/>
+        </p:nvSpPr>
+        <p:spPr>
+          <a:xfrm>
+            <a:off x="4123944" y="4169664"/>
+            <a:ext cx="685800" cy="475488"/>
           </a:xfrm>
           <a:prstGeom prst="rect">
             <a:avLst/>
@@ -10396,56 +10681,29 @@
               <a:buNone/>
             </a:pPr>
             <a:r>
-              <a:rPr lang="en-US" sz="1100" b="1" dirty="0">
-                <a:solidFill>
-                  <a:srgbClr val="475569"/>
+              <a:rPr lang="en-US" sz="900" b="1" dirty="0">
+                <a:solidFill>
+                  <a:srgbClr val="9D174D"/>
                 </a:solidFill>
                 <a:latin typeface="Trebuchet MS" pitchFamily="34" charset="0"/>
                 <a:ea typeface="Trebuchet MS" pitchFamily="34" charset="-122"/>
                 <a:cs typeface="Trebuchet MS" pitchFamily="34" charset="-120"/>
               </a:rPr>
-              <a:t>Phonemes</a:t>
-            </a:r>
-            <a:endParaRPr lang="en-US" sz="1100" dirty="0"/>
-          </a:p>
-        </p:txBody>
-      </p:sp>
-      <p:sp>
-        <p:nvSpPr>
-          <p:cNvPr id="32" name="Shape 30"/>
-          <p:cNvSpPr/>
-          <p:nvPr/>
-        </p:nvSpPr>
-        <p:spPr>
-          <a:xfrm>
-            <a:off x="1874520" y="4096512"/>
-            <a:ext cx="6903720" cy="658368"/>
-          </a:xfrm>
-          <a:prstGeom prst="rect">
-            <a:avLst>
-              <a:gd name="adj" fmla="val 8333"/>
-            </a:avLst>
-          </a:prstGeom>
-          <a:solidFill>
-            <a:srgbClr val="FCE7F3"/>
-          </a:solidFill>
-          <a:ln w="12700">
-            <a:solidFill>
-              <a:srgbClr val="DB2777"/>
-            </a:solidFill>
-            <a:prstDash val="solid"/>
-          </a:ln>
-        </p:spPr>
-      </p:sp>
-      <p:sp>
-        <p:nvSpPr>
-          <p:cNvPr id="33" name="Shape 31"/>
-          <p:cNvSpPr/>
-          <p:nvPr/>
-        </p:nvSpPr>
-        <p:spPr>
-          <a:xfrm>
-            <a:off x="2427732" y="4169664"/>
+              <a:t>oa</a:t>
+            </a:r>
+            <a:endParaRPr lang="en-US" sz="900" dirty="0"/>
+          </a:p>
+        </p:txBody>
+      </p:sp>
+      <p:sp>
+        <p:nvSpPr>
+          <p:cNvPr id="37" name="Shape 35"/>
+          <p:cNvSpPr/>
+          <p:nvPr/>
+        </p:nvSpPr>
+        <p:spPr>
+          <a:xfrm>
+            <a:off x="5577840" y="4169664"/>
             <a:ext cx="685800" cy="475488"/>
           </a:xfrm>
           <a:prstGeom prst="rect">
@@ -10466,13 +10724,13 @@
       </p:sp>
       <p:sp>
         <p:nvSpPr>
-          <p:cNvPr id="34" name="Text 32"/>
-          <p:cNvSpPr/>
-          <p:nvPr/>
-        </p:nvSpPr>
-        <p:spPr>
-          <a:xfrm>
-            <a:off x="2427732" y="4169664"/>
+          <p:cNvPr id="38" name="Text 36"/>
+          <p:cNvSpPr/>
+          <p:nvPr/>
+        </p:nvSpPr>
+        <p:spPr>
+          <a:xfrm>
+            <a:off x="5577840" y="4169664"/>
             <a:ext cx="685800" cy="475488"/>
           </a:xfrm>
           <a:prstGeom prst="rect">
@@ -10497,7 +10755,7 @@
                 <a:ea typeface="Trebuchet MS" pitchFamily="34" charset="-122"/>
                 <a:cs typeface="Trebuchet MS" pitchFamily="34" charset="-120"/>
               </a:rPr>
-              <a:t>f</a:t>
+              <a:t>l</a:t>
             </a:r>
             <a:endParaRPr lang="en-US" sz="900" dirty="0"/>
           </a:p>
@@ -10505,13 +10763,13 @@
       </p:sp>
       <p:sp>
         <p:nvSpPr>
-          <p:cNvPr id="35" name="Shape 33"/>
-          <p:cNvSpPr/>
-          <p:nvPr/>
-        </p:nvSpPr>
-        <p:spPr>
-          <a:xfrm>
-            <a:off x="3639312" y="4169664"/>
+          <p:cNvPr id="39" name="Shape 37"/>
+          <p:cNvSpPr/>
+          <p:nvPr/>
+        </p:nvSpPr>
+        <p:spPr>
+          <a:xfrm>
+            <a:off x="7031736" y="4169664"/>
             <a:ext cx="685800" cy="475488"/>
           </a:xfrm>
           <a:prstGeom prst="rect">
@@ -10532,13 +10790,13 @@
       </p:sp>
       <p:sp>
         <p:nvSpPr>
-          <p:cNvPr id="36" name="Text 34"/>
-          <p:cNvSpPr/>
-          <p:nvPr/>
-        </p:nvSpPr>
-        <p:spPr>
-          <a:xfrm>
-            <a:off x="3639312" y="4169664"/>
+          <p:cNvPr id="40" name="Text 38"/>
+          <p:cNvSpPr/>
+          <p:nvPr/>
+        </p:nvSpPr>
+        <p:spPr>
+          <a:xfrm>
+            <a:off x="7031736" y="4169664"/>
             <a:ext cx="685800" cy="475488"/>
           </a:xfrm>
           <a:prstGeom prst="rect">
@@ -10563,205 +10821,7 @@
                 <a:ea typeface="Trebuchet MS" pitchFamily="34" charset="-122"/>
                 <a:cs typeface="Trebuchet MS" pitchFamily="34" charset="-120"/>
               </a:rPr>
-              <a:t>or</a:t>
-            </a:r>
-            <a:endParaRPr lang="en-US" sz="900" dirty="0"/>
-          </a:p>
-        </p:txBody>
-      </p:sp>
-      <p:sp>
-        <p:nvSpPr>
-          <p:cNvPr id="37" name="Shape 35"/>
-          <p:cNvSpPr/>
-          <p:nvPr/>
-        </p:nvSpPr>
-        <p:spPr>
-          <a:xfrm>
-            <a:off x="4850892" y="4169664"/>
-            <a:ext cx="685800" cy="475488"/>
-          </a:xfrm>
-          <a:prstGeom prst="rect">
-            <a:avLst>
-              <a:gd name="adj" fmla="val 7692"/>
-            </a:avLst>
-          </a:prstGeom>
-          <a:solidFill>
-            <a:srgbClr val="FFFFFF"/>
-          </a:solidFill>
-          <a:ln w="12700">
-            <a:solidFill>
-              <a:srgbClr val="DB2777"/>
-            </a:solidFill>
-            <a:prstDash val="solid"/>
-          </a:ln>
-        </p:spPr>
-      </p:sp>
-      <p:sp>
-        <p:nvSpPr>
-          <p:cNvPr id="38" name="Text 36"/>
-          <p:cNvSpPr/>
-          <p:nvPr/>
-        </p:nvSpPr>
-        <p:spPr>
-          <a:xfrm>
-            <a:off x="4850892" y="4169664"/>
-            <a:ext cx="685800" cy="475488"/>
-          </a:xfrm>
-          <a:prstGeom prst="rect">
-            <a:avLst/>
-          </a:prstGeom>
-          <a:noFill/>
-          <a:ln/>
-        </p:spPr>
-        <p:txBody>
-          <a:bodyPr wrap="square" lIns="0" tIns="0" rIns="0" bIns="0" rtlCol="0" anchor="ctr"/>
-          <a:lstStyle/>
-          <a:p>
-            <a:pPr algn="ctr" indent="0" marL="0">
-              <a:buNone/>
-            </a:pPr>
-            <a:r>
-              <a:rPr lang="en-US" sz="900" b="1" dirty="0">
-                <a:solidFill>
-                  <a:srgbClr val="9D174D"/>
-                </a:solidFill>
-                <a:latin typeface="Trebuchet MS" pitchFamily="34" charset="0"/>
-                <a:ea typeface="Trebuchet MS" pitchFamily="34" charset="-122"/>
-                <a:cs typeface="Trebuchet MS" pitchFamily="34" charset="-120"/>
-              </a:rPr>
-              <a:t>e</a:t>
-            </a:r>
-            <a:endParaRPr lang="en-US" sz="900" dirty="0"/>
-          </a:p>
-        </p:txBody>
-      </p:sp>
-      <p:sp>
-        <p:nvSpPr>
-          <p:cNvPr id="39" name="Shape 37"/>
-          <p:cNvSpPr/>
-          <p:nvPr/>
-        </p:nvSpPr>
-        <p:spPr>
-          <a:xfrm>
-            <a:off x="6062472" y="4169664"/>
-            <a:ext cx="685800" cy="475488"/>
-          </a:xfrm>
-          <a:prstGeom prst="rect">
-            <a:avLst>
-              <a:gd name="adj" fmla="val 7692"/>
-            </a:avLst>
-          </a:prstGeom>
-          <a:solidFill>
-            <a:srgbClr val="FFFFFF"/>
-          </a:solidFill>
-          <a:ln w="12700">
-            <a:solidFill>
-              <a:srgbClr val="DB2777"/>
-            </a:solidFill>
-            <a:prstDash val="solid"/>
-          </a:ln>
-        </p:spPr>
-      </p:sp>
-      <p:sp>
-        <p:nvSpPr>
-          <p:cNvPr id="40" name="Text 38"/>
-          <p:cNvSpPr/>
-          <p:nvPr/>
-        </p:nvSpPr>
-        <p:spPr>
-          <a:xfrm>
-            <a:off x="6062472" y="4169664"/>
-            <a:ext cx="685800" cy="475488"/>
-          </a:xfrm>
-          <a:prstGeom prst="rect">
-            <a:avLst/>
-          </a:prstGeom>
-          <a:noFill/>
-          <a:ln/>
-        </p:spPr>
-        <p:txBody>
-          <a:bodyPr wrap="square" lIns="0" tIns="0" rIns="0" bIns="0" rtlCol="0" anchor="ctr"/>
-          <a:lstStyle/>
-          <a:p>
-            <a:pPr algn="ctr" indent="0" marL="0">
-              <a:buNone/>
-            </a:pPr>
-            <a:r>
-              <a:rPr lang="en-US" sz="900" b="1" dirty="0">
-                <a:solidFill>
-                  <a:srgbClr val="9D174D"/>
-                </a:solidFill>
-                <a:latin typeface="Trebuchet MS" pitchFamily="34" charset="0"/>
-                <a:ea typeface="Trebuchet MS" pitchFamily="34" charset="-122"/>
-                <a:cs typeface="Trebuchet MS" pitchFamily="34" charset="-120"/>
-              </a:rPr>
-              <a:t>g</a:t>
-            </a:r>
-            <a:endParaRPr lang="en-US" sz="900" dirty="0"/>
-          </a:p>
-        </p:txBody>
-      </p:sp>
-      <p:sp>
-        <p:nvSpPr>
-          <p:cNvPr id="41" name="Shape 39"/>
-          <p:cNvSpPr/>
-          <p:nvPr/>
-        </p:nvSpPr>
-        <p:spPr>
-          <a:xfrm>
-            <a:off x="7274052" y="4169664"/>
-            <a:ext cx="685800" cy="475488"/>
-          </a:xfrm>
-          <a:prstGeom prst="rect">
-            <a:avLst>
-              <a:gd name="adj" fmla="val 7692"/>
-            </a:avLst>
-          </a:prstGeom>
-          <a:solidFill>
-            <a:srgbClr val="FFFFFF"/>
-          </a:solidFill>
-          <a:ln w="12700">
-            <a:solidFill>
-              <a:srgbClr val="DB2777"/>
-            </a:solidFill>
-            <a:prstDash val="solid"/>
-          </a:ln>
-        </p:spPr>
-      </p:sp>
-      <p:sp>
-        <p:nvSpPr>
-          <p:cNvPr id="42" name="Text 40"/>
-          <p:cNvSpPr/>
-          <p:nvPr/>
-        </p:nvSpPr>
-        <p:spPr>
-          <a:xfrm>
-            <a:off x="7274052" y="4169664"/>
-            <a:ext cx="685800" cy="475488"/>
-          </a:xfrm>
-          <a:prstGeom prst="rect">
-            <a:avLst/>
-          </a:prstGeom>
-          <a:noFill/>
-          <a:ln/>
-        </p:spPr>
-        <p:txBody>
-          <a:bodyPr wrap="square" lIns="0" tIns="0" rIns="0" bIns="0" rtlCol="0" anchor="ctr"/>
-          <a:lstStyle/>
-          <a:p>
-            <a:pPr algn="ctr" indent="0" marL="0">
-              <a:buNone/>
-            </a:pPr>
-            <a:r>
-              <a:rPr lang="en-US" sz="900" b="1" dirty="0">
-                <a:solidFill>
-                  <a:srgbClr val="9D174D"/>
-                </a:solidFill>
-                <a:latin typeface="Trebuchet MS" pitchFamily="34" charset="0"/>
-                <a:ea typeface="Trebuchet MS" pitchFamily="34" charset="-122"/>
-                <a:cs typeface="Trebuchet MS" pitchFamily="34" charset="-120"/>
-              </a:rPr>
-              <a:t>o</a:t>
+              <a:t>s</a:t>
             </a:r>
             <a:endParaRPr lang="en-US" sz="900" dirty="0"/>
           </a:p>
@@ -11053,7 +11113,7 @@
                 <a:ea typeface="Calibri" pitchFamily="34" charset="-122"/>
                 <a:cs typeface="Calibri" pitchFamily="34" charset="-120"/>
               </a:rPr>
-              <a:t>Word Labs  •  wordlabs.app  •  Root: 'go' = to move or travel</a:t>
+              <a:t>Word Labs  •  wordlabs.app  •  Root: 'go' = to move from one place to another</a:t>
             </a:r>
             <a:endParaRPr lang="en-US" sz="800" dirty="0"/>
           </a:p>
@@ -11880,7 +11940,7 @@
                 <a:ea typeface="Calibri" pitchFamily="34" charset="-122"/>
                 <a:cs typeface="Calibri" pitchFamily="34" charset="-120"/>
               </a:rPr>
-              <a:t>Word Labs  •  wordlabs.app  •  Root: 'go' = to move or travel</a:t>
+              <a:t>Word Labs  •  wordlabs.app  •  Root: 'go' = to move from one place to another</a:t>
             </a:r>
             <a:endParaRPr lang="en-US" sz="800" dirty="0"/>
           </a:p>
@@ -12197,7 +12257,7 @@
                 <a:ea typeface="Calibri" pitchFamily="34" charset="-122"/>
                 <a:cs typeface="Calibri" pitchFamily="34" charset="-120"/>
               </a:rPr>
-              <a:t>beneath, through</a:t>
+              <a:t>below</a:t>
             </a:r>
             <a:endParaRPr lang="en-US" sz="850" dirty="0"/>
           </a:p>
@@ -12309,7 +12369,7 @@
                 <a:ea typeface="Calibri" pitchFamily="34" charset="-122"/>
                 <a:cs typeface="Calibri" pitchFamily="34" charset="-120"/>
               </a:rPr>
-              <a:t>to move or travel</a:t>
+              <a:t>to move from one place to another</a:t>
             </a:r>
             <a:endParaRPr lang="en-US" sz="850" dirty="0"/>
           </a:p>
@@ -12865,7 +12925,7 @@
                 <a:ea typeface="Calibri" pitchFamily="34" charset="-122"/>
                 <a:cs typeface="Calibri" pitchFamily="34" charset="-120"/>
               </a:rPr>
-              <a:t>Word Labs  •  wordlabs.app  •  Root: 'go' = to move or travel</a:t>
+              <a:t>Word Labs  •  wordlabs.app  •  Root: 'go' = to move from one place to another</a:t>
             </a:r>
             <a:endParaRPr lang="en-US" sz="800" dirty="0"/>
           </a:p>
@@ -13182,7 +13242,7 @@
                 <a:ea typeface="Calibri" pitchFamily="34" charset="-122"/>
                 <a:cs typeface="Calibri" pitchFamily="34" charset="-120"/>
               </a:rPr>
-              <a:t>beneath, through</a:t>
+              <a:t>below</a:t>
             </a:r>
             <a:endParaRPr lang="en-US" sz="850" dirty="0"/>
           </a:p>
@@ -13294,7 +13354,7 @@
                 <a:ea typeface="Calibri" pitchFamily="34" charset="-122"/>
                 <a:cs typeface="Calibri" pitchFamily="34" charset="-120"/>
               </a:rPr>
-              <a:t>to move or travel</a:t>
+              <a:t>to move from one place to another</a:t>
             </a:r>
             <a:endParaRPr lang="en-US" sz="850" dirty="0"/>
           </a:p>
@@ -13996,7 +14056,7 @@
                 <a:ea typeface="Calibri" pitchFamily="34" charset="-122"/>
                 <a:cs typeface="Calibri" pitchFamily="34" charset="-120"/>
               </a:rPr>
-              <a:t>Root 'go' — to move or travel</a:t>
+              <a:t>Root 'go' — to move from one place to another</a:t>
             </a:r>
             <a:endParaRPr lang="en-US" sz="1600" dirty="0"/>
           </a:p>
@@ -14352,7 +14412,7 @@
                 <a:ea typeface="Calibri" pitchFamily="34" charset="-122"/>
                 <a:cs typeface="Calibri" pitchFamily="34" charset="-120"/>
               </a:rPr>
-              <a:t>Word Labs  •  wordlabs.app  •  Root: 'go' = to move or travel</a:t>
+              <a:t>Word Labs  •  wordlabs.app  •  Root: 'go' = to move from one place to another</a:t>
             </a:r>
             <a:endParaRPr lang="en-US" sz="800" dirty="0"/>
           </a:p>
@@ -14669,7 +14729,7 @@
                 <a:ea typeface="Calibri" pitchFamily="34" charset="-122"/>
                 <a:cs typeface="Calibri" pitchFamily="34" charset="-120"/>
               </a:rPr>
-              <a:t>beneath, through</a:t>
+              <a:t>below</a:t>
             </a:r>
             <a:endParaRPr lang="en-US" sz="850" dirty="0"/>
           </a:p>
@@ -14781,7 +14841,7 @@
                 <a:ea typeface="Calibri" pitchFamily="34" charset="-122"/>
                 <a:cs typeface="Calibri" pitchFamily="34" charset="-120"/>
               </a:rPr>
-              <a:t>to move or travel</a:t>
+              <a:t>to move from one place to another</a:t>
             </a:r>
             <a:endParaRPr lang="en-US" sz="850" dirty="0"/>
           </a:p>
@@ -16213,7 +16273,7 @@
                 <a:ea typeface="Calibri" pitchFamily="34" charset="-122"/>
                 <a:cs typeface="Calibri" pitchFamily="34" charset="-120"/>
               </a:rPr>
-              <a:t>Word Labs  •  wordlabs.app  •  Root: 'go' = to move or travel</a:t>
+              <a:t>Word Labs  •  wordlabs.app  •  Root: 'go' = to move from one place to another</a:t>
             </a:r>
             <a:endParaRPr lang="en-US" sz="800" dirty="0"/>
           </a:p>
@@ -16547,7 +16607,7 @@
                 <a:ea typeface="Trebuchet MS" pitchFamily="34" charset="-122"/>
                 <a:cs typeface="Trebuchet MS" pitchFamily="34" charset="-120"/>
               </a:rPr>
-              <a:t>2</a:t>
+              <a:t>0</a:t>
             </a:r>
             <a:pPr algn="ctr" indent="0" marL="0">
               <a:buNone/>
@@ -16561,7 +16621,7 @@
                 <a:ea typeface="Trebuchet MS" pitchFamily="34" charset="-122"/>
                 <a:cs typeface="Trebuchet MS" pitchFamily="34" charset="-120"/>
               </a:rPr>
-              <a:t>  punctuation marks</a:t>
+              <a:t>  punctuation mark</a:t>
             </a:r>
             <a:endParaRPr lang="en-US" sz="2800" dirty="0"/>
           </a:p>
@@ -16853,7 +16913,7 @@
                 <a:ea typeface="Calibri" pitchFamily="34" charset="-122"/>
                 <a:cs typeface="Calibri" pitchFamily="34" charset="-120"/>
               </a:rPr>
-              <a:t>Word Labs  •  wordlabs.app  •  Root: 'go' = to move or travel</a:t>
+              <a:t>Word Labs  •  wordlabs.app  •  Root: 'go' = to move from one place to another</a:t>
             </a:r>
             <a:endParaRPr lang="en-US" sz="800" dirty="0"/>
           </a:p>
@@ -16965,7 +17025,7 @@
                 <a:ea typeface="Calibri" pitchFamily="34" charset="-122"/>
                 <a:cs typeface="Calibri" pitchFamily="34" charset="-120"/>
               </a:rPr>
-              <a:t>The </a:t>
+              <a:t>The bridge is currently </a:t>
             </a:r>
             <a:pPr algn="l" indent="0" marL="0">
               <a:buNone/>
@@ -16982,7 +17042,7 @@
                 <a:ea typeface="Calibri" pitchFamily="34" charset="-122"/>
                 <a:cs typeface="Calibri" pitchFamily="34" charset="-120"/>
               </a:rPr>
-              <a:t>outgoing</a:t>
+              <a:t>undergoing</a:t>
             </a:r>
             <a:pPr algn="l" indent="0" marL="0">
               <a:buNone/>
@@ -16996,7 +17056,7 @@
                 <a:ea typeface="Calibri" pitchFamily="34" charset="-122"/>
                 <a:cs typeface="Calibri" pitchFamily="34" charset="-120"/>
               </a:rPr>
-              <a:t> captain chose to </a:t>
+              <a:t> repairs after the storm. The </a:t>
             </a:r>
             <a:pPr algn="l" indent="0" marL="0">
               <a:buNone/>
@@ -17013,7 +17073,7 @@
                 <a:ea typeface="Calibri" pitchFamily="34" charset="-122"/>
                 <a:cs typeface="Calibri" pitchFamily="34" charset="-120"/>
               </a:rPr>
-              <a:t>forego</a:t>
+              <a:t>Congo</a:t>
             </a:r>
             <a:pPr algn="l" indent="0" marL="0">
               <a:buNone/>
@@ -17027,7 +17087,7 @@
                 <a:ea typeface="Calibri" pitchFamily="34" charset="-122"/>
                 <a:cs typeface="Calibri" pitchFamily="34" charset="-120"/>
               </a:rPr>
-              <a:t> the trophy, but still had to </a:t>
+              <a:t> River flows through the rainforest in Central Africa. The </a:t>
             </a:r>
             <a:pPr algn="l" indent="0" marL="0">
               <a:buNone/>
@@ -17044,7 +17104,7 @@
                 <a:ea typeface="Calibri" pitchFamily="34" charset="-122"/>
                 <a:cs typeface="Calibri" pitchFamily="34" charset="-120"/>
               </a:rPr>
-              <a:t>undergo</a:t>
+              <a:t>foregoing</a:t>
             </a:r>
             <a:pPr algn="l" indent="0" marL="0">
               <a:buNone/>
@@ -17058,7 +17118,7 @@
                 <a:ea typeface="Calibri" pitchFamily="34" charset="-122"/>
                 <a:cs typeface="Calibri" pitchFamily="34" charset="-120"/>
               </a:rPr>
-              <a:t> the awards ceremony.</a:t>
+              <a:t> paragraph explains the main idea of the essay.</a:t>
             </a:r>
             <a:endParaRPr lang="en-US" sz="1800" dirty="0"/>
           </a:p>
@@ -17213,7 +17273,7 @@
                 <a:ea typeface="Trebuchet MS" pitchFamily="34" charset="-122"/>
                 <a:cs typeface="Trebuchet MS" pitchFamily="34" charset="-120"/>
               </a:rPr>
-              <a:t>outgoing</a:t>
+              <a:t>undergoing</a:t>
             </a:r>
             <a:endParaRPr lang="en-US" sz="1400" dirty="0"/>
           </a:p>
@@ -17341,7 +17401,7 @@
                 <a:ea typeface="Trebuchet MS" pitchFamily="34" charset="-122"/>
                 <a:cs typeface="Trebuchet MS" pitchFamily="34" charset="-120"/>
               </a:rPr>
-              <a:t>forego</a:t>
+              <a:t>congo</a:t>
             </a:r>
             <a:endParaRPr lang="en-US" sz="1400" dirty="0"/>
           </a:p>
@@ -17469,7 +17529,7 @@
                 <a:ea typeface="Trebuchet MS" pitchFamily="34" charset="-122"/>
                 <a:cs typeface="Trebuchet MS" pitchFamily="34" charset="-120"/>
               </a:rPr>
-              <a:t>undergo</a:t>
+              <a:t>foregoing</a:t>
             </a:r>
             <a:endParaRPr lang="en-US" sz="1400" dirty="0"/>
           </a:p>
@@ -17800,7 +17860,7 @@
                 <a:ea typeface="Calibri" pitchFamily="34" charset="-122"/>
                 <a:cs typeface="Calibri" pitchFamily="34" charset="-120"/>
               </a:rPr>
-              <a:t>Word Labs  •  wordlabs.app  •  Root: 'go' = to move or travel</a:t>
+              <a:t>Word Labs  •  wordlabs.app  •  Root: 'go' = to move from one place to another</a:t>
             </a:r>
             <a:endParaRPr lang="en-US" sz="800" dirty="0"/>
           </a:p>
@@ -17939,7 +17999,7 @@
                 <a:ea typeface="Trebuchet MS" pitchFamily="34" charset="-122"/>
                 <a:cs typeface="Trebuchet MS" pitchFamily="34" charset="-120"/>
               </a:rPr>
-              <a:t>outgoing</a:t>
+              <a:t>undergoing</a:t>
             </a:r>
             <a:endParaRPr lang="en-US" sz="2800" dirty="0"/>
           </a:p>
@@ -18627,7 +18687,7 @@
                 <a:ea typeface="Calibri" pitchFamily="34" charset="-122"/>
                 <a:cs typeface="Calibri" pitchFamily="34" charset="-120"/>
               </a:rPr>
-              <a:t>Word Labs  •  wordlabs.app  •  Root: 'go' = to move or travel</a:t>
+              <a:t>Word Labs  •  wordlabs.app  •  Root: 'go' = to move from one place to another</a:t>
             </a:r>
             <a:endParaRPr lang="en-US" sz="800" dirty="0"/>
           </a:p>
@@ -18766,7 +18826,7 @@
                 <a:ea typeface="Trebuchet MS" pitchFamily="34" charset="-122"/>
                 <a:cs typeface="Trebuchet MS" pitchFamily="34" charset="-120"/>
               </a:rPr>
-              <a:t>outgoing</a:t>
+              <a:t>undergoing</a:t>
             </a:r>
             <a:endParaRPr lang="en-US" sz="2800" dirty="0"/>
           </a:p>
@@ -18905,7 +18965,7 @@
                 <a:ea typeface="Trebuchet MS" pitchFamily="34" charset="-122"/>
                 <a:cs typeface="Trebuchet MS" pitchFamily="34" charset="-120"/>
               </a:rPr>
-              <a:t>out</a:t>
+              <a:t>under</a:t>
             </a:r>
             <a:endParaRPr lang="en-US" sz="1300" dirty="0"/>
           </a:p>
@@ -18944,7 +19004,7 @@
                 <a:ea typeface="Calibri" pitchFamily="34" charset="-122"/>
                 <a:cs typeface="Calibri" pitchFamily="34" charset="-120"/>
               </a:rPr>
-              <a:t>beyond, outside</a:t>
+              <a:t>below</a:t>
             </a:r>
             <a:endParaRPr lang="en-US" sz="850" dirty="0"/>
           </a:p>
@@ -19056,7 +19116,7 @@
                 <a:ea typeface="Calibri" pitchFamily="34" charset="-122"/>
                 <a:cs typeface="Calibri" pitchFamily="34" charset="-120"/>
               </a:rPr>
-              <a:t>to move or travel</a:t>
+              <a:t>to move from one place to another</a:t>
             </a:r>
             <a:endParaRPr lang="en-US" sz="850" dirty="0"/>
           </a:p>
@@ -19168,7 +19228,7 @@
                 <a:ea typeface="Calibri" pitchFamily="34" charset="-122"/>
                 <a:cs typeface="Calibri" pitchFamily="34" charset="-120"/>
               </a:rPr>
-              <a:t>in the process of</a:t>
+              <a:t>happening now</a:t>
             </a:r>
             <a:endParaRPr lang="en-US" sz="850" dirty="0"/>
           </a:p>
@@ -19724,7 +19784,7 @@
                 <a:ea typeface="Calibri" pitchFamily="34" charset="-122"/>
                 <a:cs typeface="Calibri" pitchFamily="34" charset="-120"/>
               </a:rPr>
-              <a:t>Word Labs  •  wordlabs.app  •  Root: 'go' = to move or travel</a:t>
+              <a:t>Word Labs  •  wordlabs.app  •  Root: 'go' = to move from one place to another</a:t>
             </a:r>
             <a:endParaRPr lang="en-US" sz="800" dirty="0"/>
           </a:p>
@@ -19863,7 +19923,7 @@
                 <a:ea typeface="Trebuchet MS" pitchFamily="34" charset="-122"/>
                 <a:cs typeface="Trebuchet MS" pitchFamily="34" charset="-120"/>
               </a:rPr>
-              <a:t>outgoing</a:t>
+              <a:t>undergoing</a:t>
             </a:r>
             <a:endParaRPr lang="en-US" sz="2800" dirty="0"/>
           </a:p>
@@ -20002,7 +20062,7 @@
                 <a:ea typeface="Trebuchet MS" pitchFamily="34" charset="-122"/>
                 <a:cs typeface="Trebuchet MS" pitchFamily="34" charset="-120"/>
               </a:rPr>
-              <a:t>out</a:t>
+              <a:t>under</a:t>
             </a:r>
             <a:endParaRPr lang="en-US" sz="1300" dirty="0"/>
           </a:p>
@@ -20041,7 +20101,7 @@
                 <a:ea typeface="Calibri" pitchFamily="34" charset="-122"/>
                 <a:cs typeface="Calibri" pitchFamily="34" charset="-120"/>
               </a:rPr>
-              <a:t>beyond, outside</a:t>
+              <a:t>below</a:t>
             </a:r>
             <a:endParaRPr lang="en-US" sz="850" dirty="0"/>
           </a:p>
@@ -20153,7 +20213,7 @@
                 <a:ea typeface="Calibri" pitchFamily="34" charset="-122"/>
                 <a:cs typeface="Calibri" pitchFamily="34" charset="-120"/>
               </a:rPr>
-              <a:t>to move or travel</a:t>
+              <a:t>to move from one place to another</a:t>
             </a:r>
             <a:endParaRPr lang="en-US" sz="850" dirty="0"/>
           </a:p>
@@ -20265,7 +20325,7 @@
                 <a:ea typeface="Calibri" pitchFamily="34" charset="-122"/>
                 <a:cs typeface="Calibri" pitchFamily="34" charset="-120"/>
               </a:rPr>
-              <a:t>in the process of</a:t>
+              <a:t>happening now</a:t>
             </a:r>
             <a:endParaRPr lang="en-US" sz="850" dirty="0"/>
           </a:p>
@@ -20372,8 +20432,8 @@
         </p:nvSpPr>
         <p:spPr>
           <a:xfrm>
-            <a:off x="2313432" y="3364992"/>
-            <a:ext cx="1645920" cy="475488"/>
+            <a:off x="1975104" y="3364992"/>
+            <a:ext cx="1554480" cy="475488"/>
           </a:xfrm>
           <a:prstGeom prst="rect">
             <a:avLst>
@@ -20399,8 +20459,8 @@
         </p:nvSpPr>
         <p:spPr>
           <a:xfrm>
-            <a:off x="2313432" y="3364992"/>
-            <a:ext cx="1645920" cy="475488"/>
+            <a:off x="1975104" y="3364992"/>
+            <a:ext cx="1554480" cy="475488"/>
           </a:xfrm>
           <a:prstGeom prst="rect">
             <a:avLst/>
@@ -20424,7 +20484,7 @@
                 <a:ea typeface="Trebuchet MS" pitchFamily="34" charset="-122"/>
                 <a:cs typeface="Trebuchet MS" pitchFamily="34" charset="-120"/>
               </a:rPr>
-              <a:t>out</a:t>
+              <a:t>un</a:t>
             </a:r>
             <a:endParaRPr lang="en-US" sz="1400" dirty="0"/>
           </a:p>
@@ -20438,8 +20498,8 @@
         </p:nvSpPr>
         <p:spPr>
           <a:xfrm>
-            <a:off x="3959352" y="3364992"/>
-            <a:ext cx="411480" cy="475488"/>
+            <a:off x="3529584" y="3364992"/>
+            <a:ext cx="73152" cy="475488"/>
           </a:xfrm>
           <a:prstGeom prst="rect">
             <a:avLst/>
@@ -20477,8 +20537,8 @@
         </p:nvSpPr>
         <p:spPr>
           <a:xfrm>
-            <a:off x="4370832" y="3364992"/>
-            <a:ext cx="1645920" cy="475488"/>
+            <a:off x="3602736" y="3364992"/>
+            <a:ext cx="1554480" cy="475488"/>
           </a:xfrm>
           <a:prstGeom prst="rect">
             <a:avLst>
@@ -20504,8 +20564,8 @@
         </p:nvSpPr>
         <p:spPr>
           <a:xfrm>
-            <a:off x="4370832" y="3364992"/>
-            <a:ext cx="1645920" cy="475488"/>
+            <a:off x="3602736" y="3364992"/>
+            <a:ext cx="1554480" cy="475488"/>
           </a:xfrm>
           <a:prstGeom prst="rect">
             <a:avLst/>
@@ -20529,7 +20589,7 @@
                 <a:ea typeface="Trebuchet MS" pitchFamily="34" charset="-122"/>
                 <a:cs typeface="Trebuchet MS" pitchFamily="34" charset="-120"/>
               </a:rPr>
-              <a:t>go</a:t>
+              <a:t>der</a:t>
             </a:r>
             <a:endParaRPr lang="en-US" sz="1400" dirty="0"/>
           </a:p>
@@ -20543,8 +20603,8 @@
         </p:nvSpPr>
         <p:spPr>
           <a:xfrm>
-            <a:off x="6016752" y="3364992"/>
-            <a:ext cx="411480" cy="475488"/>
+            <a:off x="5157216" y="3364992"/>
+            <a:ext cx="73152" cy="475488"/>
           </a:xfrm>
           <a:prstGeom prst="rect">
             <a:avLst/>
@@ -20582,8 +20642,8 @@
         </p:nvSpPr>
         <p:spPr>
           <a:xfrm>
-            <a:off x="6428232" y="3364992"/>
-            <a:ext cx="1645920" cy="475488"/>
+            <a:off x="5230368" y="3364992"/>
+            <a:ext cx="1554480" cy="475488"/>
           </a:xfrm>
           <a:prstGeom prst="rect">
             <a:avLst>
@@ -20609,8 +20669,8 @@
         </p:nvSpPr>
         <p:spPr>
           <a:xfrm>
-            <a:off x="6428232" y="3364992"/>
-            <a:ext cx="1645920" cy="475488"/>
+            <a:off x="5230368" y="3364992"/>
+            <a:ext cx="1554480" cy="475488"/>
           </a:xfrm>
           <a:prstGeom prst="rect">
             <a:avLst/>
@@ -20634,6 +20694,111 @@
                 <a:ea typeface="Trebuchet MS" pitchFamily="34" charset="-122"/>
                 <a:cs typeface="Trebuchet MS" pitchFamily="34" charset="-120"/>
               </a:rPr>
+              <a:t>go</a:t>
+            </a:r>
+            <a:endParaRPr lang="en-US" sz="1400" dirty="0"/>
+          </a:p>
+        </p:txBody>
+      </p:sp>
+      <p:sp>
+        <p:nvSpPr>
+          <p:cNvPr id="36" name="Text 34"/>
+          <p:cNvSpPr/>
+          <p:nvPr/>
+        </p:nvSpPr>
+        <p:spPr>
+          <a:xfrm>
+            <a:off x="6784848" y="3364992"/>
+            <a:ext cx="73152" cy="475488"/>
+          </a:xfrm>
+          <a:prstGeom prst="rect">
+            <a:avLst/>
+          </a:prstGeom>
+          <a:noFill/>
+          <a:ln/>
+        </p:spPr>
+        <p:txBody>
+          <a:bodyPr wrap="square" lIns="0" tIns="0" rIns="0" bIns="0" rtlCol="0" anchor="ctr"/>
+          <a:lstStyle/>
+          <a:p>
+            <a:pPr algn="ctr" indent="0" marL="0">
+              <a:buNone/>
+            </a:pPr>
+            <a:r>
+              <a:rPr lang="en-US" sz="1600" b="1" dirty="0">
+                <a:solidFill>
+                  <a:srgbClr val="0D9488"/>
+                </a:solidFill>
+                <a:latin typeface="Trebuchet MS" pitchFamily="34" charset="0"/>
+                <a:ea typeface="Trebuchet MS" pitchFamily="34" charset="-122"/>
+                <a:cs typeface="Trebuchet MS" pitchFamily="34" charset="-120"/>
+              </a:rPr>
+              <a:t>·</a:t>
+            </a:r>
+            <a:endParaRPr lang="en-US" sz="1600" dirty="0"/>
+          </a:p>
+        </p:txBody>
+      </p:sp>
+      <p:sp>
+        <p:nvSpPr>
+          <p:cNvPr id="37" name="Shape 35"/>
+          <p:cNvSpPr/>
+          <p:nvPr/>
+        </p:nvSpPr>
+        <p:spPr>
+          <a:xfrm>
+            <a:off x="6858000" y="3364992"/>
+            <a:ext cx="1554480" cy="475488"/>
+          </a:xfrm>
+          <a:prstGeom prst="rect">
+            <a:avLst>
+              <a:gd name="adj" fmla="val 9615"/>
+            </a:avLst>
+          </a:prstGeom>
+          <a:solidFill>
+            <a:srgbClr val="FFFFFF"/>
+          </a:solidFill>
+          <a:ln w="12700">
+            <a:solidFill>
+              <a:srgbClr val="0D9488"/>
+            </a:solidFill>
+            <a:prstDash val="solid"/>
+          </a:ln>
+        </p:spPr>
+      </p:sp>
+      <p:sp>
+        <p:nvSpPr>
+          <p:cNvPr id="38" name="Text 36"/>
+          <p:cNvSpPr/>
+          <p:nvPr/>
+        </p:nvSpPr>
+        <p:spPr>
+          <a:xfrm>
+            <a:off x="6858000" y="3364992"/>
+            <a:ext cx="1554480" cy="475488"/>
+          </a:xfrm>
+          <a:prstGeom prst="rect">
+            <a:avLst/>
+          </a:prstGeom>
+          <a:noFill/>
+          <a:ln/>
+        </p:spPr>
+        <p:txBody>
+          <a:bodyPr wrap="square" lIns="0" tIns="0" rIns="0" bIns="0" rtlCol="0" anchor="ctr"/>
+          <a:lstStyle/>
+          <a:p>
+            <a:pPr algn="ctr" indent="0" marL="0">
+              <a:buNone/>
+            </a:pPr>
+            <a:r>
+              <a:rPr lang="en-US" sz="1400" b="1" dirty="0">
+                <a:solidFill>
+                  <a:srgbClr val="0D9488"/>
+                </a:solidFill>
+                <a:latin typeface="Trebuchet MS" pitchFamily="34" charset="0"/>
+                <a:ea typeface="Trebuchet MS" pitchFamily="34" charset="-122"/>
+                <a:cs typeface="Trebuchet MS" pitchFamily="34" charset="-120"/>
+              </a:rPr>
               <a:t>ing</a:t>
             </a:r>
             <a:endParaRPr lang="en-US" sz="1400" dirty="0"/>
@@ -20642,7 +20807,7 @@
       </p:sp>
       <p:sp>
         <p:nvSpPr>
-          <p:cNvPr id="36" name="Shape 34"/>
+          <p:cNvPr id="39" name="Shape 37"/>
           <p:cNvSpPr/>
           <p:nvPr/>
         </p:nvSpPr>
@@ -20669,7 +20834,7 @@
       </p:sp>
       <p:sp>
         <p:nvSpPr>
-          <p:cNvPr id="37" name="Text 35"/>
+          <p:cNvPr id="40" name="Text 38"/>
           <p:cNvSpPr/>
           <p:nvPr/>
         </p:nvSpPr>
@@ -20708,7 +20873,7 @@
       </p:sp>
       <p:sp>
         <p:nvSpPr>
-          <p:cNvPr id="38" name="Shape 36"/>
+          <p:cNvPr id="41" name="Shape 39"/>
           <p:cNvSpPr/>
           <p:nvPr/>
         </p:nvSpPr>
@@ -20735,7 +20900,7 @@
       </p:sp>
       <p:sp>
         <p:nvSpPr>
-          <p:cNvPr id="39" name="Text 37"/>
+          <p:cNvPr id="42" name="Text 40"/>
           <p:cNvSpPr/>
           <p:nvPr/>
         </p:nvSpPr>
@@ -21058,7 +21223,7 @@
                 <a:ea typeface="Calibri" pitchFamily="34" charset="-122"/>
                 <a:cs typeface="Calibri" pitchFamily="34" charset="-120"/>
               </a:rPr>
-              <a:t>Word Labs  •  wordlabs.app  •  Root: 'go' = to move or travel</a:t>
+              <a:t>Word Labs  •  wordlabs.app  •  Root: 'go' = to move from one place to another</a:t>
             </a:r>
             <a:endParaRPr lang="en-US" sz="800" dirty="0"/>
           </a:p>
@@ -21197,7 +21362,7 @@
                 <a:ea typeface="Trebuchet MS" pitchFamily="34" charset="-122"/>
                 <a:cs typeface="Trebuchet MS" pitchFamily="34" charset="-120"/>
               </a:rPr>
-              <a:t>outgoing</a:t>
+              <a:t>undergoing</a:t>
             </a:r>
             <a:endParaRPr lang="en-US" sz="2800" dirty="0"/>
           </a:p>
@@ -21336,7 +21501,7 @@
                 <a:ea typeface="Trebuchet MS" pitchFamily="34" charset="-122"/>
                 <a:cs typeface="Trebuchet MS" pitchFamily="34" charset="-120"/>
               </a:rPr>
-              <a:t>out</a:t>
+              <a:t>under</a:t>
             </a:r>
             <a:endParaRPr lang="en-US" sz="1300" dirty="0"/>
           </a:p>
@@ -21375,7 +21540,7 @@
                 <a:ea typeface="Calibri" pitchFamily="34" charset="-122"/>
                 <a:cs typeface="Calibri" pitchFamily="34" charset="-120"/>
               </a:rPr>
-              <a:t>beyond, outside</a:t>
+              <a:t>below</a:t>
             </a:r>
             <a:endParaRPr lang="en-US" sz="850" dirty="0"/>
           </a:p>
@@ -21487,7 +21652,7 @@
                 <a:ea typeface="Calibri" pitchFamily="34" charset="-122"/>
                 <a:cs typeface="Calibri" pitchFamily="34" charset="-120"/>
               </a:rPr>
-              <a:t>to move or travel</a:t>
+              <a:t>to move from one place to another</a:t>
             </a:r>
             <a:endParaRPr lang="en-US" sz="850" dirty="0"/>
           </a:p>
@@ -21599,7 +21764,7 @@
                 <a:ea typeface="Calibri" pitchFamily="34" charset="-122"/>
                 <a:cs typeface="Calibri" pitchFamily="34" charset="-120"/>
               </a:rPr>
-              <a:t>in the process of</a:t>
+              <a:t>happening now</a:t>
             </a:r>
             <a:endParaRPr lang="en-US" sz="850" dirty="0"/>
           </a:p>
@@ -21706,8 +21871,8 @@
         </p:nvSpPr>
         <p:spPr>
           <a:xfrm>
-            <a:off x="2313432" y="3364992"/>
-            <a:ext cx="1645920" cy="475488"/>
+            <a:off x="1975104" y="3364992"/>
+            <a:ext cx="1554480" cy="475488"/>
           </a:xfrm>
           <a:prstGeom prst="rect">
             <a:avLst>
@@ -21733,8 +21898,8 @@
         </p:nvSpPr>
         <p:spPr>
           <a:xfrm>
-            <a:off x="2313432" y="3364992"/>
-            <a:ext cx="1645920" cy="475488"/>
+            <a:off x="1975104" y="3364992"/>
+            <a:ext cx="1554480" cy="475488"/>
           </a:xfrm>
           <a:prstGeom prst="rect">
             <a:avLst/>
@@ -21758,7 +21923,7 @@
                 <a:ea typeface="Trebuchet MS" pitchFamily="34" charset="-122"/>
                 <a:cs typeface="Trebuchet MS" pitchFamily="34" charset="-120"/>
               </a:rPr>
-              <a:t>out</a:t>
+              <a:t>un</a:t>
             </a:r>
             <a:endParaRPr lang="en-US" sz="1400" dirty="0"/>
           </a:p>
@@ -21772,8 +21937,8 @@
         </p:nvSpPr>
         <p:spPr>
           <a:xfrm>
-            <a:off x="3959352" y="3364992"/>
-            <a:ext cx="411480" cy="475488"/>
+            <a:off x="3529584" y="3364992"/>
+            <a:ext cx="73152" cy="475488"/>
           </a:xfrm>
           <a:prstGeom prst="rect">
             <a:avLst/>
@@ -21811,8 +21976,8 @@
         </p:nvSpPr>
         <p:spPr>
           <a:xfrm>
-            <a:off x="4370832" y="3364992"/>
-            <a:ext cx="1645920" cy="475488"/>
+            <a:off x="3602736" y="3364992"/>
+            <a:ext cx="1554480" cy="475488"/>
           </a:xfrm>
           <a:prstGeom prst="rect">
             <a:avLst>
@@ -21838,8 +22003,8 @@
         </p:nvSpPr>
         <p:spPr>
           <a:xfrm>
-            <a:off x="4370832" y="3364992"/>
-            <a:ext cx="1645920" cy="475488"/>
+            <a:off x="3602736" y="3364992"/>
+            <a:ext cx="1554480" cy="475488"/>
           </a:xfrm>
           <a:prstGeom prst="rect">
             <a:avLst/>
@@ -21863,7 +22028,7 @@
                 <a:ea typeface="Trebuchet MS" pitchFamily="34" charset="-122"/>
                 <a:cs typeface="Trebuchet MS" pitchFamily="34" charset="-120"/>
               </a:rPr>
-              <a:t>go</a:t>
+              <a:t>der</a:t>
             </a:r>
             <a:endParaRPr lang="en-US" sz="1400" dirty="0"/>
           </a:p>
@@ -21877,8 +22042,8 @@
         </p:nvSpPr>
         <p:spPr>
           <a:xfrm>
-            <a:off x="6016752" y="3364992"/>
-            <a:ext cx="411480" cy="475488"/>
+            <a:off x="5157216" y="3364992"/>
+            <a:ext cx="73152" cy="475488"/>
           </a:xfrm>
           <a:prstGeom prst="rect">
             <a:avLst/>
@@ -21916,8 +22081,8 @@
         </p:nvSpPr>
         <p:spPr>
           <a:xfrm>
-            <a:off x="6428232" y="3364992"/>
-            <a:ext cx="1645920" cy="475488"/>
+            <a:off x="5230368" y="3364992"/>
+            <a:ext cx="1554480" cy="475488"/>
           </a:xfrm>
           <a:prstGeom prst="rect">
             <a:avLst>
@@ -21943,8 +22108,8 @@
         </p:nvSpPr>
         <p:spPr>
           <a:xfrm>
-            <a:off x="6428232" y="3364992"/>
-            <a:ext cx="1645920" cy="475488"/>
+            <a:off x="5230368" y="3364992"/>
+            <a:ext cx="1554480" cy="475488"/>
           </a:xfrm>
           <a:prstGeom prst="rect">
             <a:avLst/>
@@ -21968,6 +22133,111 @@
                 <a:ea typeface="Trebuchet MS" pitchFamily="34" charset="-122"/>
                 <a:cs typeface="Trebuchet MS" pitchFamily="34" charset="-120"/>
               </a:rPr>
+              <a:t>go</a:t>
+            </a:r>
+            <a:endParaRPr lang="en-US" sz="1400" dirty="0"/>
+          </a:p>
+        </p:txBody>
+      </p:sp>
+      <p:sp>
+        <p:nvSpPr>
+          <p:cNvPr id="36" name="Text 34"/>
+          <p:cNvSpPr/>
+          <p:nvPr/>
+        </p:nvSpPr>
+        <p:spPr>
+          <a:xfrm>
+            <a:off x="6784848" y="3364992"/>
+            <a:ext cx="73152" cy="475488"/>
+          </a:xfrm>
+          <a:prstGeom prst="rect">
+            <a:avLst/>
+          </a:prstGeom>
+          <a:noFill/>
+          <a:ln/>
+        </p:spPr>
+        <p:txBody>
+          <a:bodyPr wrap="square" lIns="0" tIns="0" rIns="0" bIns="0" rtlCol="0" anchor="ctr"/>
+          <a:lstStyle/>
+          <a:p>
+            <a:pPr algn="ctr" indent="0" marL="0">
+              <a:buNone/>
+            </a:pPr>
+            <a:r>
+              <a:rPr lang="en-US" sz="1600" b="1" dirty="0">
+                <a:solidFill>
+                  <a:srgbClr val="0D9488"/>
+                </a:solidFill>
+                <a:latin typeface="Trebuchet MS" pitchFamily="34" charset="0"/>
+                <a:ea typeface="Trebuchet MS" pitchFamily="34" charset="-122"/>
+                <a:cs typeface="Trebuchet MS" pitchFamily="34" charset="-120"/>
+              </a:rPr>
+              <a:t>·</a:t>
+            </a:r>
+            <a:endParaRPr lang="en-US" sz="1600" dirty="0"/>
+          </a:p>
+        </p:txBody>
+      </p:sp>
+      <p:sp>
+        <p:nvSpPr>
+          <p:cNvPr id="37" name="Shape 35"/>
+          <p:cNvSpPr/>
+          <p:nvPr/>
+        </p:nvSpPr>
+        <p:spPr>
+          <a:xfrm>
+            <a:off x="6858000" y="3364992"/>
+            <a:ext cx="1554480" cy="475488"/>
+          </a:xfrm>
+          <a:prstGeom prst="rect">
+            <a:avLst>
+              <a:gd name="adj" fmla="val 9615"/>
+            </a:avLst>
+          </a:prstGeom>
+          <a:solidFill>
+            <a:srgbClr val="FFFFFF"/>
+          </a:solidFill>
+          <a:ln w="12700">
+            <a:solidFill>
+              <a:srgbClr val="0D9488"/>
+            </a:solidFill>
+            <a:prstDash val="solid"/>
+          </a:ln>
+        </p:spPr>
+      </p:sp>
+      <p:sp>
+        <p:nvSpPr>
+          <p:cNvPr id="38" name="Text 36"/>
+          <p:cNvSpPr/>
+          <p:nvPr/>
+        </p:nvSpPr>
+        <p:spPr>
+          <a:xfrm>
+            <a:off x="6858000" y="3364992"/>
+            <a:ext cx="1554480" cy="475488"/>
+          </a:xfrm>
+          <a:prstGeom prst="rect">
+            <a:avLst/>
+          </a:prstGeom>
+          <a:noFill/>
+          <a:ln/>
+        </p:spPr>
+        <p:txBody>
+          <a:bodyPr wrap="square" lIns="0" tIns="0" rIns="0" bIns="0" rtlCol="0" anchor="ctr"/>
+          <a:lstStyle/>
+          <a:p>
+            <a:pPr algn="ctr" indent="0" marL="0">
+              <a:buNone/>
+            </a:pPr>
+            <a:r>
+              <a:rPr lang="en-US" sz="1400" b="1" dirty="0">
+                <a:solidFill>
+                  <a:srgbClr val="0D9488"/>
+                </a:solidFill>
+                <a:latin typeface="Trebuchet MS" pitchFamily="34" charset="0"/>
+                <a:ea typeface="Trebuchet MS" pitchFamily="34" charset="-122"/>
+                <a:cs typeface="Trebuchet MS" pitchFamily="34" charset="-120"/>
+              </a:rPr>
               <a:t>ing</a:t>
             </a:r>
             <a:endParaRPr lang="en-US" sz="1400" dirty="0"/>
@@ -21976,7 +22246,7 @@
       </p:sp>
       <p:sp>
         <p:nvSpPr>
-          <p:cNvPr id="36" name="Shape 34"/>
+          <p:cNvPr id="39" name="Shape 37"/>
           <p:cNvSpPr/>
           <p:nvPr/>
         </p:nvSpPr>
@@ -22003,7 +22273,7 @@
       </p:sp>
       <p:sp>
         <p:nvSpPr>
-          <p:cNvPr id="37" name="Text 35"/>
+          <p:cNvPr id="40" name="Text 38"/>
           <p:cNvSpPr/>
           <p:nvPr/>
         </p:nvSpPr>
@@ -22042,7 +22312,7 @@
       </p:sp>
       <p:sp>
         <p:nvSpPr>
-          <p:cNvPr id="38" name="Shape 36"/>
+          <p:cNvPr id="41" name="Shape 39"/>
           <p:cNvSpPr/>
           <p:nvPr/>
         </p:nvSpPr>
@@ -22069,13 +22339,13 @@
       </p:sp>
       <p:sp>
         <p:nvSpPr>
-          <p:cNvPr id="39" name="Shape 37"/>
-          <p:cNvSpPr/>
-          <p:nvPr/>
-        </p:nvSpPr>
-        <p:spPr>
-          <a:xfrm>
-            <a:off x="2254649" y="4169664"/>
+          <p:cNvPr id="42" name="Shape 40"/>
+          <p:cNvSpPr/>
+          <p:nvPr/>
+        </p:nvSpPr>
+        <p:spPr>
+          <a:xfrm>
+            <a:off x="2023872" y="4169664"/>
             <a:ext cx="685800" cy="475488"/>
           </a:xfrm>
           <a:prstGeom prst="rect">
@@ -22096,13 +22366,13 @@
       </p:sp>
       <p:sp>
         <p:nvSpPr>
-          <p:cNvPr id="40" name="Text 38"/>
-          <p:cNvSpPr/>
-          <p:nvPr/>
-        </p:nvSpPr>
-        <p:spPr>
-          <a:xfrm>
-            <a:off x="2254649" y="4169664"/>
+          <p:cNvPr id="43" name="Text 41"/>
+          <p:cNvSpPr/>
+          <p:nvPr/>
+        </p:nvSpPr>
+        <p:spPr>
+          <a:xfrm>
+            <a:off x="2023872" y="4169664"/>
             <a:ext cx="685800" cy="475488"/>
           </a:xfrm>
           <a:prstGeom prst="rect">
@@ -22127,7 +22397,7 @@
                 <a:ea typeface="Trebuchet MS" pitchFamily="34" charset="-122"/>
                 <a:cs typeface="Trebuchet MS" pitchFamily="34" charset="-120"/>
               </a:rPr>
-              <a:t>ou</a:t>
+              <a:t>u</a:t>
             </a:r>
             <a:endParaRPr lang="en-US" sz="900" dirty="0"/>
           </a:p>
@@ -22135,13 +22405,13 @@
       </p:sp>
       <p:sp>
         <p:nvSpPr>
-          <p:cNvPr id="41" name="Shape 39"/>
-          <p:cNvSpPr/>
-          <p:nvPr/>
-        </p:nvSpPr>
-        <p:spPr>
-          <a:xfrm>
-            <a:off x="3293146" y="4169664"/>
+          <p:cNvPr id="44" name="Shape 42"/>
+          <p:cNvSpPr/>
+          <p:nvPr/>
+        </p:nvSpPr>
+        <p:spPr>
+          <a:xfrm>
+            <a:off x="2831592" y="4169664"/>
             <a:ext cx="685800" cy="475488"/>
           </a:xfrm>
           <a:prstGeom prst="rect">
@@ -22162,13 +22432,13 @@
       </p:sp>
       <p:sp>
         <p:nvSpPr>
-          <p:cNvPr id="42" name="Text 40"/>
-          <p:cNvSpPr/>
-          <p:nvPr/>
-        </p:nvSpPr>
-        <p:spPr>
-          <a:xfrm>
-            <a:off x="3293146" y="4169664"/>
+          <p:cNvPr id="45" name="Text 43"/>
+          <p:cNvSpPr/>
+          <p:nvPr/>
+        </p:nvSpPr>
+        <p:spPr>
+          <a:xfrm>
+            <a:off x="2831592" y="4169664"/>
             <a:ext cx="685800" cy="475488"/>
           </a:xfrm>
           <a:prstGeom prst="rect">
@@ -22193,7 +22463,7 @@
                 <a:ea typeface="Trebuchet MS" pitchFamily="34" charset="-122"/>
                 <a:cs typeface="Trebuchet MS" pitchFamily="34" charset="-120"/>
               </a:rPr>
-              <a:t>t</a:t>
+              <a:t>n</a:t>
             </a:r>
             <a:endParaRPr lang="en-US" sz="900" dirty="0"/>
           </a:p>
@@ -22201,13 +22471,13 @@
       </p:sp>
       <p:sp>
         <p:nvSpPr>
-          <p:cNvPr id="43" name="Shape 41"/>
-          <p:cNvSpPr/>
-          <p:nvPr/>
-        </p:nvSpPr>
-        <p:spPr>
-          <a:xfrm>
-            <a:off x="4331643" y="4169664"/>
+          <p:cNvPr id="46" name="Shape 44"/>
+          <p:cNvSpPr/>
+          <p:nvPr/>
+        </p:nvSpPr>
+        <p:spPr>
+          <a:xfrm>
+            <a:off x="3639312" y="4169664"/>
             <a:ext cx="685800" cy="475488"/>
           </a:xfrm>
           <a:prstGeom prst="rect">
@@ -22228,13 +22498,13 @@
       </p:sp>
       <p:sp>
         <p:nvSpPr>
-          <p:cNvPr id="44" name="Text 42"/>
-          <p:cNvSpPr/>
-          <p:nvPr/>
-        </p:nvSpPr>
-        <p:spPr>
-          <a:xfrm>
-            <a:off x="4331643" y="4169664"/>
+          <p:cNvPr id="47" name="Text 45"/>
+          <p:cNvSpPr/>
+          <p:nvPr/>
+        </p:nvSpPr>
+        <p:spPr>
+          <a:xfrm>
+            <a:off x="3639312" y="4169664"/>
             <a:ext cx="685800" cy="475488"/>
           </a:xfrm>
           <a:prstGeom prst="rect">
@@ -22259,7 +22529,7 @@
                 <a:ea typeface="Trebuchet MS" pitchFamily="34" charset="-122"/>
                 <a:cs typeface="Trebuchet MS" pitchFamily="34" charset="-120"/>
               </a:rPr>
-              <a:t>g</a:t>
+              <a:t>d</a:t>
             </a:r>
             <a:endParaRPr lang="en-US" sz="900" dirty="0"/>
           </a:p>
@@ -22267,13 +22537,13 @@
       </p:sp>
       <p:sp>
         <p:nvSpPr>
-          <p:cNvPr id="45" name="Shape 43"/>
-          <p:cNvSpPr/>
-          <p:nvPr/>
-        </p:nvSpPr>
-        <p:spPr>
-          <a:xfrm>
-            <a:off x="5370141" y="4169664"/>
+          <p:cNvPr id="48" name="Shape 46"/>
+          <p:cNvSpPr/>
+          <p:nvPr/>
+        </p:nvSpPr>
+        <p:spPr>
+          <a:xfrm>
+            <a:off x="4447032" y="4169664"/>
             <a:ext cx="685800" cy="475488"/>
           </a:xfrm>
           <a:prstGeom prst="rect">
@@ -22294,13 +22564,13 @@
       </p:sp>
       <p:sp>
         <p:nvSpPr>
-          <p:cNvPr id="46" name="Text 44"/>
-          <p:cNvSpPr/>
-          <p:nvPr/>
-        </p:nvSpPr>
-        <p:spPr>
-          <a:xfrm>
-            <a:off x="5370141" y="4169664"/>
+          <p:cNvPr id="49" name="Text 47"/>
+          <p:cNvSpPr/>
+          <p:nvPr/>
+        </p:nvSpPr>
+        <p:spPr>
+          <a:xfrm>
+            <a:off x="4447032" y="4169664"/>
             <a:ext cx="685800" cy="475488"/>
           </a:xfrm>
           <a:prstGeom prst="rect">
@@ -22325,7 +22595,7 @@
                 <a:ea typeface="Trebuchet MS" pitchFamily="34" charset="-122"/>
                 <a:cs typeface="Trebuchet MS" pitchFamily="34" charset="-120"/>
               </a:rPr>
-              <a:t>o</a:t>
+              <a:t>er</a:t>
             </a:r>
             <a:endParaRPr lang="en-US" sz="900" dirty="0"/>
           </a:p>
@@ -22333,13 +22603,13 @@
       </p:sp>
       <p:sp>
         <p:nvSpPr>
-          <p:cNvPr id="47" name="Shape 45"/>
-          <p:cNvSpPr/>
-          <p:nvPr/>
-        </p:nvSpPr>
-        <p:spPr>
-          <a:xfrm>
-            <a:off x="6408638" y="4169664"/>
+          <p:cNvPr id="50" name="Shape 48"/>
+          <p:cNvSpPr/>
+          <p:nvPr/>
+        </p:nvSpPr>
+        <p:spPr>
+          <a:xfrm>
+            <a:off x="5254752" y="4169664"/>
             <a:ext cx="685800" cy="475488"/>
           </a:xfrm>
           <a:prstGeom prst="rect">
@@ -22360,13 +22630,13 @@
       </p:sp>
       <p:sp>
         <p:nvSpPr>
-          <p:cNvPr id="48" name="Text 46"/>
-          <p:cNvSpPr/>
-          <p:nvPr/>
-        </p:nvSpPr>
-        <p:spPr>
-          <a:xfrm>
-            <a:off x="6408638" y="4169664"/>
+          <p:cNvPr id="51" name="Text 49"/>
+          <p:cNvSpPr/>
+          <p:nvPr/>
+        </p:nvSpPr>
+        <p:spPr>
+          <a:xfrm>
+            <a:off x="5254752" y="4169664"/>
             <a:ext cx="685800" cy="475488"/>
           </a:xfrm>
           <a:prstGeom prst="rect">
@@ -22391,7 +22661,7 @@
                 <a:ea typeface="Trebuchet MS" pitchFamily="34" charset="-122"/>
                 <a:cs typeface="Trebuchet MS" pitchFamily="34" charset="-120"/>
               </a:rPr>
-              <a:t>i</a:t>
+              <a:t>g</a:t>
             </a:r>
             <a:endParaRPr lang="en-US" sz="900" dirty="0"/>
           </a:p>
@@ -22399,13 +22669,13 @@
       </p:sp>
       <p:sp>
         <p:nvSpPr>
-          <p:cNvPr id="49" name="Shape 47"/>
-          <p:cNvSpPr/>
-          <p:nvPr/>
-        </p:nvSpPr>
-        <p:spPr>
-          <a:xfrm>
-            <a:off x="7447135" y="4169664"/>
+          <p:cNvPr id="52" name="Shape 50"/>
+          <p:cNvSpPr/>
+          <p:nvPr/>
+        </p:nvSpPr>
+        <p:spPr>
+          <a:xfrm>
+            <a:off x="6062472" y="4169664"/>
             <a:ext cx="685800" cy="475488"/>
           </a:xfrm>
           <a:prstGeom prst="rect">
@@ -22426,13 +22696,145 @@
       </p:sp>
       <p:sp>
         <p:nvSpPr>
-          <p:cNvPr id="50" name="Text 48"/>
-          <p:cNvSpPr/>
-          <p:nvPr/>
-        </p:nvSpPr>
-        <p:spPr>
-          <a:xfrm>
-            <a:off x="7447135" y="4169664"/>
+          <p:cNvPr id="53" name="Text 51"/>
+          <p:cNvSpPr/>
+          <p:nvPr/>
+        </p:nvSpPr>
+        <p:spPr>
+          <a:xfrm>
+            <a:off x="6062472" y="4169664"/>
+            <a:ext cx="685800" cy="475488"/>
+          </a:xfrm>
+          <a:prstGeom prst="rect">
+            <a:avLst/>
+          </a:prstGeom>
+          <a:noFill/>
+          <a:ln/>
+        </p:spPr>
+        <p:txBody>
+          <a:bodyPr wrap="square" lIns="0" tIns="0" rIns="0" bIns="0" rtlCol="0" anchor="ctr"/>
+          <a:lstStyle/>
+          <a:p>
+            <a:pPr algn="ctr" indent="0" marL="0">
+              <a:buNone/>
+            </a:pPr>
+            <a:r>
+              <a:rPr lang="en-US" sz="900" b="1" dirty="0">
+                <a:solidFill>
+                  <a:srgbClr val="9D174D"/>
+                </a:solidFill>
+                <a:latin typeface="Trebuchet MS" pitchFamily="34" charset="0"/>
+                <a:ea typeface="Trebuchet MS" pitchFamily="34" charset="-122"/>
+                <a:cs typeface="Trebuchet MS" pitchFamily="34" charset="-120"/>
+              </a:rPr>
+              <a:t>o</a:t>
+            </a:r>
+            <a:endParaRPr lang="en-US" sz="900" dirty="0"/>
+          </a:p>
+        </p:txBody>
+      </p:sp>
+      <p:sp>
+        <p:nvSpPr>
+          <p:cNvPr id="54" name="Shape 52"/>
+          <p:cNvSpPr/>
+          <p:nvPr/>
+        </p:nvSpPr>
+        <p:spPr>
+          <a:xfrm>
+            <a:off x="6870192" y="4169664"/>
+            <a:ext cx="685800" cy="475488"/>
+          </a:xfrm>
+          <a:prstGeom prst="rect">
+            <a:avLst>
+              <a:gd name="adj" fmla="val 7692"/>
+            </a:avLst>
+          </a:prstGeom>
+          <a:solidFill>
+            <a:srgbClr val="FFFFFF"/>
+          </a:solidFill>
+          <a:ln w="12700">
+            <a:solidFill>
+              <a:srgbClr val="DB2777"/>
+            </a:solidFill>
+            <a:prstDash val="solid"/>
+          </a:ln>
+        </p:spPr>
+      </p:sp>
+      <p:sp>
+        <p:nvSpPr>
+          <p:cNvPr id="55" name="Text 53"/>
+          <p:cNvSpPr/>
+          <p:nvPr/>
+        </p:nvSpPr>
+        <p:spPr>
+          <a:xfrm>
+            <a:off x="6870192" y="4169664"/>
+            <a:ext cx="685800" cy="475488"/>
+          </a:xfrm>
+          <a:prstGeom prst="rect">
+            <a:avLst/>
+          </a:prstGeom>
+          <a:noFill/>
+          <a:ln/>
+        </p:spPr>
+        <p:txBody>
+          <a:bodyPr wrap="square" lIns="0" tIns="0" rIns="0" bIns="0" rtlCol="0" anchor="ctr"/>
+          <a:lstStyle/>
+          <a:p>
+            <a:pPr algn="ctr" indent="0" marL="0">
+              <a:buNone/>
+            </a:pPr>
+            <a:r>
+              <a:rPr lang="en-US" sz="900" b="1" dirty="0">
+                <a:solidFill>
+                  <a:srgbClr val="9D174D"/>
+                </a:solidFill>
+                <a:latin typeface="Trebuchet MS" pitchFamily="34" charset="0"/>
+                <a:ea typeface="Trebuchet MS" pitchFamily="34" charset="-122"/>
+                <a:cs typeface="Trebuchet MS" pitchFamily="34" charset="-120"/>
+              </a:rPr>
+              <a:t>i</a:t>
+            </a:r>
+            <a:endParaRPr lang="en-US" sz="900" dirty="0"/>
+          </a:p>
+        </p:txBody>
+      </p:sp>
+      <p:sp>
+        <p:nvSpPr>
+          <p:cNvPr id="56" name="Shape 54"/>
+          <p:cNvSpPr/>
+          <p:nvPr/>
+        </p:nvSpPr>
+        <p:spPr>
+          <a:xfrm>
+            <a:off x="7677912" y="4169664"/>
+            <a:ext cx="685800" cy="475488"/>
+          </a:xfrm>
+          <a:prstGeom prst="rect">
+            <a:avLst>
+              <a:gd name="adj" fmla="val 7692"/>
+            </a:avLst>
+          </a:prstGeom>
+          <a:solidFill>
+            <a:srgbClr val="FFFFFF"/>
+          </a:solidFill>
+          <a:ln w="12700">
+            <a:solidFill>
+              <a:srgbClr val="DB2777"/>
+            </a:solidFill>
+            <a:prstDash val="solid"/>
+          </a:ln>
+        </p:spPr>
+      </p:sp>
+      <p:sp>
+        <p:nvSpPr>
+          <p:cNvPr id="57" name="Text 55"/>
+          <p:cNvSpPr/>
+          <p:nvPr/>
+        </p:nvSpPr>
+        <p:spPr>
+          <a:xfrm>
+            <a:off x="7677912" y="4169664"/>
             <a:ext cx="685800" cy="475488"/>
           </a:xfrm>
           <a:prstGeom prst="rect">
@@ -22749,7 +23151,7 @@
                 <a:ea typeface="Calibri" pitchFamily="34" charset="-122"/>
                 <a:cs typeface="Calibri" pitchFamily="34" charset="-120"/>
               </a:rPr>
-              <a:t>Word Labs  •  wordlabs.app  •  Root: 'go' = to move or travel</a:t>
+              <a:t>Word Labs  •  wordlabs.app  •  Root: 'go' = to move from one place to another</a:t>
             </a:r>
             <a:endParaRPr lang="en-US" sz="800" dirty="0"/>
           </a:p>
@@ -22888,7 +23290,7 @@
                 <a:ea typeface="Trebuchet MS" pitchFamily="34" charset="-122"/>
                 <a:cs typeface="Trebuchet MS" pitchFamily="34" charset="-120"/>
               </a:rPr>
-              <a:t>forego</a:t>
+              <a:t>congo</a:t>
             </a:r>
             <a:endParaRPr lang="en-US" sz="2800" dirty="0"/>
           </a:p>
@@ -23576,7 +23978,7 @@
                 <a:ea typeface="Calibri" pitchFamily="34" charset="-122"/>
                 <a:cs typeface="Calibri" pitchFamily="34" charset="-120"/>
               </a:rPr>
-              <a:t>Word Labs  •  wordlabs.app  •  Root: 'go' = to move or travel</a:t>
+              <a:t>Word Labs  •  wordlabs.app  •  Root: 'go' = to move from one place to another</a:t>
             </a:r>
             <a:endParaRPr lang="en-US" sz="800" dirty="0"/>
           </a:p>
@@ -23715,7 +24117,7 @@
                 <a:ea typeface="Trebuchet MS" pitchFamily="34" charset="-122"/>
                 <a:cs typeface="Trebuchet MS" pitchFamily="34" charset="-120"/>
               </a:rPr>
-              <a:t>forego</a:t>
+              <a:t>congo</a:t>
             </a:r>
             <a:endParaRPr lang="en-US" sz="2800" dirty="0"/>
           </a:p>
@@ -23854,7 +24256,7 @@
                 <a:ea typeface="Trebuchet MS" pitchFamily="34" charset="-122"/>
                 <a:cs typeface="Trebuchet MS" pitchFamily="34" charset="-120"/>
               </a:rPr>
-              <a:t>fore</a:t>
+              <a:t>con</a:t>
             </a:r>
             <a:endParaRPr lang="en-US" sz="1300" dirty="0"/>
           </a:p>
@@ -23893,7 +24295,7 @@
                 <a:ea typeface="Calibri" pitchFamily="34" charset="-122"/>
                 <a:cs typeface="Calibri" pitchFamily="34" charset="-120"/>
               </a:rPr>
-              <a:t>before, in front</a:t>
+              <a:t>with or together</a:t>
             </a:r>
             <a:endParaRPr lang="en-US" sz="850" dirty="0"/>
           </a:p>
@@ -24005,7 +24407,7 @@
                 <a:ea typeface="Calibri" pitchFamily="34" charset="-122"/>
                 <a:cs typeface="Calibri" pitchFamily="34" charset="-120"/>
               </a:rPr>
-              <a:t>to move or travel</a:t>
+              <a:t>to move from one place to another</a:t>
             </a:r>
             <a:endParaRPr lang="en-US" sz="850" dirty="0"/>
           </a:p>
@@ -24561,7 +24963,7 @@
                 <a:ea typeface="Calibri" pitchFamily="34" charset="-122"/>
                 <a:cs typeface="Calibri" pitchFamily="34" charset="-120"/>
               </a:rPr>
-              <a:t>Word Labs  •  wordlabs.app  •  Root: 'go' = to move or travel</a:t>
+              <a:t>Word Labs  •  wordlabs.app  •  Root: 'go' = to move from one place to another</a:t>
             </a:r>
             <a:endParaRPr lang="en-US" sz="800" dirty="0"/>
           </a:p>
@@ -24634,7 +25036,7 @@
                 <a:ea typeface="Trebuchet MS" pitchFamily="34" charset="-122"/>
                 <a:cs typeface="Trebuchet MS" pitchFamily="34" charset="-120"/>
               </a:rPr>
-              <a:t>We are learning that the root 'go' means 'to move or travel'.</a:t>
+              <a:t>We are learning that the root 'go' means 'to move from one place to another'.</a:t>
             </a:r>
             <a:endParaRPr lang="en-US" sz="2000" dirty="0"/>
           </a:p>
@@ -25280,7 +25682,7 @@
                 <a:ea typeface="Calibri" pitchFamily="34" charset="-122"/>
                 <a:cs typeface="Calibri" pitchFamily="34" charset="-120"/>
               </a:rPr>
-              <a:t>Word Labs  •  wordlabs.app  •  Root: 'go' = to move or travel</a:t>
+              <a:t>Word Labs  •  wordlabs.app  •  Root: 'go' = to move from one place to another</a:t>
             </a:r>
             <a:endParaRPr lang="en-US" sz="800" dirty="0"/>
           </a:p>
@@ -25419,7 +25821,7 @@
                 <a:ea typeface="Trebuchet MS" pitchFamily="34" charset="-122"/>
                 <a:cs typeface="Trebuchet MS" pitchFamily="34" charset="-120"/>
               </a:rPr>
-              <a:t>forego</a:t>
+              <a:t>congo</a:t>
             </a:r>
             <a:endParaRPr lang="en-US" sz="2800" dirty="0"/>
           </a:p>
@@ -25558,7 +25960,7 @@
                 <a:ea typeface="Trebuchet MS" pitchFamily="34" charset="-122"/>
                 <a:cs typeface="Trebuchet MS" pitchFamily="34" charset="-120"/>
               </a:rPr>
-              <a:t>fore</a:t>
+              <a:t>con</a:t>
             </a:r>
             <a:endParaRPr lang="en-US" sz="1300" dirty="0"/>
           </a:p>
@@ -25597,7 +25999,7 @@
                 <a:ea typeface="Calibri" pitchFamily="34" charset="-122"/>
                 <a:cs typeface="Calibri" pitchFamily="34" charset="-120"/>
               </a:rPr>
-              <a:t>before, in front</a:t>
+              <a:t>with or together</a:t>
             </a:r>
             <a:endParaRPr lang="en-US" sz="850" dirty="0"/>
           </a:p>
@@ -25709,7 +26111,7 @@
                 <a:ea typeface="Calibri" pitchFamily="34" charset="-122"/>
                 <a:cs typeface="Calibri" pitchFamily="34" charset="-120"/>
               </a:rPr>
-              <a:t>to move or travel</a:t>
+              <a:t>to move from one place to another</a:t>
             </a:r>
             <a:endParaRPr lang="en-US" sz="850" dirty="0"/>
           </a:p>
@@ -25868,7 +26270,7 @@
                 <a:ea typeface="Trebuchet MS" pitchFamily="34" charset="-122"/>
                 <a:cs typeface="Trebuchet MS" pitchFamily="34" charset="-120"/>
               </a:rPr>
-              <a:t>fore</a:t>
+              <a:t>con</a:t>
             </a:r>
             <a:endParaRPr lang="en-US" sz="1400" dirty="0"/>
           </a:p>
@@ -26397,7 +26799,7 @@
                 <a:ea typeface="Calibri" pitchFamily="34" charset="-122"/>
                 <a:cs typeface="Calibri" pitchFamily="34" charset="-120"/>
               </a:rPr>
-              <a:t>Word Labs  •  wordlabs.app  •  Root: 'go' = to move or travel</a:t>
+              <a:t>Word Labs  •  wordlabs.app  •  Root: 'go' = to move from one place to another</a:t>
             </a:r>
             <a:endParaRPr lang="en-US" sz="800" dirty="0"/>
           </a:p>
@@ -26536,7 +26938,7 @@
                 <a:ea typeface="Trebuchet MS" pitchFamily="34" charset="-122"/>
                 <a:cs typeface="Trebuchet MS" pitchFamily="34" charset="-120"/>
               </a:rPr>
-              <a:t>forego</a:t>
+              <a:t>congo</a:t>
             </a:r>
             <a:endParaRPr lang="en-US" sz="2800" dirty="0"/>
           </a:p>
@@ -26675,7 +27077,7 @@
                 <a:ea typeface="Trebuchet MS" pitchFamily="34" charset="-122"/>
                 <a:cs typeface="Trebuchet MS" pitchFamily="34" charset="-120"/>
               </a:rPr>
-              <a:t>fore</a:t>
+              <a:t>con</a:t>
             </a:r>
             <a:endParaRPr lang="en-US" sz="1300" dirty="0"/>
           </a:p>
@@ -26714,7 +27116,7 @@
                 <a:ea typeface="Calibri" pitchFamily="34" charset="-122"/>
                 <a:cs typeface="Calibri" pitchFamily="34" charset="-120"/>
               </a:rPr>
-              <a:t>before, in front</a:t>
+              <a:t>with or together</a:t>
             </a:r>
             <a:endParaRPr lang="en-US" sz="850" dirty="0"/>
           </a:p>
@@ -26826,7 +27228,7 @@
                 <a:ea typeface="Calibri" pitchFamily="34" charset="-122"/>
                 <a:cs typeface="Calibri" pitchFamily="34" charset="-120"/>
               </a:rPr>
-              <a:t>to move or travel</a:t>
+              <a:t>to move from one place to another</a:t>
             </a:r>
             <a:endParaRPr lang="en-US" sz="850" dirty="0"/>
           </a:p>
@@ -26985,7 +27387,7 @@
                 <a:ea typeface="Trebuchet MS" pitchFamily="34" charset="-122"/>
                 <a:cs typeface="Trebuchet MS" pitchFamily="34" charset="-120"/>
               </a:rPr>
-              <a:t>fore</a:t>
+              <a:t>con</a:t>
             </a:r>
             <a:endParaRPr lang="en-US" sz="1400" dirty="0"/>
           </a:p>
@@ -27249,7 +27651,7 @@
                 <a:ea typeface="Trebuchet MS" pitchFamily="34" charset="-122"/>
                 <a:cs typeface="Trebuchet MS" pitchFamily="34" charset="-120"/>
               </a:rPr>
-              <a:t>f</a:t>
+              <a:t>c</a:t>
             </a:r>
             <a:endParaRPr lang="en-US" sz="900" dirty="0"/>
           </a:p>
@@ -27315,7 +27717,7 @@
                 <a:ea typeface="Trebuchet MS" pitchFamily="34" charset="-122"/>
                 <a:cs typeface="Trebuchet MS" pitchFamily="34" charset="-120"/>
               </a:rPr>
-              <a:t>or</a:t>
+              <a:t>o</a:t>
             </a:r>
             <a:endParaRPr lang="en-US" sz="900" dirty="0"/>
           </a:p>
@@ -27381,7 +27783,7 @@
                 <a:ea typeface="Trebuchet MS" pitchFamily="34" charset="-122"/>
                 <a:cs typeface="Trebuchet MS" pitchFamily="34" charset="-120"/>
               </a:rPr>
-              <a:t>e</a:t>
+              <a:t>n</a:t>
             </a:r>
             <a:endParaRPr lang="en-US" sz="900" dirty="0"/>
           </a:p>
@@ -27805,7 +28207,7 @@
                 <a:ea typeface="Calibri" pitchFamily="34" charset="-122"/>
                 <a:cs typeface="Calibri" pitchFamily="34" charset="-120"/>
               </a:rPr>
-              <a:t>Word Labs  •  wordlabs.app  •  Root: 'go' = to move or travel</a:t>
+              <a:t>Word Labs  •  wordlabs.app  •  Root: 'go' = to move from one place to another</a:t>
             </a:r>
             <a:endParaRPr lang="en-US" sz="800" dirty="0"/>
           </a:p>
@@ -27944,7 +28346,7 @@
                 <a:ea typeface="Trebuchet MS" pitchFamily="34" charset="-122"/>
                 <a:cs typeface="Trebuchet MS" pitchFamily="34" charset="-120"/>
               </a:rPr>
-              <a:t>undergo</a:t>
+              <a:t>foregoing</a:t>
             </a:r>
             <a:endParaRPr lang="en-US" sz="2800" dirty="0"/>
           </a:p>
@@ -28632,7 +29034,7 @@
                 <a:ea typeface="Calibri" pitchFamily="34" charset="-122"/>
                 <a:cs typeface="Calibri" pitchFamily="34" charset="-120"/>
               </a:rPr>
-              <a:t>Word Labs  •  wordlabs.app  •  Root: 'go' = to move or travel</a:t>
+              <a:t>Word Labs  •  wordlabs.app  •  Root: 'go' = to move from one place to another</a:t>
             </a:r>
             <a:endParaRPr lang="en-US" sz="800" dirty="0"/>
           </a:p>
@@ -28771,7 +29173,7 @@
                 <a:ea typeface="Trebuchet MS" pitchFamily="34" charset="-122"/>
                 <a:cs typeface="Trebuchet MS" pitchFamily="34" charset="-120"/>
               </a:rPr>
-              <a:t>undergo</a:t>
+              <a:t>foregoing</a:t>
             </a:r>
             <a:endParaRPr lang="en-US" sz="2800" dirty="0"/>
           </a:p>
@@ -28851,7 +29253,7 @@
         </p:nvSpPr>
         <p:spPr>
           <a:xfrm>
-            <a:off x="2938272" y="2258568"/>
+            <a:off x="2221992" y="2258568"/>
             <a:ext cx="1828800" cy="292608"/>
           </a:xfrm>
           <a:prstGeom prst="rect">
@@ -28885,7 +29287,7 @@
         </p:nvSpPr>
         <p:spPr>
           <a:xfrm>
-            <a:off x="2938272" y="2258568"/>
+            <a:off x="2221992" y="2258568"/>
             <a:ext cx="1828800" cy="292608"/>
           </a:xfrm>
           <a:prstGeom prst="rect">
@@ -28910,7 +29312,7 @@
                 <a:ea typeface="Trebuchet MS" pitchFamily="34" charset="-122"/>
                 <a:cs typeface="Trebuchet MS" pitchFamily="34" charset="-120"/>
               </a:rPr>
-              <a:t>under</a:t>
+              <a:t>fore</a:t>
             </a:r>
             <a:endParaRPr lang="en-US" sz="1300" dirty="0"/>
           </a:p>
@@ -28924,7 +29326,7 @@
         </p:nvSpPr>
         <p:spPr>
           <a:xfrm>
-            <a:off x="2938272" y="2569464"/>
+            <a:off x="2221992" y="2569464"/>
             <a:ext cx="1828800" cy="201168"/>
           </a:xfrm>
           <a:prstGeom prst="rect">
@@ -28949,7 +29351,7 @@
                 <a:ea typeface="Calibri" pitchFamily="34" charset="-122"/>
                 <a:cs typeface="Calibri" pitchFamily="34" charset="-120"/>
               </a:rPr>
-              <a:t>beneath, through</a:t>
+              <a:t>before</a:t>
             </a:r>
             <a:endParaRPr lang="en-US" sz="850" dirty="0"/>
           </a:p>
@@ -28963,7 +29365,7 @@
         </p:nvSpPr>
         <p:spPr>
           <a:xfrm>
-            <a:off x="5803392" y="2258568"/>
+            <a:off x="4370832" y="2258568"/>
             <a:ext cx="1828800" cy="292608"/>
           </a:xfrm>
           <a:prstGeom prst="rect">
@@ -28997,7 +29399,7 @@
         </p:nvSpPr>
         <p:spPr>
           <a:xfrm>
-            <a:off x="5803392" y="2258568"/>
+            <a:off x="4370832" y="2258568"/>
             <a:ext cx="1828800" cy="292608"/>
           </a:xfrm>
           <a:prstGeom prst="rect">
@@ -29036,7 +29438,7 @@
         </p:nvSpPr>
         <p:spPr>
           <a:xfrm>
-            <a:off x="5803392" y="2569464"/>
+            <a:off x="4370832" y="2569464"/>
             <a:ext cx="1828800" cy="201168"/>
           </a:xfrm>
           <a:prstGeom prst="rect">
@@ -29061,7 +29463,7 @@
                 <a:ea typeface="Calibri" pitchFamily="34" charset="-122"/>
                 <a:cs typeface="Calibri" pitchFamily="34" charset="-120"/>
               </a:rPr>
-              <a:t>to move or travel</a:t>
+              <a:t>to move from one place to another</a:t>
             </a:r>
             <a:endParaRPr lang="en-US" sz="850" dirty="0"/>
           </a:p>
@@ -29070,6 +29472,118 @@
       <p:sp>
         <p:nvSpPr>
           <p:cNvPr id="22" name="Shape 20"/>
+          <p:cNvSpPr/>
+          <p:nvPr/>
+        </p:nvSpPr>
+        <p:spPr>
+          <a:xfrm>
+            <a:off x="6519672" y="2258568"/>
+            <a:ext cx="1828800" cy="292608"/>
+          </a:xfrm>
+          <a:prstGeom prst="rect">
+            <a:avLst>
+              <a:gd name="adj" fmla="val 25000"/>
+            </a:avLst>
+          </a:prstGeom>
+          <a:solidFill>
+            <a:srgbClr val="FCE7F3"/>
+          </a:solidFill>
+          <a:ln w="19050">
+            <a:solidFill>
+              <a:srgbClr val="DB2777"/>
+            </a:solidFill>
+            <a:prstDash val="solid"/>
+          </a:ln>
+          <a:effectLst>
+            <a:outerShdw sx="100000" sy="100000" kx="0" ky="0" algn="bl" rotWithShape="0" blurRad="101600" dist="38100" dir="8100000">
+              <a:srgbClr val="000000">
+                <a:alpha val="12000"/>
+              </a:srgbClr>
+            </a:outerShdw>
+          </a:effectLst>
+        </p:spPr>
+      </p:sp>
+      <p:sp>
+        <p:nvSpPr>
+          <p:cNvPr id="23" name="Text 21"/>
+          <p:cNvSpPr/>
+          <p:nvPr/>
+        </p:nvSpPr>
+        <p:spPr>
+          <a:xfrm>
+            <a:off x="6519672" y="2258568"/>
+            <a:ext cx="1828800" cy="292608"/>
+          </a:xfrm>
+          <a:prstGeom prst="rect">
+            <a:avLst/>
+          </a:prstGeom>
+          <a:noFill/>
+          <a:ln/>
+        </p:spPr>
+        <p:txBody>
+          <a:bodyPr wrap="square" lIns="0" tIns="0" rIns="0" bIns="0" rtlCol="0" anchor="ctr"/>
+          <a:lstStyle/>
+          <a:p>
+            <a:pPr algn="ctr" indent="0" marL="0">
+              <a:buNone/>
+            </a:pPr>
+            <a:r>
+              <a:rPr lang="en-US" sz="1300" b="1" dirty="0">
+                <a:solidFill>
+                  <a:srgbClr val="9D174D"/>
+                </a:solidFill>
+                <a:latin typeface="Trebuchet MS" pitchFamily="34" charset="0"/>
+                <a:ea typeface="Trebuchet MS" pitchFamily="34" charset="-122"/>
+                <a:cs typeface="Trebuchet MS" pitchFamily="34" charset="-120"/>
+              </a:rPr>
+              <a:t>ing</a:t>
+            </a:r>
+            <a:endParaRPr lang="en-US" sz="1300" dirty="0"/>
+          </a:p>
+        </p:txBody>
+      </p:sp>
+      <p:sp>
+        <p:nvSpPr>
+          <p:cNvPr id="24" name="Text 22"/>
+          <p:cNvSpPr/>
+          <p:nvPr/>
+        </p:nvSpPr>
+        <p:spPr>
+          <a:xfrm>
+            <a:off x="6519672" y="2569464"/>
+            <a:ext cx="1828800" cy="201168"/>
+          </a:xfrm>
+          <a:prstGeom prst="rect">
+            <a:avLst/>
+          </a:prstGeom>
+          <a:noFill/>
+          <a:ln/>
+        </p:spPr>
+        <p:txBody>
+          <a:bodyPr wrap="square" lIns="0" tIns="0" rIns="0" bIns="0" rtlCol="0" anchor="t"/>
+          <a:lstStyle/>
+          <a:p>
+            <a:pPr algn="ctr" indent="0" marL="0">
+              <a:buNone/>
+            </a:pPr>
+            <a:r>
+              <a:rPr lang="en-US" sz="850" dirty="0">
+                <a:solidFill>
+                  <a:srgbClr val="475569"/>
+                </a:solidFill>
+                <a:latin typeface="Calibri" pitchFamily="34" charset="0"/>
+                <a:ea typeface="Calibri" pitchFamily="34" charset="-122"/>
+                <a:cs typeface="Calibri" pitchFamily="34" charset="-120"/>
+              </a:rPr>
+              <a:t>happening now</a:t>
+            </a:r>
+            <a:endParaRPr lang="en-US" sz="850" dirty="0"/>
+          </a:p>
+        </p:txBody>
+      </p:sp>
+      <p:sp>
+        <p:nvSpPr>
+          <p:cNvPr id="25" name="Shape 23"/>
           <p:cNvSpPr/>
           <p:nvPr/>
         </p:nvSpPr>
@@ -29096,7 +29610,7 @@
       </p:sp>
       <p:sp>
         <p:nvSpPr>
-          <p:cNvPr id="23" name="Text 21"/>
+          <p:cNvPr id="26" name="Text 24"/>
           <p:cNvSpPr/>
           <p:nvPr/>
         </p:nvSpPr>
@@ -29135,7 +29649,7 @@
       </p:sp>
       <p:sp>
         <p:nvSpPr>
-          <p:cNvPr id="24" name="Shape 22"/>
+          <p:cNvPr id="27" name="Shape 25"/>
           <p:cNvSpPr/>
           <p:nvPr/>
         </p:nvSpPr>
@@ -29162,7 +29676,7 @@
       </p:sp>
       <p:sp>
         <p:nvSpPr>
-          <p:cNvPr id="25" name="Text 23"/>
+          <p:cNvPr id="28" name="Text 26"/>
           <p:cNvSpPr/>
           <p:nvPr/>
         </p:nvSpPr>
@@ -29201,7 +29715,7 @@
       </p:sp>
       <p:sp>
         <p:nvSpPr>
-          <p:cNvPr id="26" name="Shape 24"/>
+          <p:cNvPr id="29" name="Shape 27"/>
           <p:cNvSpPr/>
           <p:nvPr/>
         </p:nvSpPr>
@@ -29228,7 +29742,7 @@
       </p:sp>
       <p:sp>
         <p:nvSpPr>
-          <p:cNvPr id="27" name="Text 25"/>
+          <p:cNvPr id="30" name="Text 28"/>
           <p:cNvSpPr/>
           <p:nvPr/>
         </p:nvSpPr>
@@ -29267,7 +29781,7 @@
       </p:sp>
       <p:sp>
         <p:nvSpPr>
-          <p:cNvPr id="28" name="Shape 26"/>
+          <p:cNvPr id="31" name="Shape 29"/>
           <p:cNvSpPr/>
           <p:nvPr/>
         </p:nvSpPr>
@@ -29294,7 +29808,7 @@
       </p:sp>
       <p:sp>
         <p:nvSpPr>
-          <p:cNvPr id="29" name="Text 27"/>
+          <p:cNvPr id="32" name="Text 30"/>
           <p:cNvSpPr/>
           <p:nvPr/>
         </p:nvSpPr>
@@ -29617,7 +30131,7 @@
                 <a:ea typeface="Calibri" pitchFamily="34" charset="-122"/>
                 <a:cs typeface="Calibri" pitchFamily="34" charset="-120"/>
               </a:rPr>
-              <a:t>Word Labs  •  wordlabs.app  •  Root: 'go' = to move or travel</a:t>
+              <a:t>Word Labs  •  wordlabs.app  •  Root: 'go' = to move from one place to another</a:t>
             </a:r>
             <a:endParaRPr lang="en-US" sz="800" dirty="0"/>
           </a:p>
@@ -29756,7 +30270,7 @@
                 <a:ea typeface="Trebuchet MS" pitchFamily="34" charset="-122"/>
                 <a:cs typeface="Trebuchet MS" pitchFamily="34" charset="-120"/>
               </a:rPr>
-              <a:t>undergo</a:t>
+              <a:t>foregoing</a:t>
             </a:r>
             <a:endParaRPr lang="en-US" sz="2800" dirty="0"/>
           </a:p>
@@ -29836,7 +30350,7 @@
         </p:nvSpPr>
         <p:spPr>
           <a:xfrm>
-            <a:off x="2938272" y="2258568"/>
+            <a:off x="2221992" y="2258568"/>
             <a:ext cx="1828800" cy="292608"/>
           </a:xfrm>
           <a:prstGeom prst="rect">
@@ -29870,7 +30384,7 @@
         </p:nvSpPr>
         <p:spPr>
           <a:xfrm>
-            <a:off x="2938272" y="2258568"/>
+            <a:off x="2221992" y="2258568"/>
             <a:ext cx="1828800" cy="292608"/>
           </a:xfrm>
           <a:prstGeom prst="rect">
@@ -29895,7 +30409,7 @@
                 <a:ea typeface="Trebuchet MS" pitchFamily="34" charset="-122"/>
                 <a:cs typeface="Trebuchet MS" pitchFamily="34" charset="-120"/>
               </a:rPr>
-              <a:t>under</a:t>
+              <a:t>fore</a:t>
             </a:r>
             <a:endParaRPr lang="en-US" sz="1300" dirty="0"/>
           </a:p>
@@ -29909,7 +30423,7 @@
         </p:nvSpPr>
         <p:spPr>
           <a:xfrm>
-            <a:off x="2938272" y="2569464"/>
+            <a:off x="2221992" y="2569464"/>
             <a:ext cx="1828800" cy="201168"/>
           </a:xfrm>
           <a:prstGeom prst="rect">
@@ -29934,7 +30448,7 @@
                 <a:ea typeface="Calibri" pitchFamily="34" charset="-122"/>
                 <a:cs typeface="Calibri" pitchFamily="34" charset="-120"/>
               </a:rPr>
-              <a:t>beneath, through</a:t>
+              <a:t>before</a:t>
             </a:r>
             <a:endParaRPr lang="en-US" sz="850" dirty="0"/>
           </a:p>
@@ -29948,7 +30462,7 @@
         </p:nvSpPr>
         <p:spPr>
           <a:xfrm>
-            <a:off x="5803392" y="2258568"/>
+            <a:off x="4370832" y="2258568"/>
             <a:ext cx="1828800" cy="292608"/>
           </a:xfrm>
           <a:prstGeom prst="rect">
@@ -29982,7 +30496,7 @@
         </p:nvSpPr>
         <p:spPr>
           <a:xfrm>
-            <a:off x="5803392" y="2258568"/>
+            <a:off x="4370832" y="2258568"/>
             <a:ext cx="1828800" cy="292608"/>
           </a:xfrm>
           <a:prstGeom prst="rect">
@@ -30021,7 +30535,7 @@
         </p:nvSpPr>
         <p:spPr>
           <a:xfrm>
-            <a:off x="5803392" y="2569464"/>
+            <a:off x="4370832" y="2569464"/>
             <a:ext cx="1828800" cy="201168"/>
           </a:xfrm>
           <a:prstGeom prst="rect">
@@ -30046,7 +30560,7 @@
                 <a:ea typeface="Calibri" pitchFamily="34" charset="-122"/>
                 <a:cs typeface="Calibri" pitchFamily="34" charset="-120"/>
               </a:rPr>
-              <a:t>to move or travel</a:t>
+              <a:t>to move from one place to another</a:t>
             </a:r>
             <a:endParaRPr lang="en-US" sz="850" dirty="0"/>
           </a:p>
@@ -30055,6 +30569,118 @@
       <p:sp>
         <p:nvSpPr>
           <p:cNvPr id="22" name="Shape 20"/>
+          <p:cNvSpPr/>
+          <p:nvPr/>
+        </p:nvSpPr>
+        <p:spPr>
+          <a:xfrm>
+            <a:off x="6519672" y="2258568"/>
+            <a:ext cx="1828800" cy="292608"/>
+          </a:xfrm>
+          <a:prstGeom prst="rect">
+            <a:avLst>
+              <a:gd name="adj" fmla="val 25000"/>
+            </a:avLst>
+          </a:prstGeom>
+          <a:solidFill>
+            <a:srgbClr val="FCE7F3"/>
+          </a:solidFill>
+          <a:ln w="19050">
+            <a:solidFill>
+              <a:srgbClr val="DB2777"/>
+            </a:solidFill>
+            <a:prstDash val="solid"/>
+          </a:ln>
+          <a:effectLst>
+            <a:outerShdw sx="100000" sy="100000" kx="0" ky="0" algn="bl" rotWithShape="0" blurRad="101600" dist="38100" dir="8100000">
+              <a:srgbClr val="000000">
+                <a:alpha val="12000"/>
+              </a:srgbClr>
+            </a:outerShdw>
+          </a:effectLst>
+        </p:spPr>
+      </p:sp>
+      <p:sp>
+        <p:nvSpPr>
+          <p:cNvPr id="23" name="Text 21"/>
+          <p:cNvSpPr/>
+          <p:nvPr/>
+        </p:nvSpPr>
+        <p:spPr>
+          <a:xfrm>
+            <a:off x="6519672" y="2258568"/>
+            <a:ext cx="1828800" cy="292608"/>
+          </a:xfrm>
+          <a:prstGeom prst="rect">
+            <a:avLst/>
+          </a:prstGeom>
+          <a:noFill/>
+          <a:ln/>
+        </p:spPr>
+        <p:txBody>
+          <a:bodyPr wrap="square" lIns="0" tIns="0" rIns="0" bIns="0" rtlCol="0" anchor="ctr"/>
+          <a:lstStyle/>
+          <a:p>
+            <a:pPr algn="ctr" indent="0" marL="0">
+              <a:buNone/>
+            </a:pPr>
+            <a:r>
+              <a:rPr lang="en-US" sz="1300" b="1" dirty="0">
+                <a:solidFill>
+                  <a:srgbClr val="9D174D"/>
+                </a:solidFill>
+                <a:latin typeface="Trebuchet MS" pitchFamily="34" charset="0"/>
+                <a:ea typeface="Trebuchet MS" pitchFamily="34" charset="-122"/>
+                <a:cs typeface="Trebuchet MS" pitchFamily="34" charset="-120"/>
+              </a:rPr>
+              <a:t>ing</a:t>
+            </a:r>
+            <a:endParaRPr lang="en-US" sz="1300" dirty="0"/>
+          </a:p>
+        </p:txBody>
+      </p:sp>
+      <p:sp>
+        <p:nvSpPr>
+          <p:cNvPr id="24" name="Text 22"/>
+          <p:cNvSpPr/>
+          <p:nvPr/>
+        </p:nvSpPr>
+        <p:spPr>
+          <a:xfrm>
+            <a:off x="6519672" y="2569464"/>
+            <a:ext cx="1828800" cy="201168"/>
+          </a:xfrm>
+          <a:prstGeom prst="rect">
+            <a:avLst/>
+          </a:prstGeom>
+          <a:noFill/>
+          <a:ln/>
+        </p:spPr>
+        <p:txBody>
+          <a:bodyPr wrap="square" lIns="0" tIns="0" rIns="0" bIns="0" rtlCol="0" anchor="t"/>
+          <a:lstStyle/>
+          <a:p>
+            <a:pPr algn="ctr" indent="0" marL="0">
+              <a:buNone/>
+            </a:pPr>
+            <a:r>
+              <a:rPr lang="en-US" sz="850" dirty="0">
+                <a:solidFill>
+                  <a:srgbClr val="475569"/>
+                </a:solidFill>
+                <a:latin typeface="Calibri" pitchFamily="34" charset="0"/>
+                <a:ea typeface="Calibri" pitchFamily="34" charset="-122"/>
+                <a:cs typeface="Calibri" pitchFamily="34" charset="-120"/>
+              </a:rPr>
+              <a:t>happening now</a:t>
+            </a:r>
+            <a:endParaRPr lang="en-US" sz="850" dirty="0"/>
+          </a:p>
+        </p:txBody>
+      </p:sp>
+      <p:sp>
+        <p:nvSpPr>
+          <p:cNvPr id="25" name="Shape 23"/>
           <p:cNvSpPr/>
           <p:nvPr/>
         </p:nvSpPr>
@@ -30081,7 +30707,7 @@
       </p:sp>
       <p:sp>
         <p:nvSpPr>
-          <p:cNvPr id="23" name="Text 21"/>
+          <p:cNvPr id="26" name="Text 24"/>
           <p:cNvSpPr/>
           <p:nvPr/>
         </p:nvSpPr>
@@ -30120,7 +30746,7 @@
       </p:sp>
       <p:sp>
         <p:nvSpPr>
-          <p:cNvPr id="24" name="Shape 22"/>
+          <p:cNvPr id="27" name="Shape 25"/>
           <p:cNvSpPr/>
           <p:nvPr/>
         </p:nvSpPr>
@@ -30147,7 +30773,7 @@
       </p:sp>
       <p:sp>
         <p:nvSpPr>
-          <p:cNvPr id="25" name="Shape 23"/>
+          <p:cNvPr id="28" name="Shape 26"/>
           <p:cNvSpPr/>
           <p:nvPr/>
         </p:nvSpPr>
@@ -30174,7 +30800,7 @@
       </p:sp>
       <p:sp>
         <p:nvSpPr>
-          <p:cNvPr id="26" name="Text 24"/>
+          <p:cNvPr id="29" name="Text 27"/>
           <p:cNvSpPr/>
           <p:nvPr/>
         </p:nvSpPr>
@@ -30205,7 +30831,7 @@
                 <a:ea typeface="Trebuchet MS" pitchFamily="34" charset="-122"/>
                 <a:cs typeface="Trebuchet MS" pitchFamily="34" charset="-120"/>
               </a:rPr>
-              <a:t>un</a:t>
+              <a:t>fore</a:t>
             </a:r>
             <a:endParaRPr lang="en-US" sz="1400" dirty="0"/>
           </a:p>
@@ -30213,7 +30839,7 @@
       </p:sp>
       <p:sp>
         <p:nvSpPr>
-          <p:cNvPr id="27" name="Text 25"/>
+          <p:cNvPr id="30" name="Text 28"/>
           <p:cNvSpPr/>
           <p:nvPr/>
         </p:nvSpPr>
@@ -30252,7 +30878,7 @@
       </p:sp>
       <p:sp>
         <p:nvSpPr>
-          <p:cNvPr id="28" name="Shape 26"/>
+          <p:cNvPr id="31" name="Shape 29"/>
           <p:cNvSpPr/>
           <p:nvPr/>
         </p:nvSpPr>
@@ -30279,7 +30905,7 @@
       </p:sp>
       <p:sp>
         <p:nvSpPr>
-          <p:cNvPr id="29" name="Text 27"/>
+          <p:cNvPr id="32" name="Text 30"/>
           <p:cNvSpPr/>
           <p:nvPr/>
         </p:nvSpPr>
@@ -30310,7 +30936,7 @@
                 <a:ea typeface="Trebuchet MS" pitchFamily="34" charset="-122"/>
                 <a:cs typeface="Trebuchet MS" pitchFamily="34" charset="-120"/>
               </a:rPr>
-              <a:t>der</a:t>
+              <a:t>go</a:t>
             </a:r>
             <a:endParaRPr lang="en-US" sz="1400" dirty="0"/>
           </a:p>
@@ -30318,7 +30944,7 @@
       </p:sp>
       <p:sp>
         <p:nvSpPr>
-          <p:cNvPr id="30" name="Text 28"/>
+          <p:cNvPr id="33" name="Text 31"/>
           <p:cNvSpPr/>
           <p:nvPr/>
         </p:nvSpPr>
@@ -30357,7 +30983,7 @@
       </p:sp>
       <p:sp>
         <p:nvSpPr>
-          <p:cNvPr id="31" name="Shape 29"/>
+          <p:cNvPr id="34" name="Shape 32"/>
           <p:cNvSpPr/>
           <p:nvPr/>
         </p:nvSpPr>
@@ -30384,7 +31010,7 @@
       </p:sp>
       <p:sp>
         <p:nvSpPr>
-          <p:cNvPr id="32" name="Text 30"/>
+          <p:cNvPr id="35" name="Text 33"/>
           <p:cNvSpPr/>
           <p:nvPr/>
         </p:nvSpPr>
@@ -30415,7 +31041,7 @@
                 <a:ea typeface="Trebuchet MS" pitchFamily="34" charset="-122"/>
                 <a:cs typeface="Trebuchet MS" pitchFamily="34" charset="-120"/>
               </a:rPr>
-              <a:t>go</a:t>
+              <a:t>ing</a:t>
             </a:r>
             <a:endParaRPr lang="en-US" sz="1400" dirty="0"/>
           </a:p>
@@ -30423,7 +31049,7 @@
       </p:sp>
       <p:sp>
         <p:nvSpPr>
-          <p:cNvPr id="33" name="Shape 31"/>
+          <p:cNvPr id="36" name="Shape 34"/>
           <p:cNvSpPr/>
           <p:nvPr/>
         </p:nvSpPr>
@@ -30450,7 +31076,7 @@
       </p:sp>
       <p:sp>
         <p:nvSpPr>
-          <p:cNvPr id="34" name="Text 32"/>
+          <p:cNvPr id="37" name="Text 35"/>
           <p:cNvSpPr/>
           <p:nvPr/>
         </p:nvSpPr>
@@ -30489,7 +31115,7 @@
       </p:sp>
       <p:sp>
         <p:nvSpPr>
-          <p:cNvPr id="35" name="Shape 33"/>
+          <p:cNvPr id="38" name="Shape 36"/>
           <p:cNvSpPr/>
           <p:nvPr/>
         </p:nvSpPr>
@@ -30516,7 +31142,7 @@
       </p:sp>
       <p:sp>
         <p:nvSpPr>
-          <p:cNvPr id="36" name="Text 34"/>
+          <p:cNvPr id="39" name="Text 37"/>
           <p:cNvSpPr/>
           <p:nvPr/>
         </p:nvSpPr>
@@ -30839,7 +31465,7 @@
                 <a:ea typeface="Calibri" pitchFamily="34" charset="-122"/>
                 <a:cs typeface="Calibri" pitchFamily="34" charset="-120"/>
               </a:rPr>
-              <a:t>Word Labs  •  wordlabs.app  •  Root: 'go' = to move or travel</a:t>
+              <a:t>Word Labs  •  wordlabs.app  •  Root: 'go' = to move from one place to another</a:t>
             </a:r>
             <a:endParaRPr lang="en-US" sz="800" dirty="0"/>
           </a:p>
@@ -30978,7 +31604,7 @@
                 <a:ea typeface="Trebuchet MS" pitchFamily="34" charset="-122"/>
                 <a:cs typeface="Trebuchet MS" pitchFamily="34" charset="-120"/>
               </a:rPr>
-              <a:t>undergo</a:t>
+              <a:t>foregoing</a:t>
             </a:r>
             <a:endParaRPr lang="en-US" sz="2800" dirty="0"/>
           </a:p>
@@ -31058,7 +31684,7 @@
         </p:nvSpPr>
         <p:spPr>
           <a:xfrm>
-            <a:off x="2938272" y="2258568"/>
+            <a:off x="2221992" y="2258568"/>
             <a:ext cx="1828800" cy="292608"/>
           </a:xfrm>
           <a:prstGeom prst="rect">
@@ -31092,7 +31718,7 @@
         </p:nvSpPr>
         <p:spPr>
           <a:xfrm>
-            <a:off x="2938272" y="2258568"/>
+            <a:off x="2221992" y="2258568"/>
             <a:ext cx="1828800" cy="292608"/>
           </a:xfrm>
           <a:prstGeom prst="rect">
@@ -31117,7 +31743,7 @@
                 <a:ea typeface="Trebuchet MS" pitchFamily="34" charset="-122"/>
                 <a:cs typeface="Trebuchet MS" pitchFamily="34" charset="-120"/>
               </a:rPr>
-              <a:t>under</a:t>
+              <a:t>fore</a:t>
             </a:r>
             <a:endParaRPr lang="en-US" sz="1300" dirty="0"/>
           </a:p>
@@ -31131,7 +31757,7 @@
         </p:nvSpPr>
         <p:spPr>
           <a:xfrm>
-            <a:off x="2938272" y="2569464"/>
+            <a:off x="2221992" y="2569464"/>
             <a:ext cx="1828800" cy="201168"/>
           </a:xfrm>
           <a:prstGeom prst="rect">
@@ -31156,7 +31782,7 @@
                 <a:ea typeface="Calibri" pitchFamily="34" charset="-122"/>
                 <a:cs typeface="Calibri" pitchFamily="34" charset="-120"/>
               </a:rPr>
-              <a:t>beneath, through</a:t>
+              <a:t>before</a:t>
             </a:r>
             <a:endParaRPr lang="en-US" sz="850" dirty="0"/>
           </a:p>
@@ -31170,7 +31796,7 @@
         </p:nvSpPr>
         <p:spPr>
           <a:xfrm>
-            <a:off x="5803392" y="2258568"/>
+            <a:off x="4370832" y="2258568"/>
             <a:ext cx="1828800" cy="292608"/>
           </a:xfrm>
           <a:prstGeom prst="rect">
@@ -31204,7 +31830,7 @@
         </p:nvSpPr>
         <p:spPr>
           <a:xfrm>
-            <a:off x="5803392" y="2258568"/>
+            <a:off x="4370832" y="2258568"/>
             <a:ext cx="1828800" cy="292608"/>
           </a:xfrm>
           <a:prstGeom prst="rect">
@@ -31243,7 +31869,7 @@
         </p:nvSpPr>
         <p:spPr>
           <a:xfrm>
-            <a:off x="5803392" y="2569464"/>
+            <a:off x="4370832" y="2569464"/>
             <a:ext cx="1828800" cy="201168"/>
           </a:xfrm>
           <a:prstGeom prst="rect">
@@ -31268,7 +31894,7 @@
                 <a:ea typeface="Calibri" pitchFamily="34" charset="-122"/>
                 <a:cs typeface="Calibri" pitchFamily="34" charset="-120"/>
               </a:rPr>
-              <a:t>to move or travel</a:t>
+              <a:t>to move from one place to another</a:t>
             </a:r>
             <a:endParaRPr lang="en-US" sz="850" dirty="0"/>
           </a:p>
@@ -31277,6 +31903,118 @@
       <p:sp>
         <p:nvSpPr>
           <p:cNvPr id="22" name="Shape 20"/>
+          <p:cNvSpPr/>
+          <p:nvPr/>
+        </p:nvSpPr>
+        <p:spPr>
+          <a:xfrm>
+            <a:off x="6519672" y="2258568"/>
+            <a:ext cx="1828800" cy="292608"/>
+          </a:xfrm>
+          <a:prstGeom prst="rect">
+            <a:avLst>
+              <a:gd name="adj" fmla="val 25000"/>
+            </a:avLst>
+          </a:prstGeom>
+          <a:solidFill>
+            <a:srgbClr val="FCE7F3"/>
+          </a:solidFill>
+          <a:ln w="19050">
+            <a:solidFill>
+              <a:srgbClr val="DB2777"/>
+            </a:solidFill>
+            <a:prstDash val="solid"/>
+          </a:ln>
+          <a:effectLst>
+            <a:outerShdw sx="100000" sy="100000" kx="0" ky="0" algn="bl" rotWithShape="0" blurRad="101600" dist="38100" dir="8100000">
+              <a:srgbClr val="000000">
+                <a:alpha val="12000"/>
+              </a:srgbClr>
+            </a:outerShdw>
+          </a:effectLst>
+        </p:spPr>
+      </p:sp>
+      <p:sp>
+        <p:nvSpPr>
+          <p:cNvPr id="23" name="Text 21"/>
+          <p:cNvSpPr/>
+          <p:nvPr/>
+        </p:nvSpPr>
+        <p:spPr>
+          <a:xfrm>
+            <a:off x="6519672" y="2258568"/>
+            <a:ext cx="1828800" cy="292608"/>
+          </a:xfrm>
+          <a:prstGeom prst="rect">
+            <a:avLst/>
+          </a:prstGeom>
+          <a:noFill/>
+          <a:ln/>
+        </p:spPr>
+        <p:txBody>
+          <a:bodyPr wrap="square" lIns="0" tIns="0" rIns="0" bIns="0" rtlCol="0" anchor="ctr"/>
+          <a:lstStyle/>
+          <a:p>
+            <a:pPr algn="ctr" indent="0" marL="0">
+              <a:buNone/>
+            </a:pPr>
+            <a:r>
+              <a:rPr lang="en-US" sz="1300" b="1" dirty="0">
+                <a:solidFill>
+                  <a:srgbClr val="9D174D"/>
+                </a:solidFill>
+                <a:latin typeface="Trebuchet MS" pitchFamily="34" charset="0"/>
+                <a:ea typeface="Trebuchet MS" pitchFamily="34" charset="-122"/>
+                <a:cs typeface="Trebuchet MS" pitchFamily="34" charset="-120"/>
+              </a:rPr>
+              <a:t>ing</a:t>
+            </a:r>
+            <a:endParaRPr lang="en-US" sz="1300" dirty="0"/>
+          </a:p>
+        </p:txBody>
+      </p:sp>
+      <p:sp>
+        <p:nvSpPr>
+          <p:cNvPr id="24" name="Text 22"/>
+          <p:cNvSpPr/>
+          <p:nvPr/>
+        </p:nvSpPr>
+        <p:spPr>
+          <a:xfrm>
+            <a:off x="6519672" y="2569464"/>
+            <a:ext cx="1828800" cy="201168"/>
+          </a:xfrm>
+          <a:prstGeom prst="rect">
+            <a:avLst/>
+          </a:prstGeom>
+          <a:noFill/>
+          <a:ln/>
+        </p:spPr>
+        <p:txBody>
+          <a:bodyPr wrap="square" lIns="0" tIns="0" rIns="0" bIns="0" rtlCol="0" anchor="t"/>
+          <a:lstStyle/>
+          <a:p>
+            <a:pPr algn="ctr" indent="0" marL="0">
+              <a:buNone/>
+            </a:pPr>
+            <a:r>
+              <a:rPr lang="en-US" sz="850" dirty="0">
+                <a:solidFill>
+                  <a:srgbClr val="475569"/>
+                </a:solidFill>
+                <a:latin typeface="Calibri" pitchFamily="34" charset="0"/>
+                <a:ea typeface="Calibri" pitchFamily="34" charset="-122"/>
+                <a:cs typeface="Calibri" pitchFamily="34" charset="-120"/>
+              </a:rPr>
+              <a:t>happening now</a:t>
+            </a:r>
+            <a:endParaRPr lang="en-US" sz="850" dirty="0"/>
+          </a:p>
+        </p:txBody>
+      </p:sp>
+      <p:sp>
+        <p:nvSpPr>
+          <p:cNvPr id="25" name="Shape 23"/>
           <p:cNvSpPr/>
           <p:nvPr/>
         </p:nvSpPr>
@@ -31303,7 +32041,7 @@
       </p:sp>
       <p:sp>
         <p:nvSpPr>
-          <p:cNvPr id="23" name="Text 21"/>
+          <p:cNvPr id="26" name="Text 24"/>
           <p:cNvSpPr/>
           <p:nvPr/>
         </p:nvSpPr>
@@ -31342,7 +32080,7 @@
       </p:sp>
       <p:sp>
         <p:nvSpPr>
-          <p:cNvPr id="24" name="Shape 22"/>
+          <p:cNvPr id="27" name="Shape 25"/>
           <p:cNvSpPr/>
           <p:nvPr/>
         </p:nvSpPr>
@@ -31369,7 +32107,7 @@
       </p:sp>
       <p:sp>
         <p:nvSpPr>
-          <p:cNvPr id="25" name="Shape 23"/>
+          <p:cNvPr id="28" name="Shape 26"/>
           <p:cNvSpPr/>
           <p:nvPr/>
         </p:nvSpPr>
@@ -31396,7 +32134,7 @@
       </p:sp>
       <p:sp>
         <p:nvSpPr>
-          <p:cNvPr id="26" name="Text 24"/>
+          <p:cNvPr id="29" name="Text 27"/>
           <p:cNvSpPr/>
           <p:nvPr/>
         </p:nvSpPr>
@@ -31427,7 +32165,7 @@
                 <a:ea typeface="Trebuchet MS" pitchFamily="34" charset="-122"/>
                 <a:cs typeface="Trebuchet MS" pitchFamily="34" charset="-120"/>
               </a:rPr>
-              <a:t>un</a:t>
+              <a:t>fore</a:t>
             </a:r>
             <a:endParaRPr lang="en-US" sz="1400" dirty="0"/>
           </a:p>
@@ -31435,7 +32173,7 @@
       </p:sp>
       <p:sp>
         <p:nvSpPr>
-          <p:cNvPr id="27" name="Text 25"/>
+          <p:cNvPr id="30" name="Text 28"/>
           <p:cNvSpPr/>
           <p:nvPr/>
         </p:nvSpPr>
@@ -31474,7 +32212,7 @@
       </p:sp>
       <p:sp>
         <p:nvSpPr>
-          <p:cNvPr id="28" name="Shape 26"/>
+          <p:cNvPr id="31" name="Shape 29"/>
           <p:cNvSpPr/>
           <p:nvPr/>
         </p:nvSpPr>
@@ -31501,7 +32239,7 @@
       </p:sp>
       <p:sp>
         <p:nvSpPr>
-          <p:cNvPr id="29" name="Text 27"/>
+          <p:cNvPr id="32" name="Text 30"/>
           <p:cNvSpPr/>
           <p:nvPr/>
         </p:nvSpPr>
@@ -31532,7 +32270,7 @@
                 <a:ea typeface="Trebuchet MS" pitchFamily="34" charset="-122"/>
                 <a:cs typeface="Trebuchet MS" pitchFamily="34" charset="-120"/>
               </a:rPr>
-              <a:t>der</a:t>
+              <a:t>go</a:t>
             </a:r>
             <a:endParaRPr lang="en-US" sz="1400" dirty="0"/>
           </a:p>
@@ -31540,7 +32278,7 @@
       </p:sp>
       <p:sp>
         <p:nvSpPr>
-          <p:cNvPr id="30" name="Text 28"/>
+          <p:cNvPr id="33" name="Text 31"/>
           <p:cNvSpPr/>
           <p:nvPr/>
         </p:nvSpPr>
@@ -31579,7 +32317,7 @@
       </p:sp>
       <p:sp>
         <p:nvSpPr>
-          <p:cNvPr id="31" name="Shape 29"/>
+          <p:cNvPr id="34" name="Shape 32"/>
           <p:cNvSpPr/>
           <p:nvPr/>
         </p:nvSpPr>
@@ -31606,7 +32344,7 @@
       </p:sp>
       <p:sp>
         <p:nvSpPr>
-          <p:cNvPr id="32" name="Text 30"/>
+          <p:cNvPr id="35" name="Text 33"/>
           <p:cNvSpPr/>
           <p:nvPr/>
         </p:nvSpPr>
@@ -31637,7 +32375,7 @@
                 <a:ea typeface="Trebuchet MS" pitchFamily="34" charset="-122"/>
                 <a:cs typeface="Trebuchet MS" pitchFamily="34" charset="-120"/>
               </a:rPr>
-              <a:t>go</a:t>
+              <a:t>ing</a:t>
             </a:r>
             <a:endParaRPr lang="en-US" sz="1400" dirty="0"/>
           </a:p>
@@ -31645,7 +32383,7 @@
       </p:sp>
       <p:sp>
         <p:nvSpPr>
-          <p:cNvPr id="33" name="Shape 31"/>
+          <p:cNvPr id="36" name="Shape 34"/>
           <p:cNvSpPr/>
           <p:nvPr/>
         </p:nvSpPr>
@@ -31672,7 +32410,7 @@
       </p:sp>
       <p:sp>
         <p:nvSpPr>
-          <p:cNvPr id="34" name="Text 32"/>
+          <p:cNvPr id="37" name="Text 35"/>
           <p:cNvSpPr/>
           <p:nvPr/>
         </p:nvSpPr>
@@ -31711,7 +32449,7 @@
       </p:sp>
       <p:sp>
         <p:nvSpPr>
-          <p:cNvPr id="35" name="Shape 33"/>
+          <p:cNvPr id="38" name="Shape 36"/>
           <p:cNvSpPr/>
           <p:nvPr/>
         </p:nvSpPr>
@@ -31738,7 +32476,7 @@
       </p:sp>
       <p:sp>
         <p:nvSpPr>
-          <p:cNvPr id="36" name="Shape 34"/>
+          <p:cNvPr id="39" name="Shape 37"/>
           <p:cNvSpPr/>
           <p:nvPr/>
         </p:nvSpPr>
@@ -31765,7 +32503,7 @@
       </p:sp>
       <p:sp>
         <p:nvSpPr>
-          <p:cNvPr id="37" name="Text 35"/>
+          <p:cNvPr id="40" name="Text 38"/>
           <p:cNvSpPr/>
           <p:nvPr/>
         </p:nvSpPr>
@@ -31796,7 +32534,7 @@
                 <a:ea typeface="Trebuchet MS" pitchFamily="34" charset="-122"/>
                 <a:cs typeface="Trebuchet MS" pitchFamily="34" charset="-120"/>
               </a:rPr>
-              <a:t>u</a:t>
+              <a:t>f</a:t>
             </a:r>
             <a:endParaRPr lang="en-US" sz="900" dirty="0"/>
           </a:p>
@@ -31804,7 +32542,7 @@
       </p:sp>
       <p:sp>
         <p:nvSpPr>
-          <p:cNvPr id="38" name="Shape 36"/>
+          <p:cNvPr id="41" name="Shape 39"/>
           <p:cNvSpPr/>
           <p:nvPr/>
         </p:nvSpPr>
@@ -31831,7 +32569,7 @@
       </p:sp>
       <p:sp>
         <p:nvSpPr>
-          <p:cNvPr id="39" name="Text 37"/>
+          <p:cNvPr id="42" name="Text 40"/>
           <p:cNvSpPr/>
           <p:nvPr/>
         </p:nvSpPr>
@@ -31862,7 +32600,7 @@
                 <a:ea typeface="Trebuchet MS" pitchFamily="34" charset="-122"/>
                 <a:cs typeface="Trebuchet MS" pitchFamily="34" charset="-120"/>
               </a:rPr>
-              <a:t>n</a:t>
+              <a:t>ore</a:t>
             </a:r>
             <a:endParaRPr lang="en-US" sz="900" dirty="0"/>
           </a:p>
@@ -31870,7 +32608,7 @@
       </p:sp>
       <p:sp>
         <p:nvSpPr>
-          <p:cNvPr id="40" name="Shape 38"/>
+          <p:cNvPr id="43" name="Shape 41"/>
           <p:cNvSpPr/>
           <p:nvPr/>
         </p:nvSpPr>
@@ -31897,7 +32635,7 @@
       </p:sp>
       <p:sp>
         <p:nvSpPr>
-          <p:cNvPr id="41" name="Text 39"/>
+          <p:cNvPr id="44" name="Text 42"/>
           <p:cNvSpPr/>
           <p:nvPr/>
         </p:nvSpPr>
@@ -31928,7 +32666,7 @@
                 <a:ea typeface="Trebuchet MS" pitchFamily="34" charset="-122"/>
                 <a:cs typeface="Trebuchet MS" pitchFamily="34" charset="-120"/>
               </a:rPr>
-              <a:t>d</a:t>
+              <a:t>g</a:t>
             </a:r>
             <a:endParaRPr lang="en-US" sz="900" dirty="0"/>
           </a:p>
@@ -31936,7 +32674,7 @@
       </p:sp>
       <p:sp>
         <p:nvSpPr>
-          <p:cNvPr id="42" name="Shape 40"/>
+          <p:cNvPr id="45" name="Shape 43"/>
           <p:cNvSpPr/>
           <p:nvPr/>
         </p:nvSpPr>
@@ -31963,7 +32701,7 @@
       </p:sp>
       <p:sp>
         <p:nvSpPr>
-          <p:cNvPr id="43" name="Text 41"/>
+          <p:cNvPr id="46" name="Text 44"/>
           <p:cNvSpPr/>
           <p:nvPr/>
         </p:nvSpPr>
@@ -31994,7 +32732,7 @@
                 <a:ea typeface="Trebuchet MS" pitchFamily="34" charset="-122"/>
                 <a:cs typeface="Trebuchet MS" pitchFamily="34" charset="-120"/>
               </a:rPr>
-              <a:t>er</a:t>
+              <a:t>o</a:t>
             </a:r>
             <a:endParaRPr lang="en-US" sz="900" dirty="0"/>
           </a:p>
@@ -32002,7 +32740,7 @@
       </p:sp>
       <p:sp>
         <p:nvSpPr>
-          <p:cNvPr id="44" name="Shape 42"/>
+          <p:cNvPr id="47" name="Shape 45"/>
           <p:cNvSpPr/>
           <p:nvPr/>
         </p:nvSpPr>
@@ -32029,7 +32767,7 @@
       </p:sp>
       <p:sp>
         <p:nvSpPr>
-          <p:cNvPr id="45" name="Text 43"/>
+          <p:cNvPr id="48" name="Text 46"/>
           <p:cNvSpPr/>
           <p:nvPr/>
         </p:nvSpPr>
@@ -32060,7 +32798,7 @@
                 <a:ea typeface="Trebuchet MS" pitchFamily="34" charset="-122"/>
                 <a:cs typeface="Trebuchet MS" pitchFamily="34" charset="-120"/>
               </a:rPr>
-              <a:t>g</a:t>
+              <a:t>i</a:t>
             </a:r>
             <a:endParaRPr lang="en-US" sz="900" dirty="0"/>
           </a:p>
@@ -32068,7 +32806,7 @@
       </p:sp>
       <p:sp>
         <p:nvSpPr>
-          <p:cNvPr id="46" name="Shape 44"/>
+          <p:cNvPr id="49" name="Shape 47"/>
           <p:cNvSpPr/>
           <p:nvPr/>
         </p:nvSpPr>
@@ -32095,7 +32833,7 @@
       </p:sp>
       <p:sp>
         <p:nvSpPr>
-          <p:cNvPr id="47" name="Text 45"/>
+          <p:cNvPr id="50" name="Text 48"/>
           <p:cNvSpPr/>
           <p:nvPr/>
         </p:nvSpPr>
@@ -32126,7 +32864,7 @@
                 <a:ea typeface="Trebuchet MS" pitchFamily="34" charset="-122"/>
                 <a:cs typeface="Trebuchet MS" pitchFamily="34" charset="-120"/>
               </a:rPr>
-              <a:t>o</a:t>
+              <a:t>ng</a:t>
             </a:r>
             <a:endParaRPr lang="en-US" sz="900" dirty="0"/>
           </a:p>
@@ -32418,7 +33156,7 @@
                 <a:ea typeface="Calibri" pitchFamily="34" charset="-122"/>
                 <a:cs typeface="Calibri" pitchFamily="34" charset="-120"/>
               </a:rPr>
-              <a:t>Word Labs  •  wordlabs.app  •  Root: 'go' = to move or travel</a:t>
+              <a:t>Word Labs  •  wordlabs.app  •  Root: 'go' = to move from one place to another</a:t>
             </a:r>
             <a:endParaRPr lang="en-US" sz="800" dirty="0"/>
           </a:p>
@@ -33587,7 +34325,7 @@
                 <a:ea typeface="Calibri" pitchFamily="34" charset="-122"/>
                 <a:cs typeface="Calibri" pitchFamily="34" charset="-120"/>
               </a:rPr>
-              <a:t>Word Labs  •  wordlabs.app  •  Root: 'go' = to move or travel</a:t>
+              <a:t>Word Labs  •  wordlabs.app  •  Root: 'go' = to move from one place to another</a:t>
             </a:r>
             <a:endParaRPr lang="en-US" sz="800" dirty="0"/>
           </a:p>
@@ -33888,7 +34626,7 @@
                 <a:ea typeface="Trebuchet MS" pitchFamily="34" charset="-122"/>
                 <a:cs typeface="Trebuchet MS" pitchFamily="34" charset="-120"/>
               </a:rPr>
-              <a:t>a-</a:t>
+              <a:t>con-</a:t>
             </a:r>
             <a:endParaRPr lang="en-US" sz="1300" dirty="0"/>
           </a:p>
@@ -34169,7 +34907,7 @@
                 <a:ea typeface="Trebuchet MS" pitchFamily="34" charset="-122"/>
                 <a:cs typeface="Trebuchet MS" pitchFamily="34" charset="-120"/>
               </a:rPr>
-              <a:t>-ne</a:t>
+              <a:t>-al</a:t>
             </a:r>
             <a:endParaRPr lang="en-US" sz="1300" dirty="0"/>
           </a:p>
@@ -34233,7 +34971,7 @@
                 <a:ea typeface="Trebuchet MS" pitchFamily="34" charset="-122"/>
                 <a:cs typeface="Trebuchet MS" pitchFamily="34" charset="-120"/>
               </a:rPr>
-              <a:t>out-</a:t>
+              <a:t>under-</a:t>
             </a:r>
             <a:endParaRPr lang="en-US" sz="1300" dirty="0"/>
           </a:p>
@@ -34322,7 +35060,7 @@
                 <a:ea typeface="Trebuchet MS" pitchFamily="34" charset="-122"/>
                 <a:cs typeface="Trebuchet MS" pitchFamily="34" charset="-120"/>
               </a:rPr>
-              <a:t>-al</a:t>
+              <a:t>-er</a:t>
             </a:r>
             <a:endParaRPr lang="en-US" sz="1300" dirty="0"/>
           </a:p>
@@ -34343,7 +35081,7 @@
             <a:avLst/>
           </a:prstGeom>
           <a:solidFill>
-            <a:srgbClr val="DDD6FE"/>
+            <a:srgbClr val="F1F5F9"/>
           </a:solidFill>
           <a:ln w="12700">
             <a:solidFill>
@@ -34355,14 +35093,64 @@
       </p:sp>
       <p:sp>
         <p:nvSpPr>
-          <p:cNvPr id="34" name="Text 32"/>
-          <p:cNvSpPr/>
-          <p:nvPr/>
-        </p:nvSpPr>
-        <p:spPr>
-          <a:xfrm>
-            <a:off x="365760" y="2825496"/>
-            <a:ext cx="2468880" cy="402336"/>
+          <p:cNvPr id="34" name="Shape 32"/>
+          <p:cNvSpPr/>
+          <p:nvPr/>
+        </p:nvSpPr>
+        <p:spPr>
+          <a:xfrm>
+            <a:off x="2971800" y="2825496"/>
+            <a:ext cx="2834640" cy="402336"/>
+          </a:xfrm>
+          <a:prstGeom prst="rect">
+            <a:avLst/>
+          </a:prstGeom>
+          <a:solidFill>
+            <a:srgbClr val="F1F5F9"/>
+          </a:solidFill>
+          <a:ln w="12700">
+            <a:solidFill>
+              <a:srgbClr val="E2E8F0"/>
+            </a:solidFill>
+            <a:prstDash val="solid"/>
+          </a:ln>
+        </p:spPr>
+      </p:sp>
+      <p:sp>
+        <p:nvSpPr>
+          <p:cNvPr id="35" name="Shape 33"/>
+          <p:cNvSpPr/>
+          <p:nvPr/>
+        </p:nvSpPr>
+        <p:spPr>
+          <a:xfrm>
+            <a:off x="5943600" y="2825496"/>
+            <a:ext cx="2834640" cy="402336"/>
+          </a:xfrm>
+          <a:prstGeom prst="rect">
+            <a:avLst/>
+          </a:prstGeom>
+          <a:solidFill>
+            <a:srgbClr val="FCE7F3"/>
+          </a:solidFill>
+          <a:ln w="12700">
+            <a:solidFill>
+              <a:srgbClr val="E2E8F0"/>
+            </a:solidFill>
+            <a:prstDash val="solid"/>
+          </a:ln>
+        </p:spPr>
+      </p:sp>
+      <p:sp>
+        <p:nvSpPr>
+          <p:cNvPr id="36" name="Text 34"/>
+          <p:cNvSpPr/>
+          <p:nvPr/>
+        </p:nvSpPr>
+        <p:spPr>
+          <a:xfrm>
+            <a:off x="5943600" y="2825496"/>
+            <a:ext cx="2834640" cy="402336"/>
           </a:xfrm>
           <a:prstGeom prst="rect">
             <a:avLst/>
@@ -34380,13 +35168,13 @@
             <a:r>
               <a:rPr lang="en-US" sz="1300" b="1" dirty="0">
                 <a:solidFill>
-                  <a:srgbClr val="4C1D95"/>
+                  <a:srgbClr val="9D174D"/>
                 </a:solidFill>
                 <a:latin typeface="Trebuchet MS" pitchFamily="34" charset="0"/>
                 <a:ea typeface="Trebuchet MS" pitchFamily="34" charset="-122"/>
                 <a:cs typeface="Trebuchet MS" pitchFamily="34" charset="-120"/>
               </a:rPr>
-              <a:t>under-</a:t>
+              <a:t>-es</a:t>
             </a:r>
             <a:endParaRPr lang="en-US" sz="1300" dirty="0"/>
           </a:p>
@@ -34394,64 +35182,14 @@
       </p:sp>
       <p:sp>
         <p:nvSpPr>
-          <p:cNvPr id="35" name="Shape 33"/>
-          <p:cNvSpPr/>
-          <p:nvPr/>
-        </p:nvSpPr>
-        <p:spPr>
-          <a:xfrm>
-            <a:off x="2971800" y="2825496"/>
-            <a:ext cx="2834640" cy="402336"/>
-          </a:xfrm>
-          <a:prstGeom prst="rect">
-            <a:avLst/>
-          </a:prstGeom>
-          <a:solidFill>
-            <a:srgbClr val="F1F5F9"/>
-          </a:solidFill>
-          <a:ln w="12700">
-            <a:solidFill>
-              <a:srgbClr val="E2E8F0"/>
-            </a:solidFill>
-            <a:prstDash val="solid"/>
-          </a:ln>
-        </p:spPr>
-      </p:sp>
-      <p:sp>
-        <p:nvSpPr>
-          <p:cNvPr id="36" name="Shape 34"/>
-          <p:cNvSpPr/>
-          <p:nvPr/>
-        </p:nvSpPr>
-        <p:spPr>
-          <a:xfrm>
-            <a:off x="5943600" y="2825496"/>
-            <a:ext cx="2834640" cy="402336"/>
-          </a:xfrm>
-          <a:prstGeom prst="rect">
-            <a:avLst/>
-          </a:prstGeom>
-          <a:solidFill>
-            <a:srgbClr val="FCE7F3"/>
-          </a:solidFill>
-          <a:ln w="12700">
-            <a:solidFill>
-              <a:srgbClr val="E2E8F0"/>
-            </a:solidFill>
-            <a:prstDash val="solid"/>
-          </a:ln>
-        </p:spPr>
-      </p:sp>
-      <p:sp>
-        <p:nvSpPr>
           <p:cNvPr id="37" name="Text 35"/>
           <p:cNvSpPr/>
           <p:nvPr/>
         </p:nvSpPr>
         <p:spPr>
           <a:xfrm>
-            <a:off x="5943600" y="2825496"/>
-            <a:ext cx="2834640" cy="402336"/>
+            <a:off x="365760" y="3611880"/>
+            <a:ext cx="1828800" cy="347472"/>
           </a:xfrm>
           <a:prstGeom prst="rect">
             <a:avLst/>
@@ -34463,21 +35201,21 @@
           <a:bodyPr wrap="square" lIns="0" tIns="0" rIns="0" bIns="0" rtlCol="0" anchor="ctr"/>
           <a:lstStyle/>
           <a:p>
-            <a:pPr algn="ctr" indent="0" marL="0">
-              <a:buNone/>
-            </a:pPr>
-            <a:r>
-              <a:rPr lang="en-US" sz="1300" b="1" dirty="0">
-                <a:solidFill>
-                  <a:srgbClr val="9D174D"/>
+            <a:pPr algn="l" indent="0" marL="0">
+              <a:buNone/>
+            </a:pPr>
+            <a:r>
+              <a:rPr lang="en-US" sz="1200" b="1" dirty="0">
+                <a:solidFill>
+                  <a:srgbClr val="0F172A"/>
                 </a:solidFill>
                 <a:latin typeface="Trebuchet MS" pitchFamily="34" charset="0"/>
                 <a:ea typeface="Trebuchet MS" pitchFamily="34" charset="-122"/>
                 <a:cs typeface="Trebuchet MS" pitchFamily="34" charset="-120"/>
               </a:rPr>
-              <a:t>-er</a:t>
-            </a:r>
-            <a:endParaRPr lang="en-US" sz="1300" dirty="0"/>
+              <a:t>Sample words:</a:t>
+            </a:r>
+            <a:endParaRPr lang="en-US" sz="1200" dirty="0"/>
           </a:p>
         </p:txBody>
       </p:sp>
@@ -34489,18 +35227,20 @@
         </p:nvSpPr>
         <p:spPr>
           <a:xfrm>
-            <a:off x="365760" y="3246120"/>
-            <a:ext cx="2468880" cy="402336"/>
-          </a:xfrm>
-          <a:prstGeom prst="rect">
-            <a:avLst/>
-          </a:prstGeom>
-          <a:solidFill>
-            <a:srgbClr val="DDD6FE"/>
-          </a:solidFill>
-          <a:ln w="12700">
-            <a:solidFill>
-              <a:srgbClr val="E2E8F0"/>
+            <a:off x="365760" y="4023360"/>
+            <a:ext cx="2011680" cy="402336"/>
+          </a:xfrm>
+          <a:prstGeom prst="rect">
+            <a:avLst>
+              <a:gd name="adj" fmla="val 13636"/>
+            </a:avLst>
+          </a:prstGeom>
+          <a:solidFill>
+            <a:srgbClr val="EEF2FF"/>
+          </a:solidFill>
+          <a:ln w="12700">
+            <a:solidFill>
+              <a:srgbClr val="6366F1"/>
             </a:solidFill>
             <a:prstDash val="solid"/>
           </a:ln>
@@ -34514,8 +35254,8 @@
         </p:nvSpPr>
         <p:spPr>
           <a:xfrm>
-            <a:off x="365760" y="3246120"/>
-            <a:ext cx="2468880" cy="402336"/>
+            <a:off x="365760" y="4023360"/>
+            <a:ext cx="2011680" cy="402336"/>
           </a:xfrm>
           <a:prstGeom prst="rect">
             <a:avLst/>
@@ -34531,17 +35271,17 @@
               <a:buNone/>
             </a:pPr>
             <a:r>
-              <a:rPr lang="en-US" sz="1300" b="1" dirty="0">
-                <a:solidFill>
-                  <a:srgbClr val="4C1D95"/>
+              <a:rPr lang="en-US" sz="1200" b="1" dirty="0">
+                <a:solidFill>
+                  <a:srgbClr val="4338CA"/>
                 </a:solidFill>
                 <a:latin typeface="Trebuchet MS" pitchFamily="34" charset="0"/>
                 <a:ea typeface="Trebuchet MS" pitchFamily="34" charset="-122"/>
                 <a:cs typeface="Trebuchet MS" pitchFamily="34" charset="-120"/>
               </a:rPr>
-              <a:t>er-</a:t>
-            </a:r>
-            <a:endParaRPr lang="en-US" sz="1300" dirty="0"/>
+              <a:t>go</a:t>
+            </a:r>
+            <a:endParaRPr lang="en-US" sz="1200" dirty="0"/>
           </a:p>
         </p:txBody>
       </p:sp>
@@ -34553,58 +35293,35 @@
         </p:nvSpPr>
         <p:spPr>
           <a:xfrm>
-            <a:off x="2971800" y="3246120"/>
-            <a:ext cx="2834640" cy="402336"/>
-          </a:xfrm>
-          <a:prstGeom prst="rect">
-            <a:avLst/>
-          </a:prstGeom>
-          <a:solidFill>
-            <a:srgbClr val="F8FAFC"/>
-          </a:solidFill>
-          <a:ln w="12700">
-            <a:solidFill>
-              <a:srgbClr val="E2E8F0"/>
-            </a:solidFill>
-            <a:prstDash val="solid"/>
-          </a:ln>
-        </p:spPr>
-      </p:sp>
-      <p:sp>
-        <p:nvSpPr>
-          <p:cNvPr id="41" name="Shape 39"/>
-          <p:cNvSpPr/>
-          <p:nvPr/>
-        </p:nvSpPr>
-        <p:spPr>
-          <a:xfrm>
-            <a:off x="5943600" y="3246120"/>
-            <a:ext cx="2834640" cy="402336"/>
-          </a:xfrm>
-          <a:prstGeom prst="rect">
-            <a:avLst/>
-          </a:prstGeom>
-          <a:solidFill>
-            <a:srgbClr val="FCE7F3"/>
-          </a:solidFill>
-          <a:ln w="12700">
-            <a:solidFill>
-              <a:srgbClr val="E2E8F0"/>
-            </a:solidFill>
-            <a:prstDash val="solid"/>
-          </a:ln>
-        </p:spPr>
-      </p:sp>
-      <p:sp>
-        <p:nvSpPr>
-          <p:cNvPr id="42" name="Text 40"/>
-          <p:cNvSpPr/>
-          <p:nvPr/>
-        </p:nvSpPr>
-        <p:spPr>
-          <a:xfrm>
-            <a:off x="5943600" y="3246120"/>
-            <a:ext cx="2834640" cy="402336"/>
+            <a:off x="2542032" y="4023360"/>
+            <a:ext cx="2011680" cy="402336"/>
+          </a:xfrm>
+          <a:prstGeom prst="rect">
+            <a:avLst>
+              <a:gd name="adj" fmla="val 13636"/>
+            </a:avLst>
+          </a:prstGeom>
+          <a:solidFill>
+            <a:srgbClr val="EEF2FF"/>
+          </a:solidFill>
+          <a:ln w="12700">
+            <a:solidFill>
+              <a:srgbClr val="6366F1"/>
+            </a:solidFill>
+            <a:prstDash val="solid"/>
+          </a:ln>
+        </p:spPr>
+      </p:sp>
+      <p:sp>
+        <p:nvSpPr>
+          <p:cNvPr id="41" name="Text 39"/>
+          <p:cNvSpPr/>
+          <p:nvPr/>
+        </p:nvSpPr>
+        <p:spPr>
+          <a:xfrm>
+            <a:off x="2542032" y="4023360"/>
+            <a:ext cx="2011680" cy="402336"/>
           </a:xfrm>
           <a:prstGeom prst="rect">
             <a:avLst/>
@@ -34620,19 +35337,46 @@
               <a:buNone/>
             </a:pPr>
             <a:r>
-              <a:rPr lang="en-US" sz="1300" b="1" dirty="0">
-                <a:solidFill>
-                  <a:srgbClr val="9D174D"/>
+              <a:rPr lang="en-US" sz="1200" b="1" dirty="0">
+                <a:solidFill>
+                  <a:srgbClr val="4338CA"/>
                 </a:solidFill>
                 <a:latin typeface="Trebuchet MS" pitchFamily="34" charset="0"/>
                 <a:ea typeface="Trebuchet MS" pitchFamily="34" charset="-122"/>
                 <a:cs typeface="Trebuchet MS" pitchFamily="34" charset="-120"/>
               </a:rPr>
-              <a:t>-es</a:t>
-            </a:r>
-            <a:endParaRPr lang="en-US" sz="1300" dirty="0"/>
-          </a:p>
-        </p:txBody>
+              <a:t>goer</a:t>
+            </a:r>
+            <a:endParaRPr lang="en-US" sz="1200" dirty="0"/>
+          </a:p>
+        </p:txBody>
+      </p:sp>
+      <p:sp>
+        <p:nvSpPr>
+          <p:cNvPr id="42" name="Shape 40"/>
+          <p:cNvSpPr/>
+          <p:nvPr/>
+        </p:nvSpPr>
+        <p:spPr>
+          <a:xfrm>
+            <a:off x="4718304" y="4023360"/>
+            <a:ext cx="2011680" cy="402336"/>
+          </a:xfrm>
+          <a:prstGeom prst="rect">
+            <a:avLst>
+              <a:gd name="adj" fmla="val 13636"/>
+            </a:avLst>
+          </a:prstGeom>
+          <a:solidFill>
+            <a:srgbClr val="EEF2FF"/>
+          </a:solidFill>
+          <a:ln w="12700">
+            <a:solidFill>
+              <a:srgbClr val="6366F1"/>
+            </a:solidFill>
+            <a:prstDash val="solid"/>
+          </a:ln>
+        </p:spPr>
       </p:sp>
       <p:sp>
         <p:nvSpPr>
@@ -34642,8 +35386,8 @@
         </p:nvSpPr>
         <p:spPr>
           <a:xfrm>
-            <a:off x="365760" y="3611880"/>
-            <a:ext cx="1828800" cy="347472"/>
+            <a:off x="4718304" y="4023360"/>
+            <a:ext cx="2011680" cy="402336"/>
           </a:xfrm>
           <a:prstGeom prst="rect">
             <a:avLst/>
@@ -34655,19 +35399,19 @@
           <a:bodyPr wrap="square" lIns="0" tIns="0" rIns="0" bIns="0" rtlCol="0" anchor="ctr"/>
           <a:lstStyle/>
           <a:p>
-            <a:pPr algn="l" indent="0" marL="0">
+            <a:pPr algn="ctr" indent="0" marL="0">
               <a:buNone/>
             </a:pPr>
             <a:r>
               <a:rPr lang="en-US" sz="1200" b="1" dirty="0">
                 <a:solidFill>
-                  <a:srgbClr val="0F172A"/>
+                  <a:srgbClr val="4338CA"/>
                 </a:solidFill>
                 <a:latin typeface="Trebuchet MS" pitchFamily="34" charset="0"/>
                 <a:ea typeface="Trebuchet MS" pitchFamily="34" charset="-122"/>
                 <a:cs typeface="Trebuchet MS" pitchFamily="34" charset="-120"/>
               </a:rPr>
-              <a:t>Sample words:</a:t>
+              <a:t>goes</a:t>
             </a:r>
             <a:endParaRPr lang="en-US" sz="1200" dirty="0"/>
           </a:p>
@@ -34681,7 +35425,7 @@
         </p:nvSpPr>
         <p:spPr>
           <a:xfrm>
-            <a:off x="365760" y="4023360"/>
+            <a:off x="6894576" y="4023360"/>
             <a:ext cx="2011680" cy="402336"/>
           </a:xfrm>
           <a:prstGeom prst="rect">
@@ -34708,7 +35452,7 @@
         </p:nvSpPr>
         <p:spPr>
           <a:xfrm>
-            <a:off x="365760" y="4023360"/>
+            <a:off x="6894576" y="4023360"/>
             <a:ext cx="2011680" cy="402336"/>
           </a:xfrm>
           <a:prstGeom prst="rect">
@@ -34733,7 +35477,7 @@
                 <a:ea typeface="Trebuchet MS" pitchFamily="34" charset="-122"/>
                 <a:cs typeface="Trebuchet MS" pitchFamily="34" charset="-120"/>
               </a:rPr>
-              <a:t>going</a:t>
+              <a:t>goers</a:t>
             </a:r>
             <a:endParaRPr lang="en-US" sz="1200" dirty="0"/>
           </a:p>
@@ -34747,7 +35491,7 @@
         </p:nvSpPr>
         <p:spPr>
           <a:xfrm>
-            <a:off x="2542032" y="4023360"/>
+            <a:off x="365760" y="4498848"/>
             <a:ext cx="2011680" cy="402336"/>
           </a:xfrm>
           <a:prstGeom prst="rect">
@@ -34774,7 +35518,7 @@
         </p:nvSpPr>
         <p:spPr>
           <a:xfrm>
-            <a:off x="2542032" y="4023360"/>
+            <a:off x="365760" y="4498848"/>
             <a:ext cx="2011680" cy="402336"/>
           </a:xfrm>
           <a:prstGeom prst="rect">
@@ -34799,7 +35543,7 @@
                 <a:ea typeface="Trebuchet MS" pitchFamily="34" charset="-122"/>
                 <a:cs typeface="Trebuchet MS" pitchFamily="34" charset="-120"/>
               </a:rPr>
-              <a:t>gone</a:t>
+              <a:t>going</a:t>
             </a:r>
             <a:endParaRPr lang="en-US" sz="1200" dirty="0"/>
           </a:p>
@@ -34813,7 +35557,7 @@
         </p:nvSpPr>
         <p:spPr>
           <a:xfrm>
-            <a:off x="4718304" y="4023360"/>
+            <a:off x="2542032" y="4498848"/>
             <a:ext cx="2011680" cy="402336"/>
           </a:xfrm>
           <a:prstGeom prst="rect">
@@ -34840,7 +35584,7 @@
         </p:nvSpPr>
         <p:spPr>
           <a:xfrm>
-            <a:off x="4718304" y="4023360"/>
+            <a:off x="2542032" y="4498848"/>
             <a:ext cx="2011680" cy="402336"/>
           </a:xfrm>
           <a:prstGeom prst="rect">
@@ -34865,337 +35609,7 @@
                 <a:ea typeface="Trebuchet MS" pitchFamily="34" charset="-122"/>
                 <a:cs typeface="Trebuchet MS" pitchFamily="34" charset="-120"/>
               </a:rPr>
-              <a:t>outgo</a:t>
-            </a:r>
-            <a:endParaRPr lang="en-US" sz="1200" dirty="0"/>
-          </a:p>
-        </p:txBody>
-      </p:sp>
-      <p:sp>
-        <p:nvSpPr>
-          <p:cNvPr id="50" name="Shape 48"/>
-          <p:cNvSpPr/>
-          <p:nvPr/>
-        </p:nvSpPr>
-        <p:spPr>
-          <a:xfrm>
-            <a:off x="6894576" y="4023360"/>
-            <a:ext cx="2011680" cy="402336"/>
-          </a:xfrm>
-          <a:prstGeom prst="rect">
-            <a:avLst>
-              <a:gd name="adj" fmla="val 13636"/>
-            </a:avLst>
-          </a:prstGeom>
-          <a:solidFill>
-            <a:srgbClr val="EEF2FF"/>
-          </a:solidFill>
-          <a:ln w="12700">
-            <a:solidFill>
-              <a:srgbClr val="6366F1"/>
-            </a:solidFill>
-            <a:prstDash val="solid"/>
-          </a:ln>
-        </p:spPr>
-      </p:sp>
-      <p:sp>
-        <p:nvSpPr>
-          <p:cNvPr id="51" name="Text 49"/>
-          <p:cNvSpPr/>
-          <p:nvPr/>
-        </p:nvSpPr>
-        <p:spPr>
-          <a:xfrm>
-            <a:off x="6894576" y="4023360"/>
-            <a:ext cx="2011680" cy="402336"/>
-          </a:xfrm>
-          <a:prstGeom prst="rect">
-            <a:avLst/>
-          </a:prstGeom>
-          <a:noFill/>
-          <a:ln/>
-        </p:spPr>
-        <p:txBody>
-          <a:bodyPr wrap="square" lIns="0" tIns="0" rIns="0" bIns="0" rtlCol="0" anchor="ctr"/>
-          <a:lstStyle/>
-          <a:p>
-            <a:pPr algn="ctr" indent="0" marL="0">
-              <a:buNone/>
-            </a:pPr>
-            <a:r>
-              <a:rPr lang="en-US" sz="1200" b="1" dirty="0">
-                <a:solidFill>
-                  <a:srgbClr val="4338CA"/>
-                </a:solidFill>
-                <a:latin typeface="Trebuchet MS" pitchFamily="34" charset="0"/>
-                <a:ea typeface="Trebuchet MS" pitchFamily="34" charset="-122"/>
-                <a:cs typeface="Trebuchet MS" pitchFamily="34" charset="-120"/>
-              </a:rPr>
-              <a:t>forego</a:t>
-            </a:r>
-            <a:endParaRPr lang="en-US" sz="1200" dirty="0"/>
-          </a:p>
-        </p:txBody>
-      </p:sp>
-      <p:sp>
-        <p:nvSpPr>
-          <p:cNvPr id="52" name="Shape 50"/>
-          <p:cNvSpPr/>
-          <p:nvPr/>
-        </p:nvSpPr>
-        <p:spPr>
-          <a:xfrm>
-            <a:off x="365760" y="4498848"/>
-            <a:ext cx="2011680" cy="402336"/>
-          </a:xfrm>
-          <a:prstGeom prst="rect">
-            <a:avLst>
-              <a:gd name="adj" fmla="val 13636"/>
-            </a:avLst>
-          </a:prstGeom>
-          <a:solidFill>
-            <a:srgbClr val="EEF2FF"/>
-          </a:solidFill>
-          <a:ln w="12700">
-            <a:solidFill>
-              <a:srgbClr val="6366F1"/>
-            </a:solidFill>
-            <a:prstDash val="solid"/>
-          </a:ln>
-        </p:spPr>
-      </p:sp>
-      <p:sp>
-        <p:nvSpPr>
-          <p:cNvPr id="53" name="Text 51"/>
-          <p:cNvSpPr/>
-          <p:nvPr/>
-        </p:nvSpPr>
-        <p:spPr>
-          <a:xfrm>
-            <a:off x="365760" y="4498848"/>
-            <a:ext cx="2011680" cy="402336"/>
-          </a:xfrm>
-          <a:prstGeom prst="rect">
-            <a:avLst/>
-          </a:prstGeom>
-          <a:noFill/>
-          <a:ln/>
-        </p:spPr>
-        <p:txBody>
-          <a:bodyPr wrap="square" lIns="0" tIns="0" rIns="0" bIns="0" rtlCol="0" anchor="ctr"/>
-          <a:lstStyle/>
-          <a:p>
-            <a:pPr algn="ctr" indent="0" marL="0">
-              <a:buNone/>
-            </a:pPr>
-            <a:r>
-              <a:rPr lang="en-US" sz="1200" b="1" dirty="0">
-                <a:solidFill>
-                  <a:srgbClr val="4338CA"/>
-                </a:solidFill>
-                <a:latin typeface="Trebuchet MS" pitchFamily="34" charset="0"/>
-                <a:ea typeface="Trebuchet MS" pitchFamily="34" charset="-122"/>
-                <a:cs typeface="Trebuchet MS" pitchFamily="34" charset="-120"/>
-              </a:rPr>
-              <a:t>undergo</a:t>
-            </a:r>
-            <a:endParaRPr lang="en-US" sz="1200" dirty="0"/>
-          </a:p>
-        </p:txBody>
-      </p:sp>
-      <p:sp>
-        <p:nvSpPr>
-          <p:cNvPr id="54" name="Shape 52"/>
-          <p:cNvSpPr/>
-          <p:nvPr/>
-        </p:nvSpPr>
-        <p:spPr>
-          <a:xfrm>
-            <a:off x="2542032" y="4498848"/>
-            <a:ext cx="2011680" cy="402336"/>
-          </a:xfrm>
-          <a:prstGeom prst="rect">
-            <a:avLst>
-              <a:gd name="adj" fmla="val 13636"/>
-            </a:avLst>
-          </a:prstGeom>
-          <a:solidFill>
-            <a:srgbClr val="EEF2FF"/>
-          </a:solidFill>
-          <a:ln w="12700">
-            <a:solidFill>
-              <a:srgbClr val="6366F1"/>
-            </a:solidFill>
-            <a:prstDash val="solid"/>
-          </a:ln>
-        </p:spPr>
-      </p:sp>
-      <p:sp>
-        <p:nvSpPr>
-          <p:cNvPr id="55" name="Text 53"/>
-          <p:cNvSpPr/>
-          <p:nvPr/>
-        </p:nvSpPr>
-        <p:spPr>
-          <a:xfrm>
-            <a:off x="2542032" y="4498848"/>
-            <a:ext cx="2011680" cy="402336"/>
-          </a:xfrm>
-          <a:prstGeom prst="rect">
-            <a:avLst/>
-          </a:prstGeom>
-          <a:noFill/>
-          <a:ln/>
-        </p:spPr>
-        <p:txBody>
-          <a:bodyPr wrap="square" lIns="0" tIns="0" rIns="0" bIns="0" rtlCol="0" anchor="ctr"/>
-          <a:lstStyle/>
-          <a:p>
-            <a:pPr algn="ctr" indent="0" marL="0">
-              <a:buNone/>
-            </a:pPr>
-            <a:r>
-              <a:rPr lang="en-US" sz="1200" b="1" dirty="0">
-                <a:solidFill>
-                  <a:srgbClr val="4338CA"/>
-                </a:solidFill>
-                <a:latin typeface="Trebuchet MS" pitchFamily="34" charset="0"/>
-                <a:ea typeface="Trebuchet MS" pitchFamily="34" charset="-122"/>
-                <a:cs typeface="Trebuchet MS" pitchFamily="34" charset="-120"/>
-              </a:rPr>
-              <a:t>ago</a:t>
-            </a:r>
-            <a:endParaRPr lang="en-US" sz="1200" dirty="0"/>
-          </a:p>
-        </p:txBody>
-      </p:sp>
-      <p:sp>
-        <p:nvSpPr>
-          <p:cNvPr id="56" name="Shape 54"/>
-          <p:cNvSpPr/>
-          <p:nvPr/>
-        </p:nvSpPr>
-        <p:spPr>
-          <a:xfrm>
-            <a:off x="4718304" y="4498848"/>
-            <a:ext cx="2011680" cy="402336"/>
-          </a:xfrm>
-          <a:prstGeom prst="rect">
-            <a:avLst>
-              <a:gd name="adj" fmla="val 13636"/>
-            </a:avLst>
-          </a:prstGeom>
-          <a:solidFill>
-            <a:srgbClr val="EEF2FF"/>
-          </a:solidFill>
-          <a:ln w="12700">
-            <a:solidFill>
-              <a:srgbClr val="6366F1"/>
-            </a:solidFill>
-            <a:prstDash val="solid"/>
-          </a:ln>
-        </p:spPr>
-      </p:sp>
-      <p:sp>
-        <p:nvSpPr>
-          <p:cNvPr id="57" name="Text 55"/>
-          <p:cNvSpPr/>
-          <p:nvPr/>
-        </p:nvSpPr>
-        <p:spPr>
-          <a:xfrm>
-            <a:off x="4718304" y="4498848"/>
-            <a:ext cx="2011680" cy="402336"/>
-          </a:xfrm>
-          <a:prstGeom prst="rect">
-            <a:avLst/>
-          </a:prstGeom>
-          <a:noFill/>
-          <a:ln/>
-        </p:spPr>
-        <p:txBody>
-          <a:bodyPr wrap="square" lIns="0" tIns="0" rIns="0" bIns="0" rtlCol="0" anchor="ctr"/>
-          <a:lstStyle/>
-          <a:p>
-            <a:pPr algn="ctr" indent="0" marL="0">
-              <a:buNone/>
-            </a:pPr>
-            <a:r>
-              <a:rPr lang="en-US" sz="1200" b="1" dirty="0">
-                <a:solidFill>
-                  <a:srgbClr val="4338CA"/>
-                </a:solidFill>
-                <a:latin typeface="Trebuchet MS" pitchFamily="34" charset="0"/>
-                <a:ea typeface="Trebuchet MS" pitchFamily="34" charset="-122"/>
-                <a:cs typeface="Trebuchet MS" pitchFamily="34" charset="-120"/>
-              </a:rPr>
-              <a:t>ergo</a:t>
-            </a:r>
-            <a:endParaRPr lang="en-US" sz="1200" dirty="0"/>
-          </a:p>
-        </p:txBody>
-      </p:sp>
-      <p:sp>
-        <p:nvSpPr>
-          <p:cNvPr id="58" name="Shape 56"/>
-          <p:cNvSpPr/>
-          <p:nvPr/>
-        </p:nvSpPr>
-        <p:spPr>
-          <a:xfrm>
-            <a:off x="6894576" y="4498848"/>
-            <a:ext cx="2011680" cy="402336"/>
-          </a:xfrm>
-          <a:prstGeom prst="rect">
-            <a:avLst>
-              <a:gd name="adj" fmla="val 13636"/>
-            </a:avLst>
-          </a:prstGeom>
-          <a:solidFill>
-            <a:srgbClr val="EEF2FF"/>
-          </a:solidFill>
-          <a:ln w="12700">
-            <a:solidFill>
-              <a:srgbClr val="6366F1"/>
-            </a:solidFill>
-            <a:prstDash val="solid"/>
-          </a:ln>
-        </p:spPr>
-      </p:sp>
-      <p:sp>
-        <p:nvSpPr>
-          <p:cNvPr id="59" name="Text 57"/>
-          <p:cNvSpPr/>
-          <p:nvPr/>
-        </p:nvSpPr>
-        <p:spPr>
-          <a:xfrm>
-            <a:off x="6894576" y="4498848"/>
-            <a:ext cx="2011680" cy="402336"/>
-          </a:xfrm>
-          <a:prstGeom prst="rect">
-            <a:avLst/>
-          </a:prstGeom>
-          <a:noFill/>
-          <a:ln/>
-        </p:spPr>
-        <p:txBody>
-          <a:bodyPr wrap="square" lIns="0" tIns="0" rIns="0" bIns="0" rtlCol="0" anchor="ctr"/>
-          <a:lstStyle/>
-          <a:p>
-            <a:pPr algn="ctr" indent="0" marL="0">
-              <a:buNone/>
-            </a:pPr>
-            <a:r>
-              <a:rPr lang="en-US" sz="1200" b="1" dirty="0">
-                <a:solidFill>
-                  <a:srgbClr val="4338CA"/>
-                </a:solidFill>
-                <a:latin typeface="Trebuchet MS" pitchFamily="34" charset="0"/>
-                <a:ea typeface="Trebuchet MS" pitchFamily="34" charset="-122"/>
-                <a:cs typeface="Trebuchet MS" pitchFamily="34" charset="-120"/>
-              </a:rPr>
-              <a:t>outgoing</a:t>
+              <a:t>goal</a:t>
             </a:r>
             <a:endParaRPr lang="en-US" sz="1200" dirty="0"/>
           </a:p>
@@ -35487,7 +35901,7 @@
                 <a:ea typeface="Calibri" pitchFamily="34" charset="-122"/>
                 <a:cs typeface="Calibri" pitchFamily="34" charset="-120"/>
               </a:rPr>
-              <a:t>Word Labs  •  wordlabs.app  •  Root: 'go' = to move or travel</a:t>
+              <a:t>Word Labs  •  wordlabs.app  •  Root: 'go' = to move from one place to another</a:t>
             </a:r>
             <a:endParaRPr lang="en-US" sz="800" dirty="0"/>
           </a:p>
@@ -35651,7 +36065,7 @@
                 <a:ea typeface="Calibri" pitchFamily="34" charset="-122"/>
                 <a:cs typeface="Calibri" pitchFamily="34" charset="-120"/>
               </a:rPr>
-              <a:t>The core part of a word carrying its basic meaning. For example, 'go' means 'to move or travel'.</a:t>
+              <a:t>The core part of a word carrying its basic meaning. For example, 'go' means 'to move from one place to another'.</a:t>
             </a:r>
             <a:endParaRPr lang="en-US" sz="1350" dirty="0"/>
           </a:p>
@@ -36271,7 +36685,7 @@
                 <a:ea typeface="Calibri" pitchFamily="34" charset="-122"/>
                 <a:cs typeface="Calibri" pitchFamily="34" charset="-120"/>
               </a:rPr>
-              <a:t>Word Labs  •  wordlabs.app  •  Root: 'go' = to move or travel</a:t>
+              <a:t>Word Labs  •  wordlabs.app  •  Root: 'go' = to move from one place to another</a:t>
             </a:r>
             <a:endParaRPr lang="en-US" sz="800" dirty="0"/>
           </a:p>
@@ -36383,7 +36797,7 @@
                 <a:ea typeface="Calibri" pitchFamily="34" charset="-122"/>
                 <a:cs typeface="Calibri" pitchFamily="34" charset="-120"/>
               </a:rPr>
-              <a:t>1.  The word 'undergo' contains the root 'go' meaning to move or travel.</a:t>
+              <a:t>1.  'go' means 'to move from one place towards another'.</a:t>
             </a:r>
             <a:endParaRPr lang="en-US" sz="1300" dirty="0"/>
           </a:p>
@@ -36522,7 +36936,7 @@
                 <a:ea typeface="Calibri" pitchFamily="34" charset="-122"/>
                 <a:cs typeface="Calibri" pitchFamily="34" charset="-120"/>
               </a:rPr>
-              <a:t>2.  The root 'go' comes from a French word.</a:t>
+              <a:t>2.  'go' means 'to move from one place to another'.</a:t>
             </a:r>
             <a:endParaRPr lang="en-US" sz="1300" dirty="0"/>
           </a:p>
@@ -36545,11 +36959,11 @@
             </a:avLst>
           </a:prstGeom>
           <a:solidFill>
-            <a:srgbClr val="FEE2E2"/>
-          </a:solidFill>
-          <a:ln w="12700">
-            <a:solidFill>
-              <a:srgbClr val="DC2626"/>
+            <a:srgbClr val="DCFCE7"/>
+          </a:solidFill>
+          <a:ln w="12700">
+            <a:solidFill>
+              <a:srgbClr val="16A34A"/>
             </a:solidFill>
             <a:prstDash val="solid"/>
           </a:ln>
@@ -36582,13 +36996,13 @@
             <a:r>
               <a:rPr lang="en-US" sz="1100" b="1" dirty="0">
                 <a:solidFill>
-                  <a:srgbClr val="DC2626"/>
+                  <a:srgbClr val="16A34A"/>
                 </a:solidFill>
                 <a:latin typeface="Trebuchet MS" pitchFamily="34" charset="0"/>
                 <a:ea typeface="Trebuchet MS" pitchFamily="34" charset="-122"/>
                 <a:cs typeface="Trebuchet MS" pitchFamily="34" charset="-120"/>
               </a:rPr>
-              <a:t>FALSE</a:t>
+              <a:t>TRUE</a:t>
             </a:r>
             <a:endParaRPr lang="en-US" sz="1100" dirty="0"/>
           </a:p>
@@ -36661,7 +37075,7 @@
                 <a:ea typeface="Calibri" pitchFamily="34" charset="-122"/>
                 <a:cs typeface="Calibri" pitchFamily="34" charset="-120"/>
               </a:rPr>
-              <a:t>3.  The word 'outgoing' uses both a prefix and a suffix added to the root 'go'.</a:t>
+              <a:t>3.  'go' means 'to sit completely still without moving'.</a:t>
             </a:r>
             <a:endParaRPr lang="en-US" sz="1300" dirty="0"/>
           </a:p>
@@ -36684,11 +37098,11 @@
             </a:avLst>
           </a:prstGeom>
           <a:solidFill>
-            <a:srgbClr val="DCFCE7"/>
-          </a:solidFill>
-          <a:ln w="12700">
-            <a:solidFill>
-              <a:srgbClr val="16A34A"/>
+            <a:srgbClr val="FEE2E2"/>
+          </a:solidFill>
+          <a:ln w="12700">
+            <a:solidFill>
+              <a:srgbClr val="DC2626"/>
             </a:solidFill>
             <a:prstDash val="solid"/>
           </a:ln>
@@ -36721,13 +37135,13 @@
             <a:r>
               <a:rPr lang="en-US" sz="1100" b="1" dirty="0">
                 <a:solidFill>
-                  <a:srgbClr val="16A34A"/>
+                  <a:srgbClr val="DC2626"/>
                 </a:solidFill>
                 <a:latin typeface="Trebuchet MS" pitchFamily="34" charset="0"/>
                 <a:ea typeface="Trebuchet MS" pitchFamily="34" charset="-122"/>
                 <a:cs typeface="Trebuchet MS" pitchFamily="34" charset="-120"/>
               </a:rPr>
-              <a:t>TRUE</a:t>
+              <a:t>FALSE</a:t>
             </a:r>
             <a:endParaRPr lang="en-US" sz="1100" dirty="0"/>
           </a:p>
@@ -36800,7 +37214,7 @@
                 <a:ea typeface="Calibri" pitchFamily="34" charset="-122"/>
                 <a:cs typeface="Calibri" pitchFamily="34" charset="-120"/>
               </a:rPr>
-              <a:t>4.  The word 'forego' means to go before or ahead of something.</a:t>
+              <a:t>4.  'goer' means 'a person who attends or goes to a particular place or event regularly'.</a:t>
             </a:r>
             <a:endParaRPr lang="en-US" sz="1300" dirty="0"/>
           </a:p>
@@ -36939,7 +37353,7 @@
                 <a:ea typeface="Calibri" pitchFamily="34" charset="-122"/>
                 <a:cs typeface="Calibri" pitchFamily="34" charset="-120"/>
               </a:rPr>
-              <a:t>5.  The prefix 'under' in 'undergo' means above or over.</a:t>
+              <a:t>5.  'goer' means 'a tool used for cutting wood'.</a:t>
             </a:r>
             <a:endParaRPr lang="en-US" sz="1300" dirty="0"/>
           </a:p>
@@ -37297,7 +37711,7 @@
                 <a:ea typeface="Calibri" pitchFamily="34" charset="-122"/>
                 <a:cs typeface="Calibri" pitchFamily="34" charset="-120"/>
               </a:rPr>
-              <a:t>Word Labs  •  wordlabs.app  •  Root: 'go' = to move or travel</a:t>
+              <a:t>Word Labs  •  wordlabs.app  •  Root: 'go' = to move from one place to another</a:t>
             </a:r>
             <a:endParaRPr lang="en-US" sz="800" dirty="0"/>
           </a:p>
@@ -37434,7 +37848,7 @@
                 <a:ea typeface="Trebuchet MS" pitchFamily="34" charset="-122"/>
                 <a:cs typeface="Trebuchet MS" pitchFamily="34" charset="-120"/>
               </a:rPr>
-              <a:t>to move or travel</a:t>
+              <a:t>to move from one place to another</a:t>
             </a:r>
             <a:endParaRPr lang="en-US" sz="2000" dirty="0"/>
           </a:p>
@@ -37473,7 +37887,7 @@
                 <a:ea typeface="Calibri" pitchFamily="34" charset="-122"/>
                 <a:cs typeface="Calibri" pitchFamily="34" charset="-120"/>
               </a:rPr>
-              <a:t>Origin: Latin: ire</a:t>
+              <a:t>Origin: Anglo-Saxon (Old English) root</a:t>
             </a:r>
             <a:endParaRPr lang="en-US" sz="1100" dirty="0"/>
           </a:p>
@@ -37578,7 +37992,7 @@
                 <a:ea typeface="Trebuchet MS" pitchFamily="34" charset="-122"/>
                 <a:cs typeface="Trebuchet MS" pitchFamily="34" charset="-120"/>
               </a:rPr>
-              <a:t>going</a:t>
+              <a:t>go</a:t>
             </a:r>
             <a:endParaRPr lang="en-US" sz="1300" dirty="0"/>
           </a:p>
@@ -37644,7 +38058,7 @@
                 <a:ea typeface="Trebuchet MS" pitchFamily="34" charset="-122"/>
                 <a:cs typeface="Trebuchet MS" pitchFamily="34" charset="-120"/>
               </a:rPr>
-              <a:t>gone</a:t>
+              <a:t>goer</a:t>
             </a:r>
             <a:endParaRPr lang="en-US" sz="1300" dirty="0"/>
           </a:p>
@@ -37710,7 +38124,7 @@
                 <a:ea typeface="Trebuchet MS" pitchFamily="34" charset="-122"/>
                 <a:cs typeface="Trebuchet MS" pitchFamily="34" charset="-120"/>
               </a:rPr>
-              <a:t>outgo</a:t>
+              <a:t>goes</a:t>
             </a:r>
             <a:endParaRPr lang="en-US" sz="1300" dirty="0"/>
           </a:p>
@@ -37776,7 +38190,7 @@
                 <a:ea typeface="Trebuchet MS" pitchFamily="34" charset="-122"/>
                 <a:cs typeface="Trebuchet MS" pitchFamily="34" charset="-120"/>
               </a:rPr>
-              <a:t>forego</a:t>
+              <a:t>goers</a:t>
             </a:r>
             <a:endParaRPr lang="en-US" sz="1300" dirty="0"/>
           </a:p>
@@ -37842,7 +38256,7 @@
                 <a:ea typeface="Trebuchet MS" pitchFamily="34" charset="-122"/>
                 <a:cs typeface="Trebuchet MS" pitchFamily="34" charset="-120"/>
               </a:rPr>
-              <a:t>undergo</a:t>
+              <a:t>going</a:t>
             </a:r>
             <a:endParaRPr lang="en-US" sz="1300" dirty="0"/>
           </a:p>
@@ -37908,73 +38322,7 @@
                 <a:ea typeface="Trebuchet MS" pitchFamily="34" charset="-122"/>
                 <a:cs typeface="Trebuchet MS" pitchFamily="34" charset="-120"/>
               </a:rPr>
-              <a:t>ago</a:t>
-            </a:r>
-            <a:endParaRPr lang="en-US" sz="1300" dirty="0"/>
-          </a:p>
-        </p:txBody>
-      </p:sp>
-      <p:sp>
-        <p:nvSpPr>
-          <p:cNvPr id="28" name="Shape 26"/>
-          <p:cNvSpPr/>
-          <p:nvPr/>
-        </p:nvSpPr>
-        <p:spPr>
-          <a:xfrm>
-            <a:off x="4663440" y="3401568"/>
-            <a:ext cx="2011680" cy="502920"/>
-          </a:xfrm>
-          <a:prstGeom prst="rect">
-            <a:avLst>
-              <a:gd name="adj" fmla="val 14545"/>
-            </a:avLst>
-          </a:prstGeom>
-          <a:solidFill>
-            <a:srgbClr val="EEF2FF"/>
-          </a:solidFill>
-          <a:ln w="12700">
-            <a:solidFill>
-              <a:srgbClr val="6366F1"/>
-            </a:solidFill>
-            <a:prstDash val="solid"/>
-          </a:ln>
-        </p:spPr>
-      </p:sp>
-      <p:sp>
-        <p:nvSpPr>
-          <p:cNvPr id="29" name="Text 27"/>
-          <p:cNvSpPr/>
-          <p:nvPr/>
-        </p:nvSpPr>
-        <p:spPr>
-          <a:xfrm>
-            <a:off x="4663440" y="3401568"/>
-            <a:ext cx="2011680" cy="502920"/>
-          </a:xfrm>
-          <a:prstGeom prst="rect">
-            <a:avLst/>
-          </a:prstGeom>
-          <a:noFill/>
-          <a:ln/>
-        </p:spPr>
-        <p:txBody>
-          <a:bodyPr wrap="square" lIns="0" tIns="0" rIns="0" bIns="0" rtlCol="0" anchor="ctr"/>
-          <a:lstStyle/>
-          <a:p>
-            <a:pPr algn="ctr" indent="0" marL="0">
-              <a:buNone/>
-            </a:pPr>
-            <a:r>
-              <a:rPr lang="en-US" sz="1300" b="1" dirty="0">
-                <a:solidFill>
-                  <a:srgbClr val="4338CA"/>
-                </a:solidFill>
-                <a:latin typeface="Trebuchet MS" pitchFamily="34" charset="0"/>
-                <a:ea typeface="Trebuchet MS" pitchFamily="34" charset="-122"/>
-                <a:cs typeface="Trebuchet MS" pitchFamily="34" charset="-120"/>
-              </a:rPr>
-              <a:t>ergo</a:t>
+              <a:t>goal</a:t>
             </a:r>
             <a:endParaRPr lang="en-US" sz="1300" dirty="0"/>
           </a:p>
@@ -38266,7 +38614,7 @@
                 <a:ea typeface="Calibri" pitchFamily="34" charset="-122"/>
                 <a:cs typeface="Calibri" pitchFamily="34" charset="-120"/>
               </a:rPr>
-              <a:t>Word Labs  •  wordlabs.app  •  Root: 'go' = to move or travel</a:t>
+              <a:t>Word Labs  •  wordlabs.app  •  Root: 'go' = to move from one place to another</a:t>
             </a:r>
             <a:endParaRPr lang="en-US" sz="800" dirty="0"/>
           </a:p>
@@ -38567,7 +38915,7 @@
                 <a:ea typeface="Trebuchet MS" pitchFamily="34" charset="-122"/>
                 <a:cs typeface="Trebuchet MS" pitchFamily="34" charset="-120"/>
               </a:rPr>
-              <a:t>a-</a:t>
+              <a:t>con-</a:t>
             </a:r>
             <a:endParaRPr lang="en-US" sz="1300" dirty="0"/>
           </a:p>
@@ -38848,7 +39196,7 @@
                 <a:ea typeface="Trebuchet MS" pitchFamily="34" charset="-122"/>
                 <a:cs typeface="Trebuchet MS" pitchFamily="34" charset="-120"/>
               </a:rPr>
-              <a:t>-ne</a:t>
+              <a:t>-al</a:t>
             </a:r>
             <a:endParaRPr lang="en-US" sz="1300" dirty="0"/>
           </a:p>
@@ -38912,7 +39260,7 @@
                 <a:ea typeface="Trebuchet MS" pitchFamily="34" charset="-122"/>
                 <a:cs typeface="Trebuchet MS" pitchFamily="34" charset="-120"/>
               </a:rPr>
-              <a:t>out-</a:t>
+              <a:t>under-</a:t>
             </a:r>
             <a:endParaRPr lang="en-US" sz="1300" dirty="0"/>
           </a:p>
@@ -39001,7 +39349,7 @@
                 <a:ea typeface="Trebuchet MS" pitchFamily="34" charset="-122"/>
                 <a:cs typeface="Trebuchet MS" pitchFamily="34" charset="-120"/>
               </a:rPr>
-              <a:t>-al</a:t>
+              <a:t>-er</a:t>
             </a:r>
             <a:endParaRPr lang="en-US" sz="1300" dirty="0"/>
           </a:p>
@@ -39022,7 +39370,7 @@
             <a:avLst/>
           </a:prstGeom>
           <a:solidFill>
-            <a:srgbClr val="DDD6FE"/>
+            <a:srgbClr val="F1F5F9"/>
           </a:solidFill>
           <a:ln w="12700">
             <a:solidFill>
@@ -39034,18 +39382,68 @@
       </p:sp>
       <p:sp>
         <p:nvSpPr>
-          <p:cNvPr id="34" name="Text 32"/>
-          <p:cNvSpPr/>
-          <p:nvPr/>
-        </p:nvSpPr>
-        <p:spPr>
-          <a:xfrm>
-            <a:off x="640080" y="3127248"/>
+          <p:cNvPr id="34" name="Shape 32"/>
+          <p:cNvSpPr/>
+          <p:nvPr/>
+        </p:nvSpPr>
+        <p:spPr>
+          <a:xfrm>
+            <a:off x="3291840" y="3127248"/>
+            <a:ext cx="1645920" cy="420624"/>
+          </a:xfrm>
+          <a:prstGeom prst="rect">
+            <a:avLst/>
+          </a:prstGeom>
+          <a:solidFill>
+            <a:srgbClr val="F1F5F9"/>
+          </a:solidFill>
+          <a:ln w="12700">
+            <a:solidFill>
+              <a:srgbClr val="E5E7EB"/>
+            </a:solidFill>
+            <a:prstDash val="solid"/>
+          </a:ln>
+        </p:spPr>
+      </p:sp>
+      <p:sp>
+        <p:nvSpPr>
+          <p:cNvPr id="35" name="Shape 33"/>
+          <p:cNvSpPr/>
+          <p:nvPr/>
+        </p:nvSpPr>
+        <p:spPr>
+          <a:xfrm>
+            <a:off x="5943600" y="3127248"/>
             <a:ext cx="1463040" cy="420624"/>
           </a:xfrm>
           <a:prstGeom prst="rect">
             <a:avLst/>
           </a:prstGeom>
+          <a:solidFill>
+            <a:srgbClr val="FCE7F3"/>
+          </a:solidFill>
+          <a:ln w="12700">
+            <a:solidFill>
+              <a:srgbClr val="E5E7EB"/>
+            </a:solidFill>
+            <a:prstDash val="solid"/>
+          </a:ln>
+        </p:spPr>
+      </p:sp>
+      <p:sp>
+        <p:nvSpPr>
+          <p:cNvPr id="36" name="Text 34"/>
+          <p:cNvSpPr/>
+          <p:nvPr/>
+        </p:nvSpPr>
+        <p:spPr>
+          <a:xfrm>
+            <a:off x="5943600" y="3127248"/>
+            <a:ext cx="1463040" cy="420624"/>
+          </a:xfrm>
+          <a:prstGeom prst="rect">
+            <a:avLst/>
+          </a:prstGeom>
           <a:noFill/>
           <a:ln/>
         </p:spPr>
@@ -39059,13 +39457,13 @@
             <a:r>
               <a:rPr lang="en-US" sz="1300" b="1" dirty="0">
                 <a:solidFill>
-                  <a:srgbClr val="4C1D95"/>
+                  <a:srgbClr val="9D174D"/>
                 </a:solidFill>
                 <a:latin typeface="Trebuchet MS" pitchFamily="34" charset="0"/>
                 <a:ea typeface="Trebuchet MS" pitchFamily="34" charset="-122"/>
                 <a:cs typeface="Trebuchet MS" pitchFamily="34" charset="-120"/>
               </a:rPr>
-              <a:t>under-</a:t>
+              <a:t>-es</a:t>
             </a:r>
             <a:endParaRPr lang="en-US" sz="1300" dirty="0"/>
           </a:p>
@@ -39073,255 +39471,13 @@
       </p:sp>
       <p:sp>
         <p:nvSpPr>
-          <p:cNvPr id="35" name="Shape 33"/>
-          <p:cNvSpPr/>
-          <p:nvPr/>
-        </p:nvSpPr>
-        <p:spPr>
-          <a:xfrm>
-            <a:off x="3291840" y="3127248"/>
-            <a:ext cx="1645920" cy="420624"/>
-          </a:xfrm>
-          <a:prstGeom prst="rect">
-            <a:avLst/>
-          </a:prstGeom>
-          <a:solidFill>
-            <a:srgbClr val="F1F5F9"/>
-          </a:solidFill>
-          <a:ln w="12700">
-            <a:solidFill>
-              <a:srgbClr val="E5E7EB"/>
-            </a:solidFill>
-            <a:prstDash val="solid"/>
-          </a:ln>
-        </p:spPr>
-      </p:sp>
-      <p:sp>
-        <p:nvSpPr>
-          <p:cNvPr id="36" name="Shape 34"/>
-          <p:cNvSpPr/>
-          <p:nvPr/>
-        </p:nvSpPr>
-        <p:spPr>
-          <a:xfrm>
-            <a:off x="5943600" y="3127248"/>
-            <a:ext cx="1463040" cy="420624"/>
-          </a:xfrm>
-          <a:prstGeom prst="rect">
-            <a:avLst/>
-          </a:prstGeom>
-          <a:solidFill>
-            <a:srgbClr val="FCE7F3"/>
-          </a:solidFill>
-          <a:ln w="12700">
-            <a:solidFill>
-              <a:srgbClr val="E5E7EB"/>
-            </a:solidFill>
-            <a:prstDash val="solid"/>
-          </a:ln>
-        </p:spPr>
-      </p:sp>
-      <p:sp>
-        <p:nvSpPr>
           <p:cNvPr id="37" name="Text 35"/>
           <p:cNvSpPr/>
           <p:nvPr/>
         </p:nvSpPr>
         <p:spPr>
           <a:xfrm>
-            <a:off x="5943600" y="3127248"/>
-            <a:ext cx="1463040" cy="420624"/>
-          </a:xfrm>
-          <a:prstGeom prst="rect">
-            <a:avLst/>
-          </a:prstGeom>
-          <a:noFill/>
-          <a:ln/>
-        </p:spPr>
-        <p:txBody>
-          <a:bodyPr wrap="square" lIns="0" tIns="0" rIns="0" bIns="0" rtlCol="0" anchor="ctr"/>
-          <a:lstStyle/>
-          <a:p>
-            <a:pPr algn="ctr" indent="0" marL="0">
-              <a:buNone/>
-            </a:pPr>
-            <a:r>
-              <a:rPr lang="en-US" sz="1300" b="1" dirty="0">
-                <a:solidFill>
-                  <a:srgbClr val="9D174D"/>
-                </a:solidFill>
-                <a:latin typeface="Trebuchet MS" pitchFamily="34" charset="0"/>
-                <a:ea typeface="Trebuchet MS" pitchFamily="34" charset="-122"/>
-                <a:cs typeface="Trebuchet MS" pitchFamily="34" charset="-120"/>
-              </a:rPr>
-              <a:t>-er</a:t>
-            </a:r>
-            <a:endParaRPr lang="en-US" sz="1300" dirty="0"/>
-          </a:p>
-        </p:txBody>
-      </p:sp>
-      <p:sp>
-        <p:nvSpPr>
-          <p:cNvPr id="38" name="Shape 36"/>
-          <p:cNvSpPr/>
-          <p:nvPr/>
-        </p:nvSpPr>
-        <p:spPr>
-          <a:xfrm>
-            <a:off x="640080" y="3584448"/>
-            <a:ext cx="1463040" cy="420624"/>
-          </a:xfrm>
-          <a:prstGeom prst="rect">
-            <a:avLst/>
-          </a:prstGeom>
-          <a:solidFill>
-            <a:srgbClr val="DDD6FE"/>
-          </a:solidFill>
-          <a:ln w="12700">
-            <a:solidFill>
-              <a:srgbClr val="E5E7EB"/>
-            </a:solidFill>
-            <a:prstDash val="solid"/>
-          </a:ln>
-        </p:spPr>
-      </p:sp>
-      <p:sp>
-        <p:nvSpPr>
-          <p:cNvPr id="39" name="Text 37"/>
-          <p:cNvSpPr/>
-          <p:nvPr/>
-        </p:nvSpPr>
-        <p:spPr>
-          <a:xfrm>
-            <a:off x="640080" y="3584448"/>
-            <a:ext cx="1463040" cy="420624"/>
-          </a:xfrm>
-          <a:prstGeom prst="rect">
-            <a:avLst/>
-          </a:prstGeom>
-          <a:noFill/>
-          <a:ln/>
-        </p:spPr>
-        <p:txBody>
-          <a:bodyPr wrap="square" lIns="0" tIns="0" rIns="0" bIns="0" rtlCol="0" anchor="ctr"/>
-          <a:lstStyle/>
-          <a:p>
-            <a:pPr algn="ctr" indent="0" marL="0">
-              <a:buNone/>
-            </a:pPr>
-            <a:r>
-              <a:rPr lang="en-US" sz="1300" b="1" dirty="0">
-                <a:solidFill>
-                  <a:srgbClr val="4C1D95"/>
-                </a:solidFill>
-                <a:latin typeface="Trebuchet MS" pitchFamily="34" charset="0"/>
-                <a:ea typeface="Trebuchet MS" pitchFamily="34" charset="-122"/>
-                <a:cs typeface="Trebuchet MS" pitchFamily="34" charset="-120"/>
-              </a:rPr>
-              <a:t>er-</a:t>
-            </a:r>
-            <a:endParaRPr lang="en-US" sz="1300" dirty="0"/>
-          </a:p>
-        </p:txBody>
-      </p:sp>
-      <p:sp>
-        <p:nvSpPr>
-          <p:cNvPr id="40" name="Shape 38"/>
-          <p:cNvSpPr/>
-          <p:nvPr/>
-        </p:nvSpPr>
-        <p:spPr>
-          <a:xfrm>
-            <a:off x="3291840" y="3584448"/>
-            <a:ext cx="1645920" cy="420624"/>
-          </a:xfrm>
-          <a:prstGeom prst="rect">
-            <a:avLst/>
-          </a:prstGeom>
-          <a:solidFill>
-            <a:srgbClr val="F8FAFC"/>
-          </a:solidFill>
-          <a:ln w="12700">
-            <a:solidFill>
-              <a:srgbClr val="E5E7EB"/>
-            </a:solidFill>
-            <a:prstDash val="solid"/>
-          </a:ln>
-        </p:spPr>
-      </p:sp>
-      <p:sp>
-        <p:nvSpPr>
-          <p:cNvPr id="41" name="Shape 39"/>
-          <p:cNvSpPr/>
-          <p:nvPr/>
-        </p:nvSpPr>
-        <p:spPr>
-          <a:xfrm>
-            <a:off x="5943600" y="3584448"/>
-            <a:ext cx="1463040" cy="420624"/>
-          </a:xfrm>
-          <a:prstGeom prst="rect">
-            <a:avLst/>
-          </a:prstGeom>
-          <a:solidFill>
-            <a:srgbClr val="FCE7F3"/>
-          </a:solidFill>
-          <a:ln w="12700">
-            <a:solidFill>
-              <a:srgbClr val="E5E7EB"/>
-            </a:solidFill>
-            <a:prstDash val="solid"/>
-          </a:ln>
-        </p:spPr>
-      </p:sp>
-      <p:sp>
-        <p:nvSpPr>
-          <p:cNvPr id="42" name="Text 40"/>
-          <p:cNvSpPr/>
-          <p:nvPr/>
-        </p:nvSpPr>
-        <p:spPr>
-          <a:xfrm>
-            <a:off x="5943600" y="3584448"/>
-            <a:ext cx="1463040" cy="420624"/>
-          </a:xfrm>
-          <a:prstGeom prst="rect">
-            <a:avLst/>
-          </a:prstGeom>
-          <a:noFill/>
-          <a:ln/>
-        </p:spPr>
-        <p:txBody>
-          <a:bodyPr wrap="square" lIns="0" tIns="0" rIns="0" bIns="0" rtlCol="0" anchor="ctr"/>
-          <a:lstStyle/>
-          <a:p>
-            <a:pPr algn="ctr" indent="0" marL="0">
-              <a:buNone/>
-            </a:pPr>
-            <a:r>
-              <a:rPr lang="en-US" sz="1300" b="1" dirty="0">
-                <a:solidFill>
-                  <a:srgbClr val="9D174D"/>
-                </a:solidFill>
-                <a:latin typeface="Trebuchet MS" pitchFamily="34" charset="0"/>
-                <a:ea typeface="Trebuchet MS" pitchFamily="34" charset="-122"/>
-                <a:cs typeface="Trebuchet MS" pitchFamily="34" charset="-120"/>
-              </a:rPr>
-              <a:t>-es</a:t>
-            </a:r>
-            <a:endParaRPr lang="en-US" sz="1300" dirty="0"/>
-          </a:p>
-        </p:txBody>
-      </p:sp>
-      <p:sp>
-        <p:nvSpPr>
-          <p:cNvPr id="43" name="Text 41"/>
-          <p:cNvSpPr/>
-          <p:nvPr/>
-        </p:nvSpPr>
-        <p:spPr>
-          <a:xfrm>
-            <a:off x="365760" y="4178808"/>
+            <a:off x="365760" y="3721608"/>
             <a:ext cx="1097280" cy="420624"/>
           </a:xfrm>
           <a:prstGeom prst="rect">
@@ -39354,14 +39510,14 @@
       </p:sp>
       <p:sp>
         <p:nvSpPr>
-          <p:cNvPr id="44" name="Shape 42"/>
-          <p:cNvSpPr/>
-          <p:nvPr/>
-        </p:nvSpPr>
-        <p:spPr>
-          <a:xfrm>
-            <a:off x="1508760" y="4178808"/>
-            <a:ext cx="822960" cy="420624"/>
+          <p:cNvPr id="38" name="Shape 36"/>
+          <p:cNvSpPr/>
+          <p:nvPr/>
+        </p:nvSpPr>
+        <p:spPr>
+          <a:xfrm>
+            <a:off x="1508760" y="3721608"/>
+            <a:ext cx="950976" cy="420624"/>
           </a:xfrm>
           <a:prstGeom prst="rect">
             <a:avLst>
@@ -39388,14 +39544,14 @@
       </p:sp>
       <p:sp>
         <p:nvSpPr>
-          <p:cNvPr id="45" name="Text 43"/>
-          <p:cNvSpPr/>
-          <p:nvPr/>
-        </p:nvSpPr>
-        <p:spPr>
-          <a:xfrm>
-            <a:off x="1508760" y="4178808"/>
-            <a:ext cx="822960" cy="420624"/>
+          <p:cNvPr id="39" name="Text 37"/>
+          <p:cNvSpPr/>
+          <p:nvPr/>
+        </p:nvSpPr>
+        <p:spPr>
+          <a:xfrm>
+            <a:off x="1508760" y="3721608"/>
+            <a:ext cx="950976" cy="420624"/>
           </a:xfrm>
           <a:prstGeom prst="rect">
             <a:avLst/>
@@ -39419,7 +39575,7 @@
                 <a:ea typeface="Trebuchet MS" pitchFamily="34" charset="-122"/>
                 <a:cs typeface="Trebuchet MS" pitchFamily="34" charset="-120"/>
               </a:rPr>
-              <a:t>a-</a:t>
+              <a:t>con-</a:t>
             </a:r>
             <a:endParaRPr lang="en-US" sz="1300" dirty="0"/>
           </a:p>
@@ -39427,13 +39583,13 @@
       </p:sp>
       <p:sp>
         <p:nvSpPr>
-          <p:cNvPr id="46" name="Text 44"/>
-          <p:cNvSpPr/>
-          <p:nvPr/>
-        </p:nvSpPr>
-        <p:spPr>
-          <a:xfrm>
-            <a:off x="2359152" y="4178808"/>
+          <p:cNvPr id="40" name="Text 38"/>
+          <p:cNvSpPr/>
+          <p:nvPr/>
+        </p:nvSpPr>
+        <p:spPr>
+          <a:xfrm>
+            <a:off x="2487168" y="3721608"/>
             <a:ext cx="320040" cy="420624"/>
           </a:xfrm>
           <a:prstGeom prst="rect">
@@ -39466,13 +39622,13 @@
       </p:sp>
       <p:sp>
         <p:nvSpPr>
-          <p:cNvPr id="47" name="Shape 45"/>
-          <p:cNvSpPr/>
-          <p:nvPr/>
-        </p:nvSpPr>
-        <p:spPr>
-          <a:xfrm>
-            <a:off x="2706624" y="4178808"/>
+          <p:cNvPr id="41" name="Shape 39"/>
+          <p:cNvSpPr/>
+          <p:nvPr/>
+        </p:nvSpPr>
+        <p:spPr>
+          <a:xfrm>
+            <a:off x="2834640" y="3721608"/>
             <a:ext cx="950976" cy="420624"/>
           </a:xfrm>
           <a:prstGeom prst="rect">
@@ -39500,13 +39656,13 @@
       </p:sp>
       <p:sp>
         <p:nvSpPr>
-          <p:cNvPr id="48" name="Text 46"/>
-          <p:cNvSpPr/>
-          <p:nvPr/>
-        </p:nvSpPr>
-        <p:spPr>
-          <a:xfrm>
-            <a:off x="2706624" y="4178808"/>
+          <p:cNvPr id="42" name="Text 40"/>
+          <p:cNvSpPr/>
+          <p:nvPr/>
+        </p:nvSpPr>
+        <p:spPr>
+          <a:xfrm>
+            <a:off x="2834640" y="3721608"/>
             <a:ext cx="950976" cy="420624"/>
           </a:xfrm>
           <a:prstGeom prst="rect">
@@ -39539,13 +39695,13 @@
       </p:sp>
       <p:sp>
         <p:nvSpPr>
-          <p:cNvPr id="49" name="Text 47"/>
-          <p:cNvSpPr/>
-          <p:nvPr/>
-        </p:nvSpPr>
-        <p:spPr>
-          <a:xfrm>
-            <a:off x="3685032" y="4178808"/>
+          <p:cNvPr id="43" name="Text 41"/>
+          <p:cNvSpPr/>
+          <p:nvPr/>
+        </p:nvSpPr>
+        <p:spPr>
+          <a:xfrm>
+            <a:off x="3813048" y="3721608"/>
             <a:ext cx="320040" cy="420624"/>
           </a:xfrm>
           <a:prstGeom prst="rect">
@@ -39578,13 +39734,13 @@
       </p:sp>
       <p:sp>
         <p:nvSpPr>
-          <p:cNvPr id="50" name="Shape 48"/>
-          <p:cNvSpPr/>
-          <p:nvPr/>
-        </p:nvSpPr>
-        <p:spPr>
-          <a:xfrm>
-            <a:off x="4032504" y="4178808"/>
+          <p:cNvPr id="44" name="Shape 42"/>
+          <p:cNvSpPr/>
+          <p:nvPr/>
+        </p:nvSpPr>
+        <p:spPr>
+          <a:xfrm>
+            <a:off x="4160520" y="3721608"/>
             <a:ext cx="950976" cy="420624"/>
           </a:xfrm>
           <a:prstGeom prst="rect">
@@ -39612,13 +39768,13 @@
       </p:sp>
       <p:sp>
         <p:nvSpPr>
-          <p:cNvPr id="51" name="Text 49"/>
-          <p:cNvSpPr/>
-          <p:nvPr/>
-        </p:nvSpPr>
-        <p:spPr>
-          <a:xfrm>
-            <a:off x="4032504" y="4178808"/>
+          <p:cNvPr id="45" name="Text 43"/>
+          <p:cNvSpPr/>
+          <p:nvPr/>
+        </p:nvSpPr>
+        <p:spPr>
+          <a:xfrm>
+            <a:off x="4160520" y="3721608"/>
             <a:ext cx="950976" cy="420624"/>
           </a:xfrm>
           <a:prstGeom prst="rect">
@@ -39651,13 +39807,13 @@
       </p:sp>
       <p:sp>
         <p:nvSpPr>
-          <p:cNvPr id="52" name="Text 50"/>
-          <p:cNvSpPr/>
-          <p:nvPr/>
-        </p:nvSpPr>
-        <p:spPr>
-          <a:xfrm>
-            <a:off x="5056632" y="4178808"/>
+          <p:cNvPr id="46" name="Text 44"/>
+          <p:cNvSpPr/>
+          <p:nvPr/>
+        </p:nvSpPr>
+        <p:spPr>
+          <a:xfrm>
+            <a:off x="5184648" y="3721608"/>
             <a:ext cx="365760" cy="420624"/>
           </a:xfrm>
           <a:prstGeom prst="rect">
@@ -39690,13 +39846,13 @@
       </p:sp>
       <p:sp>
         <p:nvSpPr>
-          <p:cNvPr id="53" name="Shape 51"/>
-          <p:cNvSpPr/>
-          <p:nvPr/>
-        </p:nvSpPr>
-        <p:spPr>
-          <a:xfrm>
-            <a:off x="5468112" y="4178808"/>
+          <p:cNvPr id="47" name="Shape 45"/>
+          <p:cNvSpPr/>
+          <p:nvPr/>
+        </p:nvSpPr>
+        <p:spPr>
+          <a:xfrm>
+            <a:off x="5596128" y="3721608"/>
             <a:ext cx="2194560" cy="420624"/>
           </a:xfrm>
           <a:prstGeom prst="rect">
@@ -39717,13 +39873,13 @@
       </p:sp>
       <p:sp>
         <p:nvSpPr>
-          <p:cNvPr id="54" name="Text 52"/>
-          <p:cNvSpPr/>
-          <p:nvPr/>
-        </p:nvSpPr>
-        <p:spPr>
-          <a:xfrm>
-            <a:off x="5468112" y="4178808"/>
+          <p:cNvPr id="48" name="Text 46"/>
+          <p:cNvSpPr/>
+          <p:nvPr/>
+        </p:nvSpPr>
+        <p:spPr>
+          <a:xfrm>
+            <a:off x="5596128" y="3721608"/>
             <a:ext cx="2194560" cy="420624"/>
           </a:xfrm>
           <a:prstGeom prst="rect">
@@ -39748,7 +39904,7 @@
                 <a:ea typeface="Trebuchet MS" pitchFamily="34" charset="-122"/>
                 <a:cs typeface="Trebuchet MS" pitchFamily="34" charset="-120"/>
               </a:rPr>
-              <a:t>going</a:t>
+              <a:t>go</a:t>
             </a:r>
             <a:endParaRPr lang="en-US" sz="1400" dirty="0"/>
           </a:p>
@@ -40040,7 +40196,7 @@
                 <a:ea typeface="Calibri" pitchFamily="34" charset="-122"/>
                 <a:cs typeface="Calibri" pitchFamily="34" charset="-120"/>
               </a:rPr>
-              <a:t>Word Labs  •  wordlabs.app  •  Root: 'go' = to move or travel</a:t>
+              <a:t>Word Labs  •  wordlabs.app  •  Root: 'go' = to move from one place to another</a:t>
             </a:r>
             <a:endParaRPr lang="en-US" sz="800" dirty="0"/>
           </a:p>
@@ -40152,7 +40308,7 @@
                 <a:ea typeface="Trebuchet MS" pitchFamily="34" charset="-122"/>
                 <a:cs typeface="Trebuchet MS" pitchFamily="34" charset="-120"/>
               </a:rPr>
-              <a:t>going</a:t>
+              <a:t>go</a:t>
             </a:r>
             <a:endParaRPr lang="en-US" sz="1200" dirty="0"/>
           </a:p>
@@ -40218,7 +40374,7 @@
                 <a:ea typeface="Calibri" pitchFamily="34" charset="-122"/>
                 <a:cs typeface="Calibri" pitchFamily="34" charset="-120"/>
               </a:rPr>
-              <a:t>Therefore; because of that, this follows.</a:t>
+              <a:t>a person who attends or goes to a particular place or event regularly</a:t>
             </a:r>
             <a:endParaRPr lang="en-US" sz="1200" dirty="0"/>
           </a:p>
@@ -40291,7 +40447,7 @@
                 <a:ea typeface="Trebuchet MS" pitchFamily="34" charset="-122"/>
                 <a:cs typeface="Trebuchet MS" pitchFamily="34" charset="-120"/>
               </a:rPr>
-              <a:t>gone</a:t>
+              <a:t>goer</a:t>
             </a:r>
             <a:endParaRPr lang="en-US" sz="1200" dirty="0"/>
           </a:p>
@@ -40357,7 +40513,7 @@
                 <a:ea typeface="Calibri" pitchFamily="34" charset="-122"/>
                 <a:cs typeface="Calibri" pitchFamily="34" charset="-120"/>
               </a:rPr>
-              <a:t>Money that goes out or is spent.</a:t>
+              <a:t>moves or travels somewhere (used for he/she/it)</a:t>
             </a:r>
             <a:endParaRPr lang="en-US" sz="1200" dirty="0"/>
           </a:p>
@@ -40430,7 +40586,7 @@
                 <a:ea typeface="Trebuchet MS" pitchFamily="34" charset="-122"/>
                 <a:cs typeface="Trebuchet MS" pitchFamily="34" charset="-120"/>
               </a:rPr>
-              <a:t>outgo</a:t>
+              <a:t>goes</a:t>
             </a:r>
             <a:endParaRPr lang="en-US" sz="1200" dirty="0"/>
           </a:p>
@@ -40496,7 +40652,7 @@
                 <a:ea typeface="Calibri" pitchFamily="34" charset="-122"/>
                 <a:cs typeface="Calibri" pitchFamily="34" charset="-120"/>
               </a:rPr>
-              <a:t>To go through an experience, often a difficult one.</a:t>
+              <a:t>in the process of moving or travelling somewhere</a:t>
             </a:r>
             <a:endParaRPr lang="en-US" sz="1200" dirty="0"/>
           </a:p>
@@ -40569,7 +40725,7 @@
                 <a:ea typeface="Trebuchet MS" pitchFamily="34" charset="-122"/>
                 <a:cs typeface="Trebuchet MS" pitchFamily="34" charset="-120"/>
               </a:rPr>
-              <a:t>forego</a:t>
+              <a:t>goers</a:t>
             </a:r>
             <a:endParaRPr lang="en-US" sz="1200" dirty="0"/>
           </a:p>
@@ -40635,7 +40791,7 @@
                 <a:ea typeface="Calibri" pitchFamily="34" charset="-122"/>
                 <a:cs typeface="Calibri" pitchFamily="34" charset="-120"/>
               </a:rPr>
-              <a:t>In the past; a time that has already gone by.</a:t>
+              <a:t>something a person aims to achieve, or the target in some sports</a:t>
             </a:r>
             <a:endParaRPr lang="en-US" sz="1200" dirty="0"/>
           </a:p>
@@ -40708,7 +40864,7 @@
                 <a:ea typeface="Trebuchet MS" pitchFamily="34" charset="-122"/>
                 <a:cs typeface="Trebuchet MS" pitchFamily="34" charset="-120"/>
               </a:rPr>
-              <a:t>undergo</a:t>
+              <a:t>going</a:t>
             </a:r>
             <a:endParaRPr lang="en-US" sz="1200" dirty="0"/>
           </a:p>
@@ -40774,7 +40930,7 @@
                 <a:ea typeface="Calibri" pitchFamily="34" charset="-122"/>
                 <a:cs typeface="Calibri" pitchFamily="34" charset="-120"/>
               </a:rPr>
-              <a:t>To go before something, or to give something up.</a:t>
+              <a:t>people who attend or go to a particular place or event regularly</a:t>
             </a:r>
             <a:endParaRPr lang="en-US" sz="1200" dirty="0"/>
           </a:p>
@@ -40847,7 +41003,7 @@
                 <a:ea typeface="Trebuchet MS" pitchFamily="34" charset="-122"/>
                 <a:cs typeface="Trebuchet MS" pitchFamily="34" charset="-120"/>
               </a:rPr>
-              <a:t>ago</a:t>
+              <a:t>goal</a:t>
             </a:r>
             <a:endParaRPr lang="en-US" sz="1200" dirty="0"/>
           </a:p>
@@ -40913,146 +41069,7 @@
                 <a:ea typeface="Calibri" pitchFamily="34" charset="-122"/>
                 <a:cs typeface="Calibri" pitchFamily="34" charset="-120"/>
               </a:rPr>
-              <a:t>Moving from one place to another right now.</a:t>
-            </a:r>
-            <a:endParaRPr lang="en-US" sz="1200" dirty="0"/>
-          </a:p>
-        </p:txBody>
-      </p:sp>
-      <p:sp>
-        <p:nvSpPr>
-          <p:cNvPr id="35" name="Shape 33"/>
-          <p:cNvSpPr/>
-          <p:nvPr/>
-        </p:nvSpPr>
-        <p:spPr>
-          <a:xfrm>
-            <a:off x="365760" y="4370832"/>
-            <a:ext cx="2011680" cy="457200"/>
-          </a:xfrm>
-          <a:prstGeom prst="rect">
-            <a:avLst>
-              <a:gd name="adj" fmla="val 12000"/>
-            </a:avLst>
-          </a:prstGeom>
-          <a:solidFill>
-            <a:srgbClr val="EEF2FF"/>
-          </a:solidFill>
-          <a:ln w="12700">
-            <a:solidFill>
-              <a:srgbClr val="6366F1"/>
-            </a:solidFill>
-            <a:prstDash val="solid"/>
-          </a:ln>
-          <a:effectLst>
-            <a:outerShdw sx="100000" sy="100000" kx="0" ky="0" algn="bl" rotWithShape="0" blurRad="101600" dist="38100" dir="8100000">
-              <a:srgbClr val="000000">
-                <a:alpha val="12000"/>
-              </a:srgbClr>
-            </a:outerShdw>
-          </a:effectLst>
-        </p:spPr>
-      </p:sp>
-      <p:sp>
-        <p:nvSpPr>
-          <p:cNvPr id="36" name="Text 34"/>
-          <p:cNvSpPr/>
-          <p:nvPr/>
-        </p:nvSpPr>
-        <p:spPr>
-          <a:xfrm>
-            <a:off x="365760" y="4370832"/>
-            <a:ext cx="2011680" cy="457200"/>
-          </a:xfrm>
-          <a:prstGeom prst="rect">
-            <a:avLst/>
-          </a:prstGeom>
-          <a:noFill/>
-          <a:ln/>
-        </p:spPr>
-        <p:txBody>
-          <a:bodyPr wrap="square" lIns="0" tIns="0" rIns="0" bIns="0" rtlCol="0" anchor="ctr"/>
-          <a:lstStyle/>
-          <a:p>
-            <a:pPr algn="ctr" indent="0" marL="0">
-              <a:buNone/>
-            </a:pPr>
-            <a:r>
-              <a:rPr lang="en-US" sz="1200" b="1" dirty="0">
-                <a:solidFill>
-                  <a:srgbClr val="4338CA"/>
-                </a:solidFill>
-                <a:latin typeface="Trebuchet MS" pitchFamily="34" charset="0"/>
-                <a:ea typeface="Trebuchet MS" pitchFamily="34" charset="-122"/>
-                <a:cs typeface="Trebuchet MS" pitchFamily="34" charset="-120"/>
-              </a:rPr>
-              <a:t>ergo</a:t>
-            </a:r>
-            <a:endParaRPr lang="en-US" sz="1200" dirty="0"/>
-          </a:p>
-        </p:txBody>
-      </p:sp>
-      <p:sp>
-        <p:nvSpPr>
-          <p:cNvPr id="37" name="Shape 35"/>
-          <p:cNvSpPr/>
-          <p:nvPr/>
-        </p:nvSpPr>
-        <p:spPr>
-          <a:xfrm>
-            <a:off x="2514600" y="4370832"/>
-            <a:ext cx="6263640" cy="457200"/>
-          </a:xfrm>
-          <a:prstGeom prst="rect">
-            <a:avLst>
-              <a:gd name="adj" fmla="val 12000"/>
-            </a:avLst>
-          </a:prstGeom>
-          <a:solidFill>
-            <a:srgbClr val="F8FAFC"/>
-          </a:solidFill>
-          <a:ln w="12700">
-            <a:solidFill>
-              <a:srgbClr val="E2E8F0"/>
-            </a:solidFill>
-            <a:prstDash val="solid"/>
-          </a:ln>
-        </p:spPr>
-      </p:sp>
-      <p:sp>
-        <p:nvSpPr>
-          <p:cNvPr id="38" name="Text 36"/>
-          <p:cNvSpPr/>
-          <p:nvPr/>
-        </p:nvSpPr>
-        <p:spPr>
-          <a:xfrm>
-            <a:off x="2651760" y="4370832"/>
-            <a:ext cx="6035040" cy="457200"/>
-          </a:xfrm>
-          <a:prstGeom prst="rect">
-            <a:avLst/>
-          </a:prstGeom>
-          <a:noFill/>
-          <a:ln/>
-        </p:spPr>
-        <p:txBody>
-          <a:bodyPr wrap="square" rtlCol="0" anchor="ctr"/>
-          <a:lstStyle/>
-          <a:p>
-            <a:pPr algn="l" indent="0" marL="0">
-              <a:buNone/>
-            </a:pPr>
-            <a:r>
-              <a:rPr lang="en-US" sz="1200" dirty="0">
-                <a:solidFill>
-                  <a:srgbClr val="0F172A"/>
-                </a:solidFill>
-                <a:latin typeface="Calibri" pitchFamily="34" charset="0"/>
-                <a:ea typeface="Calibri" pitchFamily="34" charset="-122"/>
-                <a:cs typeface="Calibri" pitchFamily="34" charset="-120"/>
-              </a:rPr>
-              <a:t>Having left or moved away completely.</a:t>
+              <a:t>to move from one place towards another</a:t>
             </a:r>
             <a:endParaRPr lang="en-US" sz="1200" dirty="0"/>
           </a:p>
@@ -41344,7 +41361,7 @@
                 <a:ea typeface="Calibri" pitchFamily="34" charset="-122"/>
                 <a:cs typeface="Calibri" pitchFamily="34" charset="-120"/>
               </a:rPr>
-              <a:t>Word Labs  •  wordlabs.app  •  Root: 'go' = to move or travel</a:t>
+              <a:t>Word Labs  •  wordlabs.app  •  Root: 'go' = to move from one place to another</a:t>
             </a:r>
             <a:endParaRPr lang="en-US" sz="800" dirty="0"/>
           </a:p>
@@ -41547,7 +41564,7 @@
                 <a:ea typeface="Calibri" pitchFamily="34" charset="-122"/>
                 <a:cs typeface="Calibri" pitchFamily="34" charset="-120"/>
               </a:rPr>
-              <a:t>We will undergo special training before the big swimming carnival next month.</a:t>
+              <a:t>We need to go to the shops before it closes.</a:t>
             </a:r>
             <a:endParaRPr lang="en-US" sz="1500" dirty="0"/>
           </a:p>
@@ -41711,7 +41728,7 @@
                 <a:ea typeface="Calibri" pitchFamily="34" charset="-122"/>
                 <a:cs typeface="Calibri" pitchFamily="34" charset="-120"/>
               </a:rPr>
-              <a:t>The outgoing student president gave a wonderful speech at the assembly.</a:t>
+              <a:t>As a regular cinema-goer, she has seen hundreds of films.</a:t>
             </a:r>
             <a:endParaRPr lang="en-US" sz="1500" dirty="0"/>
           </a:p>
@@ -41875,7 +41892,7 @@
                 <a:ea typeface="Calibri" pitchFamily="34" charset="-122"/>
                 <a:cs typeface="Calibri" pitchFamily="34" charset="-120"/>
               </a:rPr>
-              <a:t>That happened so long ago that nobody in the class could remember it.</a:t>
+              <a:t>She goes to school every day.</a:t>
             </a:r>
             <a:endParaRPr lang="en-US" sz="1500" dirty="0"/>
           </a:p>
